--- a/public/files/경제투자/밸류에이션_멀티플_핵심지표.pptx
+++ b/public/files/경제투자/밸류에이션_멀티플_핵심지표.pptx
@@ -4,9 +4,6 @@
   <p:sldMasterIdLst>
     <p:sldMasterId id="2147483648" r:id="rId1"/>
   </p:sldMasterIdLst>
-  <p:notesMasterIdLst>
-    <p:notesMasterId r:id="rId18"/>
-  </p:notesMasterIdLst>
   <p:sldIdLst>
     <p:sldId id="256" r:id="rId2"/>
     <p:sldId id="257" r:id="rId3"/>
@@ -25,8 +22,11 @@
     <p:sldId id="270" r:id="rId16"/>
     <p:sldId id="271" r:id="rId17"/>
   </p:sldIdLst>
-  <p:sldSz cx="12192000" cy="6858000"/>
-  <p:notesSz cx="6858000" cy="12192000"/>
+  <p:notesMasterIdLst>
+    <p:notesMasterId r:id="rId18"/>
+  </p:notesMasterIdLst>
+  <p:sldSz cx="12191695" cy="6858000"/>
+  <p:notesSz cx="6858000" cy="12191695"/>
   <p:defaultTextStyle>
     <a:lvl1pPr marL="0" algn="l" defTabSz="914400" rtl="0" eaLnBrk="1" latinLnBrk="0" hangingPunct="1">
       <a:defRPr sz="1800" kern="1200">
@@ -119,11 +119,6 @@
       </a:defRPr>
     </a:lvl9pPr>
   </p:defaultTextStyle>
-  <p:extLst>
-    <p:ext uri="{EFAFB233-063F-42B5-8137-9DF3F51BA10A}">
-      <p15:sldGuideLst xmlns:p15="http://schemas.microsoft.com/office/powerpoint/2012/main"/>
-    </p:ext>
-  </p:extLst>
 </p:presentation>
 </file>
 
@@ -149,16 +144,240 @@
           <a:chExt cx="0" cy="0"/>
         </a:xfrm>
       </p:grpSpPr>
+      <p:sp>
+        <p:nvSpPr>
+          <p:cNvPr id="2" name="Header Placeholder 1"/>
+          <p:cNvSpPr>
+            <a:spLocks noGrp="1"/>
+          </p:cNvSpPr>
+          <p:nvPr>
+            <p:ph type="hdr" sz="quarter"/>
+          </p:nvPr>
+        </p:nvSpPr>
+        <p:spPr>
+          <a:xfrm>
+            <a:off x="0" y="0"/>
+            <a:ext cx="2971800" cy="458788"/>
+          </a:xfrm>
+          <a:prstGeom prst="rect">
+            <a:avLst/>
+          </a:prstGeom>
+        </p:spPr>
+        <p:txBody>
+          <a:bodyPr vert="horz" lIns="91440" tIns="45720" rIns="91440" bIns="45720" rtlCol="0"/>
+          <a:lstStyle>
+            <a:lvl1pPr algn="l">
+              <a:defRPr sz="1200"/>
+            </a:lvl1pPr>
+          </a:lstStyle>
+          <a:p>
+            <a:endParaRPr lang="en-US"/>
+          </a:p>
+        </p:txBody>
+      </p:sp>
+      <p:sp>
+        <p:nvSpPr>
+          <p:cNvPr id="3" name="Date Placeholder 2"/>
+          <p:cNvSpPr>
+            <a:spLocks noGrp="1"/>
+          </p:cNvSpPr>
+          <p:nvPr>
+            <p:ph type="dt" idx="1"/>
+          </p:nvPr>
+        </p:nvSpPr>
+        <p:spPr>
+          <a:xfrm>
+            <a:off x="3884613" y="0"/>
+            <a:ext cx="2971800" cy="458788"/>
+          </a:xfrm>
+          <a:prstGeom prst="rect">
+            <a:avLst/>
+          </a:prstGeom>
+        </p:spPr>
+        <p:txBody>
+          <a:bodyPr vert="horz" lIns="91440" tIns="45720" rIns="91440" bIns="45720" rtlCol="0"/>
+          <a:lstStyle>
+            <a:lvl1pPr algn="r">
+              <a:defRPr sz="1200"/>
+            </a:lvl1pPr>
+          </a:lstStyle>
+          <a:p>
+            <a:fld id="{5282F153-3F37-0F45-9E97-73ACFA13230C}" type="datetimeFigureOut">
+              <a:rPr lang="en-US"/>
+              <a:t>7/23/19</a:t>
+            </a:fld>
+            <a:endParaRPr lang="en-US"/>
+          </a:p>
+        </p:txBody>
+      </p:sp>
+      <p:sp>
+        <p:nvSpPr>
+          <p:cNvPr id="4" name="Slide Image Placeholder 3"/>
+          <p:cNvSpPr>
+            <a:spLocks noGrp="1" noRot="1" noChangeAspect="1"/>
+          </p:cNvSpPr>
+          <p:nvPr>
+            <p:ph type="sldImg" idx="2"/>
+          </p:nvPr>
+        </p:nvSpPr>
+        <p:spPr>
+          <a:xfrm>
+            <a:off x="685800" y="1143000"/>
+            <a:ext cx="5486400" cy="3086100"/>
+          </a:xfrm>
+          <a:prstGeom prst="rect">
+            <a:avLst/>
+          </a:prstGeom>
+          <a:noFill/>
+          <a:ln w="12700">
+            <a:solidFill>
+              <a:prstClr val="black"/>
+            </a:solidFill>
+          </a:ln>
+        </p:spPr>
+        <p:txBody>
+          <a:bodyPr vert="horz" lIns="91440" tIns="45720" rIns="91440" bIns="45720" rtlCol="0" anchor="ctr"/>
+          <a:lstStyle/>
+          <a:p>
+            <a:endParaRPr lang="en-US"/>
+          </a:p>
+        </p:txBody>
+      </p:sp>
+      <p:sp>
+        <p:nvSpPr>
+          <p:cNvPr id="5" name="Notes Placeholder 4"/>
+          <p:cNvSpPr>
+            <a:spLocks noGrp="1"/>
+          </p:cNvSpPr>
+          <p:nvPr>
+            <p:ph type="body" sz="quarter" idx="3"/>
+          </p:nvPr>
+        </p:nvSpPr>
+        <p:spPr>
+          <a:xfrm>
+            <a:off x="685800" y="4400550"/>
+            <a:ext cx="5486400" cy="3600450"/>
+          </a:xfrm>
+          <a:prstGeom prst="rect">
+            <a:avLst/>
+          </a:prstGeom>
+        </p:spPr>
+        <p:txBody>
+          <a:bodyPr vert="horz" lIns="91440" tIns="45720" rIns="91440" bIns="45720" rtlCol="0"/>
+          <a:lstStyle/>
+          <a:p>
+            <a:pPr lvl="0"/>
+            <a:r>
+              <a:rPr lang="en-US"/>
+              <a:t>Click to edit Master text styles</a:t>
+            </a:r>
+          </a:p>
+          <a:p>
+            <a:pPr lvl="1"/>
+            <a:r>
+              <a:rPr lang="en-US"/>
+              <a:t>Second level</a:t>
+            </a:r>
+          </a:p>
+          <a:p>
+            <a:pPr lvl="2"/>
+            <a:r>
+              <a:rPr lang="en-US"/>
+              <a:t>Third level</a:t>
+            </a:r>
+          </a:p>
+          <a:p>
+            <a:pPr lvl="3"/>
+            <a:r>
+              <a:rPr lang="en-US"/>
+              <a:t>Fourth level</a:t>
+            </a:r>
+          </a:p>
+          <a:p>
+            <a:pPr lvl="4"/>
+            <a:r>
+              <a:rPr lang="en-US"/>
+              <a:t>Fifth level</a:t>
+            </a:r>
+          </a:p>
+        </p:txBody>
+      </p:sp>
+      <p:sp>
+        <p:nvSpPr>
+          <p:cNvPr id="6" name="Footer Placeholder 5"/>
+          <p:cNvSpPr>
+            <a:spLocks noGrp="1"/>
+          </p:cNvSpPr>
+          <p:nvPr>
+            <p:ph type="ftr" sz="quarter" idx="4"/>
+          </p:nvPr>
+        </p:nvSpPr>
+        <p:spPr>
+          <a:xfrm>
+            <a:off x="0" y="8685213"/>
+            <a:ext cx="2971800" cy="458787"/>
+          </a:xfrm>
+          <a:prstGeom prst="rect">
+            <a:avLst/>
+          </a:prstGeom>
+        </p:spPr>
+        <p:txBody>
+          <a:bodyPr vert="horz" lIns="91440" tIns="45720" rIns="91440" bIns="45720" rtlCol="0" anchor="b"/>
+          <a:lstStyle>
+            <a:lvl1pPr algn="l">
+              <a:defRPr sz="1200"/>
+            </a:lvl1pPr>
+          </a:lstStyle>
+          <a:p>
+            <a:endParaRPr lang="en-US"/>
+          </a:p>
+        </p:txBody>
+      </p:sp>
+      <p:sp>
+        <p:nvSpPr>
+          <p:cNvPr id="7" name="Slide Number Placeholder 6"/>
+          <p:cNvSpPr>
+            <a:spLocks noGrp="1"/>
+          </p:cNvSpPr>
+          <p:nvPr>
+            <p:ph type="sldNum" sz="quarter" idx="5"/>
+          </p:nvPr>
+        </p:nvSpPr>
+        <p:spPr>
+          <a:xfrm>
+            <a:off x="3884613" y="8685213"/>
+            <a:ext cx="2971800" cy="458787"/>
+          </a:xfrm>
+          <a:prstGeom prst="rect">
+            <a:avLst/>
+          </a:prstGeom>
+        </p:spPr>
+        <p:txBody>
+          <a:bodyPr vert="horz" lIns="91440" tIns="45720" rIns="91440" bIns="45720" rtlCol="0" anchor="b"/>
+          <a:lstStyle>
+            <a:lvl1pPr algn="r">
+              <a:defRPr sz="1200"/>
+            </a:lvl1pPr>
+          </a:lstStyle>
+          <a:p>
+            <a:fld id="{CE5E9CC1-C706-0F49-92D6-E571CC5EEA8F}" type="slidenum">
+              <a:rPr lang="en-US"/>
+              <a:t>‹#›</a:t>
+            </a:fld>
+            <a:endParaRPr lang="en-US"/>
+          </a:p>
+        </p:txBody>
+      </p:sp>
     </p:spTree>
     <p:extLst>
       <p:ext uri="{BB962C8B-B14F-4D97-AF65-F5344CB8AC3E}">
-        <p14:creationId xmlns:p14="http://schemas.microsoft.com/office/powerpoint/2010/main" val="1055675771"/>
+        <p14:creationId xmlns:p14="http://schemas.microsoft.com/office/powerpoint/2010/main" val="1024086991"/>
       </p:ext>
     </p:extLst>
   </p:cSld>
   <p:clrMap bg1="lt1" tx1="dk1" bg2="lt2" tx2="dk2" accent1="accent1" accent2="accent2" accent3="accent3" accent4="accent4" accent5="accent5" accent6="accent6" hlink="hlink" folHlink="folHlink"/>
   <p:notesStyle>
-    <a:lvl1pPr marL="0" algn="l" defTabSz="914400" rtl="0" eaLnBrk="1" latinLnBrk="1" hangingPunct="1">
+    <a:lvl1pPr marL="0" algn="l" defTabSz="914400" rtl="0" eaLnBrk="1" latinLnBrk="0" hangingPunct="1">
       <a:defRPr sz="1200" kern="1200">
         <a:solidFill>
           <a:schemeClr val="tx1"/>
@@ -168,7 +387,7 @@
         <a:cs typeface="+mn-cs"/>
       </a:defRPr>
     </a:lvl1pPr>
-    <a:lvl2pPr marL="457200" algn="l" defTabSz="914400" rtl="0" eaLnBrk="1" latinLnBrk="1" hangingPunct="1">
+    <a:lvl2pPr marL="457200" algn="l" defTabSz="914400" rtl="0" eaLnBrk="1" latinLnBrk="0" hangingPunct="1">
       <a:defRPr sz="1200" kern="1200">
         <a:solidFill>
           <a:schemeClr val="tx1"/>
@@ -178,7 +397,7 @@
         <a:cs typeface="+mn-cs"/>
       </a:defRPr>
     </a:lvl2pPr>
-    <a:lvl3pPr marL="914400" algn="l" defTabSz="914400" rtl="0" eaLnBrk="1" latinLnBrk="1" hangingPunct="1">
+    <a:lvl3pPr marL="914400" algn="l" defTabSz="914400" rtl="0" eaLnBrk="1" latinLnBrk="0" hangingPunct="1">
       <a:defRPr sz="1200" kern="1200">
         <a:solidFill>
           <a:schemeClr val="tx1"/>
@@ -188,7 +407,7 @@
         <a:cs typeface="+mn-cs"/>
       </a:defRPr>
     </a:lvl3pPr>
-    <a:lvl4pPr marL="1371600" algn="l" defTabSz="914400" rtl="0" eaLnBrk="1" latinLnBrk="1" hangingPunct="1">
+    <a:lvl4pPr marL="1371600" algn="l" defTabSz="914400" rtl="0" eaLnBrk="1" latinLnBrk="0" hangingPunct="1">
       <a:defRPr sz="1200" kern="1200">
         <a:solidFill>
           <a:schemeClr val="tx1"/>
@@ -198,7 +417,7 @@
         <a:cs typeface="+mn-cs"/>
       </a:defRPr>
     </a:lvl4pPr>
-    <a:lvl5pPr marL="1828800" algn="l" defTabSz="914400" rtl="0" eaLnBrk="1" latinLnBrk="1" hangingPunct="1">
+    <a:lvl5pPr marL="1828800" algn="l" defTabSz="914400" rtl="0" eaLnBrk="1" latinLnBrk="0" hangingPunct="1">
       <a:defRPr sz="1200" kern="1200">
         <a:solidFill>
           <a:schemeClr val="tx1"/>
@@ -208,7 +427,7 @@
         <a:cs typeface="+mn-cs"/>
       </a:defRPr>
     </a:lvl5pPr>
-    <a:lvl6pPr marL="2286000" algn="l" defTabSz="914400" rtl="0" eaLnBrk="1" latinLnBrk="1" hangingPunct="1">
+    <a:lvl6pPr marL="2286000" algn="l" defTabSz="914400" rtl="0" eaLnBrk="1" latinLnBrk="0" hangingPunct="1">
       <a:defRPr sz="1200" kern="1200">
         <a:solidFill>
           <a:schemeClr val="tx1"/>
@@ -218,7 +437,7 @@
         <a:cs typeface="+mn-cs"/>
       </a:defRPr>
     </a:lvl6pPr>
-    <a:lvl7pPr marL="2743200" algn="l" defTabSz="914400" rtl="0" eaLnBrk="1" latinLnBrk="1" hangingPunct="1">
+    <a:lvl7pPr marL="2743200" algn="l" defTabSz="914400" rtl="0" eaLnBrk="1" latinLnBrk="0" hangingPunct="1">
       <a:defRPr sz="1200" kern="1200">
         <a:solidFill>
           <a:schemeClr val="tx1"/>
@@ -228,7 +447,7 @@
         <a:cs typeface="+mn-cs"/>
       </a:defRPr>
     </a:lvl7pPr>
-    <a:lvl8pPr marL="3200400" algn="l" defTabSz="914400" rtl="0" eaLnBrk="1" latinLnBrk="1" hangingPunct="1">
+    <a:lvl8pPr marL="3200400" algn="l" defTabSz="914400" rtl="0" eaLnBrk="1" latinLnBrk="0" hangingPunct="1">
       <a:defRPr sz="1200" kern="1200">
         <a:solidFill>
           <a:schemeClr val="tx1"/>
@@ -238,7 +457,7 @@
         <a:cs typeface="+mn-cs"/>
       </a:defRPr>
     </a:lvl8pPr>
-    <a:lvl9pPr marL="3657600" algn="l" defTabSz="914400" rtl="0" eaLnBrk="1" latinLnBrk="1" hangingPunct="1">
+    <a:lvl9pPr marL="3657600" algn="l" defTabSz="914400" rtl="0" eaLnBrk="1" latinLnBrk="0" hangingPunct="1">
       <a:defRPr sz="1200" kern="1200">
         <a:solidFill>
           <a:schemeClr val="tx1"/>
@@ -296,6 +515,10 @@
           <a:bodyPr/>
           <a:lstStyle/>
           <a:p>
+            <a:r>
+              <a:rPr lang="en-US" dirty="0"/>
+              <a:t/>
+            </a:r>
             <a:endParaRPr lang="en-US" dirty="0"/>
           </a:p>
         </p:txBody>
@@ -380,6 +603,10 @@
           <a:bodyPr/>
           <a:lstStyle/>
           <a:p>
+            <a:r>
+              <a:rPr lang="en-US" dirty="0"/>
+              <a:t/>
+            </a:r>
             <a:endParaRPr lang="en-US" dirty="0"/>
           </a:p>
         </p:txBody>
@@ -464,6 +691,10 @@
           <a:bodyPr/>
           <a:lstStyle/>
           <a:p>
+            <a:r>
+              <a:rPr lang="en-US" dirty="0"/>
+              <a:t/>
+            </a:r>
             <a:endParaRPr lang="en-US" dirty="0"/>
           </a:p>
         </p:txBody>
@@ -548,6 +779,10 @@
           <a:bodyPr/>
           <a:lstStyle/>
           <a:p>
+            <a:r>
+              <a:rPr lang="en-US" dirty="0"/>
+              <a:t/>
+            </a:r>
             <a:endParaRPr lang="en-US" dirty="0"/>
           </a:p>
         </p:txBody>
@@ -632,6 +867,10 @@
           <a:bodyPr/>
           <a:lstStyle/>
           <a:p>
+            <a:r>
+              <a:rPr lang="en-US" dirty="0"/>
+              <a:t/>
+            </a:r>
             <a:endParaRPr lang="en-US" dirty="0"/>
           </a:p>
         </p:txBody>
@@ -716,6 +955,10 @@
           <a:bodyPr/>
           <a:lstStyle/>
           <a:p>
+            <a:r>
+              <a:rPr lang="en-US" dirty="0"/>
+              <a:t/>
+            </a:r>
             <a:endParaRPr lang="en-US" dirty="0"/>
           </a:p>
         </p:txBody>
@@ -800,6 +1043,10 @@
           <a:bodyPr/>
           <a:lstStyle/>
           <a:p>
+            <a:r>
+              <a:rPr lang="en-US" dirty="0"/>
+              <a:t/>
+            </a:r>
             <a:endParaRPr lang="en-US" dirty="0"/>
           </a:p>
         </p:txBody>
@@ -884,6 +1131,10 @@
           <a:bodyPr/>
           <a:lstStyle/>
           <a:p>
+            <a:r>
+              <a:rPr lang="en-US" dirty="0"/>
+              <a:t/>
+            </a:r>
             <a:endParaRPr lang="en-US" dirty="0"/>
           </a:p>
         </p:txBody>
@@ -968,6 +1219,10 @@
           <a:bodyPr/>
           <a:lstStyle/>
           <a:p>
+            <a:r>
+              <a:rPr lang="en-US" dirty="0"/>
+              <a:t/>
+            </a:r>
             <a:endParaRPr lang="en-US" dirty="0"/>
           </a:p>
         </p:txBody>
@@ -1052,6 +1307,10 @@
           <a:bodyPr/>
           <a:lstStyle/>
           <a:p>
+            <a:r>
+              <a:rPr lang="en-US" dirty="0"/>
+              <a:t/>
+            </a:r>
             <a:endParaRPr lang="en-US" dirty="0"/>
           </a:p>
         </p:txBody>
@@ -1136,6 +1395,10 @@
           <a:bodyPr/>
           <a:lstStyle/>
           <a:p>
+            <a:r>
+              <a:rPr lang="en-US" dirty="0"/>
+              <a:t/>
+            </a:r>
             <a:endParaRPr lang="en-US" dirty="0"/>
           </a:p>
         </p:txBody>
@@ -1220,6 +1483,10 @@
           <a:bodyPr/>
           <a:lstStyle/>
           <a:p>
+            <a:r>
+              <a:rPr lang="en-US" dirty="0"/>
+              <a:t/>
+            </a:r>
             <a:endParaRPr lang="en-US" dirty="0"/>
           </a:p>
         </p:txBody>
@@ -1304,6 +1571,10 @@
           <a:bodyPr/>
           <a:lstStyle/>
           <a:p>
+            <a:r>
+              <a:rPr lang="en-US" dirty="0"/>
+              <a:t/>
+            </a:r>
             <a:endParaRPr lang="en-US" dirty="0"/>
           </a:p>
         </p:txBody>
@@ -1388,6 +1659,10 @@
           <a:bodyPr/>
           <a:lstStyle/>
           <a:p>
+            <a:r>
+              <a:rPr lang="en-US" dirty="0"/>
+              <a:t/>
+            </a:r>
             <a:endParaRPr lang="en-US" dirty="0"/>
           </a:p>
         </p:txBody>
@@ -1472,6 +1747,10 @@
           <a:bodyPr/>
           <a:lstStyle/>
           <a:p>
+            <a:r>
+              <a:rPr lang="en-US" dirty="0"/>
+              <a:t/>
+            </a:r>
             <a:endParaRPr lang="en-US" dirty="0"/>
           </a:p>
         </p:txBody>
@@ -1556,6 +1835,10 @@
           <a:bodyPr/>
           <a:lstStyle/>
           <a:p>
+            <a:r>
+              <a:rPr lang="en-US" dirty="0"/>
+              <a:t/>
+            </a:r>
             <a:endParaRPr lang="en-US" dirty="0"/>
           </a:p>
         </p:txBody>
@@ -1629,11 +1912,6 @@
 <file path=ppt/slideMasters/slideMaster1.xml><?xml version="1.0" encoding="utf-8"?>
 <p:sldMaster xmlns:a="http://schemas.openxmlformats.org/drawingml/2006/main" xmlns:r="http://schemas.openxmlformats.org/officeDocument/2006/relationships" xmlns:p="http://schemas.openxmlformats.org/presentationml/2006/main">
   <p:cSld>
-    <p:bg>
-      <p:bgRef idx="1001">
-        <a:schemeClr val="bg1"/>
-      </p:bgRef>
-    </p:bg>
     <p:spTree>
       <p:nvGrpSpPr>
         <p:cNvPr id="1" name=""/>
@@ -1916,7 +2194,6 @@
         <a:solidFill>
           <a:srgbClr val="FFFFFF"/>
         </a:solidFill>
-        <a:effectLst/>
       </p:bgPr>
     </p:bg>
     <p:spTree>
@@ -1952,13 +2229,6 @@
           </a:solidFill>
           <a:ln/>
         </p:spPr>
-        <p:txBody>
-          <a:bodyPr/>
-          <a:lstStyle/>
-          <a:p>
-            <a:endParaRPr lang="ko-KR" altLang="en-US"/>
-          </a:p>
-        </p:txBody>
       </p:sp>
       <p:sp>
         <p:nvSpPr>
@@ -1981,11 +2251,11 @@
           <a:bodyPr wrap="square" rtlCol="0" anchor="ctr"/>
           <a:lstStyle/>
           <a:p>
-            <a:pPr marL="0" indent="0">
-              <a:buNone/>
-            </a:pPr>
-            <a:r>
-              <a:rPr lang="en-US" sz="1600" b="1" kern="0" spc="300" dirty="0">
+            <a:pPr indent="0" marL="0">
+              <a:buNone/>
+            </a:pPr>
+            <a:r>
+              <a:rPr lang="en-US" sz="1600" b="1" spc="300" kern="0" dirty="0">
                 <a:solidFill>
                   <a:srgbClr val="9C7A0A"/>
                 </a:solidFill>
@@ -2020,7 +2290,7 @@
           <a:bodyPr wrap="square" rtlCol="0" anchor="ctr"/>
           <a:lstStyle/>
           <a:p>
-            <a:pPr marL="0" indent="0">
+            <a:pPr indent="0" marL="0">
               <a:buNone/>
             </a:pPr>
             <a:r>
@@ -2059,11 +2329,11 @@
           <a:bodyPr wrap="square" rtlCol="0" anchor="ctr"/>
           <a:lstStyle/>
           <a:p>
-            <a:pPr marL="0" indent="0">
-              <a:buNone/>
-            </a:pPr>
-            <a:r>
-              <a:rPr lang="en-US" sz="2000" b="1" dirty="0">
+            <a:pPr indent="0" marL="0">
+              <a:buNone/>
+            </a:pPr>
+            <a:r>
+              <a:rPr lang="en-US" sz="1800" dirty="0">
                 <a:solidFill>
                   <a:srgbClr val="5A5F73"/>
                 </a:solidFill>
@@ -2073,7 +2343,7 @@
               </a:rPr>
               <a:t>적정주가는 어떻게 계산되는가 — 멀티플, DCF, 그리고 EPS·PER·PBR·PSR·EV·EBITDA</a:t>
             </a:r>
-            <a:endParaRPr lang="en-US" sz="2000" b="1" dirty="0"/>
+            <a:endParaRPr lang="en-US" sz="1800" dirty="0"/>
           </a:p>
         </p:txBody>
       </p:sp>
@@ -2098,7 +2368,7 @@
           <a:bodyPr wrap="square" rtlCol="0" anchor="ctr"/>
           <a:lstStyle/>
           <a:p>
-            <a:pPr marL="0" indent="0">
+            <a:pPr indent="0" marL="0">
               <a:buNone/>
             </a:pPr>
             <a:r>
@@ -2132,7 +2402,6 @@
         <a:solidFill>
           <a:srgbClr val="FFFFFF"/>
         </a:solidFill>
-        <a:effectLst/>
       </p:bgPr>
     </p:bg>
     <p:spTree>
@@ -2170,11 +2439,11 @@
           <a:bodyPr wrap="square" rtlCol="0" anchor="ctr"/>
           <a:lstStyle/>
           <a:p>
-            <a:pPr marL="0" indent="0">
-              <a:buNone/>
-            </a:pPr>
-            <a:r>
-              <a:rPr lang="en-US" sz="1300" b="1" kern="0" spc="200" dirty="0">
+            <a:pPr indent="0" marL="0">
+              <a:buNone/>
+            </a:pPr>
+            <a:r>
+              <a:rPr lang="en-US" sz="1300" b="1" spc="200" kern="0" dirty="0">
                 <a:solidFill>
                   <a:srgbClr val="9C7A0A"/>
                 </a:solidFill>
@@ -2209,7 +2478,7 @@
           <a:bodyPr wrap="square" rtlCol="0" anchor="ctr"/>
           <a:lstStyle/>
           <a:p>
-            <a:pPr marL="0" indent="0" algn="l">
+            <a:pPr algn="l" indent="0" marL="0">
               <a:buNone/>
             </a:pPr>
             <a:r>
@@ -2248,11 +2517,11 @@
           <a:bodyPr wrap="square" rtlCol="0" anchor="ctr"/>
           <a:lstStyle/>
           <a:p>
-            <a:pPr marL="0" indent="0">
-              <a:buNone/>
-            </a:pPr>
-            <a:r>
-              <a:rPr lang="en-US" dirty="0">
+            <a:pPr indent="0" marL="0">
+              <a:buNone/>
+            </a:pPr>
+            <a:r>
+              <a:rPr lang="en-US" sz="1500" dirty="0">
                 <a:solidFill>
                   <a:srgbClr val="5A5F73"/>
                 </a:solidFill>
@@ -2262,7 +2531,7 @@
               </a:rPr>
               <a:t>기업이 벌어들인 순이익을 발행주식수로 나눈 값. “주식 1주당 얼마의 이익을 냈는가”</a:t>
             </a:r>
-            <a:endParaRPr lang="en-US" dirty="0"/>
+            <a:endParaRPr lang="en-US" sz="1500" dirty="0"/>
           </a:p>
         </p:txBody>
       </p:sp>
@@ -2292,13 +2561,6 @@
             <a:prstDash val="solid"/>
           </a:ln>
         </p:spPr>
-        <p:txBody>
-          <a:bodyPr/>
-          <a:lstStyle/>
-          <a:p>
-            <a:endParaRPr lang="ko-KR" altLang="en-US" sz="2400"/>
-          </a:p>
-        </p:txBody>
       </p:sp>
       <p:sp>
         <p:nvSpPr>
@@ -2321,11 +2583,11 @@
           <a:bodyPr wrap="square" rtlCol="0" anchor="ctr"/>
           <a:lstStyle/>
           <a:p>
-            <a:pPr marL="0" indent="0">
-              <a:buNone/>
-            </a:pPr>
-            <a:r>
-              <a:rPr lang="en-US" sz="1600" b="1" dirty="0">
+            <a:pPr indent="0" marL="0">
+              <a:buNone/>
+            </a:pPr>
+            <a:r>
+              <a:rPr lang="en-US" sz="1250" b="1" dirty="0">
                 <a:solidFill>
                   <a:srgbClr val="9C7A0A"/>
                 </a:solidFill>
@@ -2335,7 +2597,7 @@
               </a:rPr>
               <a:t>계산식</a:t>
             </a:r>
-            <a:endParaRPr lang="en-US" sz="1600" dirty="0"/>
+            <a:endParaRPr lang="en-US" sz="1250" dirty="0"/>
           </a:p>
         </p:txBody>
       </p:sp>
@@ -2360,11 +2622,11 @@
           <a:bodyPr wrap="square" rtlCol="0" anchor="t"/>
           <a:lstStyle/>
           <a:p>
-            <a:pPr marL="0" indent="0">
-              <a:buNone/>
-            </a:pPr>
-            <a:r>
-              <a:rPr lang="en-US" sz="2400" b="1" dirty="0">
+            <a:pPr indent="0" marL="0">
+              <a:buNone/>
+            </a:pPr>
+            <a:r>
+              <a:rPr lang="en-US" sz="1900" b="1" dirty="0">
                 <a:solidFill>
                   <a:srgbClr val="1E2761"/>
                 </a:solidFill>
@@ -2374,14 +2636,14 @@
               </a:rPr>
               <a:t>EPS = 당기순이익</a:t>
             </a:r>
-            <a:endParaRPr lang="en-US" sz="2400" dirty="0"/>
-          </a:p>
-          <a:p>
-            <a:pPr marL="0" indent="0">
-              <a:buNone/>
-            </a:pPr>
-            <a:r>
-              <a:rPr lang="en-US" sz="2400" b="1" dirty="0">
+            <a:endParaRPr lang="en-US" sz="1900" dirty="0"/>
+          </a:p>
+          <a:p>
+            <a:pPr indent="0" marL="0">
+              <a:buNone/>
+            </a:pPr>
+            <a:r>
+              <a:rPr lang="en-US" sz="1900" b="1" dirty="0">
                 <a:solidFill>
                   <a:srgbClr val="1E2761"/>
                 </a:solidFill>
@@ -2391,7 +2653,7 @@
               </a:rPr>
               <a:t>÷ 발행주식수</a:t>
             </a:r>
-            <a:endParaRPr lang="en-US" sz="2400" dirty="0"/>
+            <a:endParaRPr lang="en-US" sz="1900" dirty="0"/>
           </a:p>
         </p:txBody>
       </p:sp>
@@ -2421,13 +2683,6 @@
             <a:prstDash val="solid"/>
           </a:ln>
         </p:spPr>
-        <p:txBody>
-          <a:bodyPr/>
-          <a:lstStyle/>
-          <a:p>
-            <a:endParaRPr lang="ko-KR" altLang="en-US" sz="2400"/>
-          </a:p>
-        </p:txBody>
       </p:sp>
       <p:sp>
         <p:nvSpPr>
@@ -2450,11 +2705,11 @@
           <a:bodyPr wrap="square" rtlCol="0" anchor="ctr"/>
           <a:lstStyle/>
           <a:p>
-            <a:pPr marL="0" indent="0">
-              <a:buNone/>
-            </a:pPr>
-            <a:r>
-              <a:rPr lang="en-US" sz="1600" b="1" dirty="0">
+            <a:pPr indent="0" marL="0">
+              <a:buNone/>
+            </a:pPr>
+            <a:r>
+              <a:rPr lang="en-US" sz="1250" b="1" dirty="0">
                 <a:solidFill>
                   <a:srgbClr val="9C7A0A"/>
                 </a:solidFill>
@@ -2464,7 +2719,7 @@
               </a:rPr>
               <a:t>숫자 예시</a:t>
             </a:r>
-            <a:endParaRPr lang="en-US" sz="1600" dirty="0"/>
+            <a:endParaRPr lang="en-US" sz="1250" dirty="0"/>
           </a:p>
         </p:txBody>
       </p:sp>
@@ -2489,14 +2744,14 @@
           <a:bodyPr wrap="square" rtlCol="0" anchor="t"/>
           <a:lstStyle/>
           <a:p>
-            <a:pPr marL="0" indent="0">
+            <a:pPr indent="0" marL="0">
               <a:lnSpc>
                 <a:spcPct val="130000"/>
               </a:lnSpc>
               <a:buNone/>
             </a:pPr>
             <a:r>
-              <a:rPr lang="en-US" dirty="0">
+              <a:rPr lang="en-US" sz="1500" dirty="0">
                 <a:solidFill>
                   <a:srgbClr val="222633"/>
                 </a:solidFill>
@@ -2506,17 +2761,17 @@
               </a:rPr>
               <a:t>A기업 당기순이익: 1,000억 원</a:t>
             </a:r>
-            <a:endParaRPr lang="en-US" dirty="0"/>
-          </a:p>
-          <a:p>
-            <a:pPr marL="0" indent="0">
+            <a:endParaRPr lang="en-US" sz="1500" dirty="0"/>
+          </a:p>
+          <a:p>
+            <a:pPr indent="0" marL="0">
               <a:lnSpc>
                 <a:spcPct val="130000"/>
               </a:lnSpc>
               <a:buNone/>
             </a:pPr>
             <a:r>
-              <a:rPr lang="en-US" dirty="0">
+              <a:rPr lang="en-US" sz="1500" dirty="0">
                 <a:solidFill>
                   <a:srgbClr val="222633"/>
                 </a:solidFill>
@@ -2526,26 +2781,26 @@
               </a:rPr>
               <a:t>A기업 발행주식수: 2,000만 주</a:t>
             </a:r>
-            <a:endParaRPr lang="en-US" dirty="0"/>
-          </a:p>
-          <a:p>
-            <a:pPr marL="0" indent="0">
+            <a:endParaRPr lang="en-US" sz="1500" dirty="0"/>
+          </a:p>
+          <a:p>
+            <a:pPr indent="0" marL="0">
               <a:lnSpc>
                 <a:spcPct val="130000"/>
               </a:lnSpc>
               <a:buNone/>
             </a:pPr>
-            <a:endParaRPr lang="en-US" dirty="0"/>
-          </a:p>
-          <a:p>
-            <a:pPr marL="0" indent="0">
+            <a:endParaRPr lang="en-US" sz="1500" dirty="0"/>
+          </a:p>
+          <a:p>
+            <a:pPr indent="0" marL="0">
               <a:lnSpc>
                 <a:spcPct val="130000"/>
               </a:lnSpc>
               <a:buNone/>
             </a:pPr>
             <a:r>
-              <a:rPr lang="en-US" dirty="0">
+              <a:rPr lang="en-US" sz="1500" dirty="0">
                 <a:solidFill>
                   <a:srgbClr val="222633"/>
                 </a:solidFill>
@@ -2555,17 +2810,17 @@
               </a:rPr>
               <a:t>EPS = 1,000억 원 ÷ 2,000만 주</a:t>
             </a:r>
-            <a:endParaRPr lang="en-US" dirty="0"/>
-          </a:p>
-          <a:p>
-            <a:pPr marL="0" indent="0">
+            <a:endParaRPr lang="en-US" sz="1500" dirty="0"/>
+          </a:p>
+          <a:p>
+            <a:pPr indent="0" marL="0">
               <a:lnSpc>
                 <a:spcPct val="130000"/>
               </a:lnSpc>
               <a:buNone/>
             </a:pPr>
             <a:r>
-              <a:rPr lang="en-US" dirty="0">
+              <a:rPr lang="en-US" sz="1500" dirty="0">
                 <a:solidFill>
                   <a:srgbClr val="222633"/>
                 </a:solidFill>
@@ -2575,7 +2830,7 @@
               </a:rPr>
               <a:t>= 5,000원</a:t>
             </a:r>
-            <a:endParaRPr lang="en-US" dirty="0"/>
+            <a:endParaRPr lang="en-US" sz="1500" dirty="0"/>
           </a:p>
         </p:txBody>
       </p:sp>
@@ -2605,13 +2860,6 @@
             <a:prstDash val="solid"/>
           </a:ln>
         </p:spPr>
-        <p:txBody>
-          <a:bodyPr/>
-          <a:lstStyle/>
-          <a:p>
-            <a:endParaRPr lang="ko-KR" altLang="en-US" sz="2400"/>
-          </a:p>
-        </p:txBody>
       </p:sp>
       <p:sp>
         <p:nvSpPr>
@@ -2634,11 +2882,11 @@
           <a:bodyPr wrap="square" rtlCol="0" anchor="ctr"/>
           <a:lstStyle/>
           <a:p>
-            <a:pPr marL="0" indent="0">
-              <a:buNone/>
-            </a:pPr>
-            <a:r>
-              <a:rPr lang="en-US" sz="1600" b="1" dirty="0">
+            <a:pPr indent="0" marL="0">
+              <a:buNone/>
+            </a:pPr>
+            <a:r>
+              <a:rPr lang="en-US" sz="1250" b="1" dirty="0">
                 <a:solidFill>
                   <a:srgbClr val="1E2761"/>
                 </a:solidFill>
@@ -2648,7 +2896,7 @@
               </a:rPr>
               <a:t>해석</a:t>
             </a:r>
-            <a:endParaRPr lang="en-US" sz="1600" dirty="0"/>
+            <a:endParaRPr lang="en-US" sz="1250" dirty="0"/>
           </a:p>
         </p:txBody>
       </p:sp>
@@ -2673,11 +2921,11 @@
           <a:bodyPr wrap="square" rtlCol="0" anchor="t"/>
           <a:lstStyle/>
           <a:p>
-            <a:pPr marL="0" indent="0">
-              <a:buNone/>
-            </a:pPr>
-            <a:r>
-              <a:rPr lang="en-US" dirty="0">
+            <a:pPr indent="0" marL="0">
+              <a:buNone/>
+            </a:pPr>
+            <a:r>
+              <a:rPr lang="en-US" sz="1400" dirty="0">
                 <a:solidFill>
                   <a:srgbClr val="222633"/>
                 </a:solidFill>
@@ -2687,7 +2935,7 @@
               </a:rPr>
               <a:t>이 회사 주식 1주는 5,000원어치의 순이익을 창출했다는 의미</a:t>
             </a:r>
-            <a:endParaRPr lang="en-US" dirty="0"/>
+            <a:endParaRPr lang="en-US" sz="1400" dirty="0"/>
           </a:p>
         </p:txBody>
       </p:sp>
@@ -2712,11 +2960,11 @@
           <a:bodyPr wrap="square" rtlCol="0" anchor="ctr"/>
           <a:lstStyle/>
           <a:p>
-            <a:pPr marL="0" indent="0">
-              <a:buNone/>
-            </a:pPr>
-            <a:r>
-              <a:rPr lang="en-US" sz="2000" b="1" dirty="0">
+            <a:pPr indent="0" marL="0">
+              <a:buNone/>
+            </a:pPr>
+            <a:r>
+              <a:rPr lang="en-US" sz="1700" b="1" dirty="0">
                 <a:solidFill>
                   <a:srgbClr val="1E2761"/>
                 </a:solidFill>
@@ -2726,7 +2974,7 @@
               </a:rPr>
               <a:t>주의할 점</a:t>
             </a:r>
-            <a:endParaRPr lang="en-US" sz="2000" dirty="0"/>
+            <a:endParaRPr lang="en-US" sz="1700" dirty="0"/>
           </a:p>
         </p:txBody>
       </p:sp>
@@ -2751,11 +2999,11 @@
           <a:bodyPr wrap="square" rtlCol="0" anchor="ctr"/>
           <a:lstStyle/>
           <a:p>
-            <a:pPr marL="0" indent="0">
-              <a:buNone/>
-            </a:pPr>
-            <a:r>
-              <a:rPr lang="en-US" dirty="0">
+            <a:pPr indent="0" marL="0">
+              <a:buNone/>
+            </a:pPr>
+            <a:r>
+              <a:rPr lang="en-US" sz="1400" dirty="0">
                 <a:solidFill>
                   <a:srgbClr val="222633"/>
                 </a:solidFill>
@@ -2765,7 +3013,7 @@
               </a:rPr>
               <a:t>•  희석EPS: 전환사채·스톡옵션이 모두 전환됐다고 가정 — 기본EPS보다 항상 같거나 낮음</a:t>
             </a:r>
-            <a:endParaRPr lang="en-US" dirty="0"/>
+            <a:endParaRPr lang="en-US" sz="1400" dirty="0"/>
           </a:p>
         </p:txBody>
       </p:sp>
@@ -2790,11 +3038,11 @@
           <a:bodyPr wrap="square" rtlCol="0" anchor="ctr"/>
           <a:lstStyle/>
           <a:p>
-            <a:pPr marL="0" indent="0">
-              <a:buNone/>
-            </a:pPr>
-            <a:r>
-              <a:rPr lang="en-US" dirty="0">
+            <a:pPr indent="0" marL="0">
+              <a:buNone/>
+            </a:pPr>
+            <a:r>
+              <a:rPr lang="en-US" sz="1400" dirty="0">
                 <a:solidFill>
                   <a:srgbClr val="222633"/>
                 </a:solidFill>
@@ -2804,7 +3052,7 @@
               </a:rPr>
               <a:t>•  자사주 매입·소각: 발행주식수 감소로 순이익 변화 없이도 EPS 상승 가능</a:t>
             </a:r>
-            <a:endParaRPr lang="en-US" dirty="0"/>
+            <a:endParaRPr lang="en-US" sz="1400" dirty="0"/>
           </a:p>
         </p:txBody>
       </p:sp>
@@ -2829,7 +3077,7 @@
           <a:bodyPr wrap="square" rtlCol="0" anchor="ctr"/>
           <a:lstStyle/>
           <a:p>
-            <a:pPr marL="0" indent="0" algn="r">
+            <a:pPr algn="r" indent="0" marL="0">
               <a:buNone/>
             </a:pPr>
             <a:r>
@@ -2863,7 +3111,6 @@
         <a:solidFill>
           <a:srgbClr val="FFFFFF"/>
         </a:solidFill>
-        <a:effectLst/>
       </p:bgPr>
     </p:bg>
     <p:spTree>
@@ -2901,11 +3148,11 @@
           <a:bodyPr wrap="square" rtlCol="0" anchor="ctr"/>
           <a:lstStyle/>
           <a:p>
-            <a:pPr marL="0" indent="0">
-              <a:buNone/>
-            </a:pPr>
-            <a:r>
-              <a:rPr lang="en-US" sz="1300" b="1" kern="0" spc="200" dirty="0">
+            <a:pPr indent="0" marL="0">
+              <a:buNone/>
+            </a:pPr>
+            <a:r>
+              <a:rPr lang="en-US" sz="1300" b="1" spc="200" kern="0" dirty="0">
                 <a:solidFill>
                   <a:srgbClr val="9C7A0A"/>
                 </a:solidFill>
@@ -2940,7 +3187,7 @@
           <a:bodyPr wrap="square" rtlCol="0" anchor="ctr"/>
           <a:lstStyle/>
           <a:p>
-            <a:pPr marL="0" indent="0" algn="l">
+            <a:pPr algn="l" indent="0" marL="0">
               <a:buNone/>
             </a:pPr>
             <a:r>
@@ -2979,11 +3226,11 @@
           <a:bodyPr wrap="square" rtlCol="0" anchor="ctr"/>
           <a:lstStyle/>
           <a:p>
-            <a:pPr marL="0" indent="0">
-              <a:buNone/>
-            </a:pPr>
-            <a:r>
-              <a:rPr lang="en-US" dirty="0">
+            <a:pPr indent="0" marL="0">
+              <a:buNone/>
+            </a:pPr>
+            <a:r>
+              <a:rPr lang="en-US" sz="1500" dirty="0">
                 <a:solidFill>
                   <a:srgbClr val="5A5F73"/>
                 </a:solidFill>
@@ -2993,7 +3240,7 @@
               </a:rPr>
               <a:t>주가가 EPS의 몇 배인지 나타내는 비율. 이익 대비 주가의 비싼 정도를 측정</a:t>
             </a:r>
-            <a:endParaRPr lang="en-US" dirty="0"/>
+            <a:endParaRPr lang="en-US" sz="1500" dirty="0"/>
           </a:p>
         </p:txBody>
       </p:sp>
@@ -3023,13 +3270,6 @@
             <a:prstDash val="solid"/>
           </a:ln>
         </p:spPr>
-        <p:txBody>
-          <a:bodyPr/>
-          <a:lstStyle/>
-          <a:p>
-            <a:endParaRPr lang="ko-KR" altLang="en-US" sz="2400"/>
-          </a:p>
-        </p:txBody>
       </p:sp>
       <p:sp>
         <p:nvSpPr>
@@ -3052,11 +3292,11 @@
           <a:bodyPr wrap="square" rtlCol="0" anchor="ctr"/>
           <a:lstStyle/>
           <a:p>
-            <a:pPr marL="0" indent="0">
-              <a:buNone/>
-            </a:pPr>
-            <a:r>
-              <a:rPr lang="en-US" sz="1600" b="1" dirty="0">
+            <a:pPr indent="0" marL="0">
+              <a:buNone/>
+            </a:pPr>
+            <a:r>
+              <a:rPr lang="en-US" sz="1250" b="1" dirty="0">
                 <a:solidFill>
                   <a:srgbClr val="9C7A0A"/>
                 </a:solidFill>
@@ -3066,7 +3306,7 @@
               </a:rPr>
               <a:t>계산식</a:t>
             </a:r>
-            <a:endParaRPr lang="en-US" sz="1600" dirty="0"/>
+            <a:endParaRPr lang="en-US" sz="1250" dirty="0"/>
           </a:p>
         </p:txBody>
       </p:sp>
@@ -3091,11 +3331,11 @@
           <a:bodyPr wrap="square" rtlCol="0" anchor="t"/>
           <a:lstStyle/>
           <a:p>
-            <a:pPr marL="0" indent="0">
-              <a:buNone/>
-            </a:pPr>
-            <a:r>
-              <a:rPr lang="en-US" sz="2400" b="1" dirty="0">
+            <a:pPr indent="0" marL="0">
+              <a:buNone/>
+            </a:pPr>
+            <a:r>
+              <a:rPr lang="en-US" sz="1900" b="1" dirty="0">
                 <a:solidFill>
                   <a:srgbClr val="1E2761"/>
                 </a:solidFill>
@@ -3105,7 +3345,7 @@
               </a:rPr>
               <a:t>PER = 주가 ÷ EPS</a:t>
             </a:r>
-            <a:endParaRPr lang="en-US" sz="2400" dirty="0"/>
+            <a:endParaRPr lang="en-US" sz="1900" dirty="0"/>
           </a:p>
         </p:txBody>
       </p:sp>
@@ -3135,13 +3375,6 @@
             <a:prstDash val="solid"/>
           </a:ln>
         </p:spPr>
-        <p:txBody>
-          <a:bodyPr/>
-          <a:lstStyle/>
-          <a:p>
-            <a:endParaRPr lang="ko-KR" altLang="en-US" sz="2400"/>
-          </a:p>
-        </p:txBody>
       </p:sp>
       <p:sp>
         <p:nvSpPr>
@@ -3164,11 +3397,11 @@
           <a:bodyPr wrap="square" rtlCol="0" anchor="ctr"/>
           <a:lstStyle/>
           <a:p>
-            <a:pPr marL="0" indent="0">
-              <a:buNone/>
-            </a:pPr>
-            <a:r>
-              <a:rPr lang="en-US" sz="1600" b="1" dirty="0">
+            <a:pPr indent="0" marL="0">
+              <a:buNone/>
+            </a:pPr>
+            <a:r>
+              <a:rPr lang="en-US" sz="1250" b="1" dirty="0">
                 <a:solidFill>
                   <a:srgbClr val="9C7A0A"/>
                 </a:solidFill>
@@ -3178,7 +3411,7 @@
               </a:rPr>
               <a:t>숫자 예시</a:t>
             </a:r>
-            <a:endParaRPr lang="en-US" sz="1600" dirty="0"/>
+            <a:endParaRPr lang="en-US" sz="1250" dirty="0"/>
           </a:p>
         </p:txBody>
       </p:sp>
@@ -3203,14 +3436,14 @@
           <a:bodyPr wrap="square" rtlCol="0" anchor="t"/>
           <a:lstStyle/>
           <a:p>
-            <a:pPr marL="0" indent="0">
+            <a:pPr indent="0" marL="0">
               <a:lnSpc>
                 <a:spcPct val="130000"/>
               </a:lnSpc>
               <a:buNone/>
             </a:pPr>
             <a:r>
-              <a:rPr lang="en-US" dirty="0">
+              <a:rPr lang="en-US" sz="1500" dirty="0">
                 <a:solidFill>
                   <a:srgbClr val="222633"/>
                 </a:solidFill>
@@ -3220,17 +3453,17 @@
               </a:rPr>
               <a:t>A기업 주가: 100,000원</a:t>
             </a:r>
-            <a:endParaRPr lang="en-US" dirty="0"/>
-          </a:p>
-          <a:p>
-            <a:pPr marL="0" indent="0">
+            <a:endParaRPr lang="en-US" sz="1500" dirty="0"/>
+          </a:p>
+          <a:p>
+            <a:pPr indent="0" marL="0">
               <a:lnSpc>
                 <a:spcPct val="130000"/>
               </a:lnSpc>
               <a:buNone/>
             </a:pPr>
             <a:r>
-              <a:rPr lang="en-US" dirty="0">
+              <a:rPr lang="en-US" sz="1500" dirty="0">
                 <a:solidFill>
                   <a:srgbClr val="222633"/>
                 </a:solidFill>
@@ -3240,26 +3473,26 @@
               </a:rPr>
               <a:t>A기업 EPS: 5,000원</a:t>
             </a:r>
-            <a:endParaRPr lang="en-US" dirty="0"/>
-          </a:p>
-          <a:p>
-            <a:pPr marL="0" indent="0">
+            <a:endParaRPr lang="en-US" sz="1500" dirty="0"/>
+          </a:p>
+          <a:p>
+            <a:pPr indent="0" marL="0">
               <a:lnSpc>
                 <a:spcPct val="130000"/>
               </a:lnSpc>
               <a:buNone/>
             </a:pPr>
-            <a:endParaRPr lang="en-US" dirty="0"/>
-          </a:p>
-          <a:p>
-            <a:pPr marL="0" indent="0">
+            <a:endParaRPr lang="en-US" sz="1500" dirty="0"/>
+          </a:p>
+          <a:p>
+            <a:pPr indent="0" marL="0">
               <a:lnSpc>
                 <a:spcPct val="130000"/>
               </a:lnSpc>
               <a:buNone/>
             </a:pPr>
             <a:r>
-              <a:rPr lang="en-US" dirty="0">
+              <a:rPr lang="en-US" sz="1500" dirty="0">
                 <a:solidFill>
                   <a:srgbClr val="222633"/>
                 </a:solidFill>
@@ -3269,17 +3502,17 @@
               </a:rPr>
               <a:t>PER = 100,000원 ÷ 5,000원</a:t>
             </a:r>
-            <a:endParaRPr lang="en-US" dirty="0"/>
-          </a:p>
-          <a:p>
-            <a:pPr marL="0" indent="0">
+            <a:endParaRPr lang="en-US" sz="1500" dirty="0"/>
+          </a:p>
+          <a:p>
+            <a:pPr indent="0" marL="0">
               <a:lnSpc>
                 <a:spcPct val="130000"/>
               </a:lnSpc>
               <a:buNone/>
             </a:pPr>
             <a:r>
-              <a:rPr lang="en-US" dirty="0">
+              <a:rPr lang="en-US" sz="1500" dirty="0">
                 <a:solidFill>
                   <a:srgbClr val="222633"/>
                 </a:solidFill>
@@ -3289,7 +3522,7 @@
               </a:rPr>
               <a:t>= 20배</a:t>
             </a:r>
-            <a:endParaRPr lang="en-US" dirty="0"/>
+            <a:endParaRPr lang="en-US" sz="1500" dirty="0"/>
           </a:p>
         </p:txBody>
       </p:sp>
@@ -3319,13 +3552,6 @@
             <a:prstDash val="solid"/>
           </a:ln>
         </p:spPr>
-        <p:txBody>
-          <a:bodyPr/>
-          <a:lstStyle/>
-          <a:p>
-            <a:endParaRPr lang="ko-KR" altLang="en-US" sz="2400"/>
-          </a:p>
-        </p:txBody>
       </p:sp>
       <p:sp>
         <p:nvSpPr>
@@ -3348,11 +3574,11 @@
           <a:bodyPr wrap="square" rtlCol="0" anchor="ctr"/>
           <a:lstStyle/>
           <a:p>
-            <a:pPr marL="0" indent="0">
-              <a:buNone/>
-            </a:pPr>
-            <a:r>
-              <a:rPr lang="en-US" sz="1600" b="1" dirty="0">
+            <a:pPr indent="0" marL="0">
+              <a:buNone/>
+            </a:pPr>
+            <a:r>
+              <a:rPr lang="en-US" sz="1250" b="1" dirty="0">
                 <a:solidFill>
                   <a:srgbClr val="1E2761"/>
                 </a:solidFill>
@@ -3362,7 +3588,7 @@
               </a:rPr>
               <a:t>해석</a:t>
             </a:r>
-            <a:endParaRPr lang="en-US" sz="1600" dirty="0"/>
+            <a:endParaRPr lang="en-US" sz="1250" dirty="0"/>
           </a:p>
         </p:txBody>
       </p:sp>
@@ -3375,7 +3601,7 @@
         <p:spPr>
           <a:xfrm>
             <a:off x="777240" y="3858768"/>
-            <a:ext cx="4846320" cy="658368"/>
+            <a:ext cx="4663440" cy="658368"/>
           </a:xfrm>
           <a:prstGeom prst="rect">
             <a:avLst/>
@@ -3387,11 +3613,11 @@
           <a:bodyPr wrap="square" rtlCol="0" anchor="t"/>
           <a:lstStyle/>
           <a:p>
-            <a:pPr marL="0" indent="0">
-              <a:buNone/>
-            </a:pPr>
-            <a:r>
-              <a:rPr lang="en-US" dirty="0">
+            <a:pPr indent="0" marL="0">
+              <a:buNone/>
+            </a:pPr>
+            <a:r>
+              <a:rPr lang="en-US" sz="1400" dirty="0">
                 <a:solidFill>
                   <a:srgbClr val="222633"/>
                 </a:solidFill>
@@ -3401,7 +3627,7 @@
               </a:rPr>
               <a:t>“현재 이익이 유지된다면 원금 회수에 이론상 20년” 또는 “이익의 20배 가치를 시장이 인정”</a:t>
             </a:r>
-            <a:endParaRPr lang="en-US" dirty="0"/>
+            <a:endParaRPr lang="en-US" sz="1400" dirty="0"/>
           </a:p>
         </p:txBody>
       </p:sp>
@@ -3426,11 +3652,11 @@
           <a:bodyPr wrap="square" rtlCol="0" anchor="ctr"/>
           <a:lstStyle/>
           <a:p>
-            <a:pPr marL="0" indent="0">
-              <a:buNone/>
-            </a:pPr>
-            <a:r>
-              <a:rPr lang="en-US" sz="2000" b="1" dirty="0">
+            <a:pPr indent="0" marL="0">
+              <a:buNone/>
+            </a:pPr>
+            <a:r>
+              <a:rPr lang="en-US" sz="1700" b="1" dirty="0">
                 <a:solidFill>
                   <a:srgbClr val="1E2761"/>
                 </a:solidFill>
@@ -3440,7 +3666,7 @@
               </a:rPr>
               <a:t>동종업계 비교</a:t>
             </a:r>
-            <a:endParaRPr lang="en-US" sz="2000" dirty="0"/>
+            <a:endParaRPr lang="en-US" sz="1700" dirty="0"/>
           </a:p>
         </p:txBody>
       </p:sp>
@@ -3465,11 +3691,11 @@
           <a:bodyPr wrap="square" rtlCol="0" anchor="ctr"/>
           <a:lstStyle/>
           <a:p>
-            <a:pPr marL="0" indent="0">
-              <a:buNone/>
-            </a:pPr>
-            <a:r>
-              <a:rPr lang="en-US" dirty="0">
+            <a:pPr indent="0" marL="0">
+              <a:buNone/>
+            </a:pPr>
+            <a:r>
+              <a:rPr lang="en-US" sz="1400" dirty="0">
                 <a:solidFill>
                   <a:srgbClr val="222633"/>
                 </a:solidFill>
@@ -3479,7 +3705,7 @@
               </a:rPr>
               <a:t>•  B기업(경쟁사) PER 12배 → A기업(20배)보다 상대적으로 저평가돼 보임</a:t>
             </a:r>
-            <a:endParaRPr lang="en-US" dirty="0"/>
+            <a:endParaRPr lang="en-US" sz="1400" dirty="0"/>
           </a:p>
         </p:txBody>
       </p:sp>
@@ -3504,11 +3730,11 @@
           <a:bodyPr wrap="square" rtlCol="0" anchor="ctr"/>
           <a:lstStyle/>
           <a:p>
-            <a:pPr marL="0" indent="0">
-              <a:buNone/>
-            </a:pPr>
-            <a:r>
-              <a:rPr lang="en-US" dirty="0">
+            <a:pPr indent="0" marL="0">
+              <a:buNone/>
+            </a:pPr>
+            <a:r>
+              <a:rPr lang="en-US" sz="1400" dirty="0">
                 <a:solidFill>
                   <a:srgbClr val="222633"/>
                 </a:solidFill>
@@ -3518,7 +3744,7 @@
               </a:rPr>
               <a:t>•  단, A기업 이익성장률이 훨씬 높다면 높은 PER이 정당화될 수 있음 (PEG로 보완)</a:t>
             </a:r>
-            <a:endParaRPr lang="en-US" dirty="0"/>
+            <a:endParaRPr lang="en-US" sz="1400" dirty="0"/>
           </a:p>
         </p:txBody>
       </p:sp>
@@ -3543,11 +3769,11 @@
           <a:bodyPr wrap="square" rtlCol="0" anchor="ctr"/>
           <a:lstStyle/>
           <a:p>
-            <a:pPr marL="0" indent="0" algn="r">
-              <a:buNone/>
-            </a:pPr>
-            <a:r>
-              <a:rPr lang="en-US" sz="1400" dirty="0">
+            <a:pPr algn="r" indent="0" marL="0">
+              <a:buNone/>
+            </a:pPr>
+            <a:r>
+              <a:rPr lang="en-US" sz="1100" dirty="0">
                 <a:solidFill>
                   <a:srgbClr val="5A5F73"/>
                 </a:solidFill>
@@ -3557,7 +3783,7 @@
               </a:rPr>
               <a:t>11</a:t>
             </a:r>
-            <a:endParaRPr lang="en-US" sz="1400" dirty="0"/>
+            <a:endParaRPr lang="en-US" sz="1100" dirty="0"/>
           </a:p>
         </p:txBody>
       </p:sp>
@@ -3577,7 +3803,6 @@
         <a:solidFill>
           <a:srgbClr val="FFFFFF"/>
         </a:solidFill>
-        <a:effectLst/>
       </p:bgPr>
     </p:bg>
     <p:spTree>
@@ -3615,11 +3840,11 @@
           <a:bodyPr wrap="square" rtlCol="0" anchor="ctr"/>
           <a:lstStyle/>
           <a:p>
-            <a:pPr marL="0" indent="0">
-              <a:buNone/>
-            </a:pPr>
-            <a:r>
-              <a:rPr lang="en-US" sz="1300" b="1" kern="0" spc="200" dirty="0">
+            <a:pPr indent="0" marL="0">
+              <a:buNone/>
+            </a:pPr>
+            <a:r>
+              <a:rPr lang="en-US" sz="1300" b="1" spc="200" kern="0" dirty="0">
                 <a:solidFill>
                   <a:srgbClr val="9C7A0A"/>
                 </a:solidFill>
@@ -3654,7 +3879,7 @@
           <a:bodyPr wrap="square" rtlCol="0" anchor="ctr"/>
           <a:lstStyle/>
           <a:p>
-            <a:pPr marL="0" indent="0" algn="l">
+            <a:pPr algn="l" indent="0" marL="0">
               <a:buNone/>
             </a:pPr>
             <a:r>
@@ -3693,11 +3918,11 @@
           <a:bodyPr wrap="square" rtlCol="0" anchor="ctr"/>
           <a:lstStyle/>
           <a:p>
-            <a:pPr marL="0" indent="0">
-              <a:buNone/>
-            </a:pPr>
-            <a:r>
-              <a:rPr lang="en-US" dirty="0">
+            <a:pPr indent="0" marL="0">
+              <a:buNone/>
+            </a:pPr>
+            <a:r>
+              <a:rPr lang="en-US" sz="1500" dirty="0">
                 <a:solidFill>
                   <a:srgbClr val="5A5F73"/>
                 </a:solidFill>
@@ -3707,7 +3932,7 @@
               </a:rPr>
               <a:t>주가가 주당순자산(장부가치)의 몇 배인지 나타내는 비율</a:t>
             </a:r>
-            <a:endParaRPr lang="en-US" dirty="0"/>
+            <a:endParaRPr lang="en-US" sz="1500" dirty="0"/>
           </a:p>
         </p:txBody>
       </p:sp>
@@ -3737,13 +3962,6 @@
             <a:prstDash val="solid"/>
           </a:ln>
         </p:spPr>
-        <p:txBody>
-          <a:bodyPr/>
-          <a:lstStyle/>
-          <a:p>
-            <a:endParaRPr lang="ko-KR" altLang="en-US" sz="2400"/>
-          </a:p>
-        </p:txBody>
       </p:sp>
       <p:sp>
         <p:nvSpPr>
@@ -3766,11 +3984,11 @@
           <a:bodyPr wrap="square" rtlCol="0" anchor="ctr"/>
           <a:lstStyle/>
           <a:p>
-            <a:pPr marL="0" indent="0">
-              <a:buNone/>
-            </a:pPr>
-            <a:r>
-              <a:rPr lang="en-US" sz="1600" b="1" dirty="0">
+            <a:pPr indent="0" marL="0">
+              <a:buNone/>
+            </a:pPr>
+            <a:r>
+              <a:rPr lang="en-US" sz="1250" b="1" dirty="0">
                 <a:solidFill>
                   <a:srgbClr val="9C7A0A"/>
                 </a:solidFill>
@@ -3780,7 +3998,7 @@
               </a:rPr>
               <a:t>계산식</a:t>
             </a:r>
-            <a:endParaRPr lang="en-US" sz="1600" dirty="0"/>
+            <a:endParaRPr lang="en-US" sz="1250" dirty="0"/>
           </a:p>
         </p:txBody>
       </p:sp>
@@ -3805,11 +4023,11 @@
           <a:bodyPr wrap="square" rtlCol="0" anchor="t"/>
           <a:lstStyle/>
           <a:p>
-            <a:pPr marL="0" indent="0">
-              <a:buNone/>
-            </a:pPr>
-            <a:r>
-              <a:rPr lang="en-US" sz="2400" b="1" dirty="0">
+            <a:pPr indent="0" marL="0">
+              <a:buNone/>
+            </a:pPr>
+            <a:r>
+              <a:rPr lang="en-US" sz="1900" b="1" dirty="0">
                 <a:solidFill>
                   <a:srgbClr val="1E2761"/>
                 </a:solidFill>
@@ -3819,14 +4037,14 @@
               </a:rPr>
               <a:t>PBR = 주가 ÷ BPS</a:t>
             </a:r>
-            <a:endParaRPr lang="en-US" sz="2400" dirty="0"/>
-          </a:p>
-          <a:p>
-            <a:pPr marL="0" indent="0">
-              <a:buNone/>
-            </a:pPr>
-            <a:r>
-              <a:rPr lang="en-US" sz="2400" b="1" dirty="0">
+            <a:endParaRPr lang="en-US" sz="1900" dirty="0"/>
+          </a:p>
+          <a:p>
+            <a:pPr indent="0" marL="0">
+              <a:buNone/>
+            </a:pPr>
+            <a:r>
+              <a:rPr lang="en-US" sz="1900" b="1" dirty="0">
                 <a:solidFill>
                   <a:srgbClr val="1E2761"/>
                 </a:solidFill>
@@ -3836,7 +4054,7 @@
               </a:rPr>
               <a:t>= 시가총액 ÷ 순자산</a:t>
             </a:r>
-            <a:endParaRPr lang="en-US" sz="2400" dirty="0"/>
+            <a:endParaRPr lang="en-US" sz="1900" dirty="0"/>
           </a:p>
         </p:txBody>
       </p:sp>
@@ -3866,13 +4084,6 @@
             <a:prstDash val="solid"/>
           </a:ln>
         </p:spPr>
-        <p:txBody>
-          <a:bodyPr/>
-          <a:lstStyle/>
-          <a:p>
-            <a:endParaRPr lang="ko-KR" altLang="en-US" sz="2400"/>
-          </a:p>
-        </p:txBody>
       </p:sp>
       <p:sp>
         <p:nvSpPr>
@@ -3895,11 +4106,11 @@
           <a:bodyPr wrap="square" rtlCol="0" anchor="ctr"/>
           <a:lstStyle/>
           <a:p>
-            <a:pPr marL="0" indent="0">
-              <a:buNone/>
-            </a:pPr>
-            <a:r>
-              <a:rPr lang="en-US" sz="1600" b="1" dirty="0">
+            <a:pPr indent="0" marL="0">
+              <a:buNone/>
+            </a:pPr>
+            <a:r>
+              <a:rPr lang="en-US" sz="1250" b="1" dirty="0">
                 <a:solidFill>
                   <a:srgbClr val="9C7A0A"/>
                 </a:solidFill>
@@ -3909,7 +4120,7 @@
               </a:rPr>
               <a:t>숫자 예시</a:t>
             </a:r>
-            <a:endParaRPr lang="en-US" sz="1600" dirty="0"/>
+            <a:endParaRPr lang="en-US" sz="1250" dirty="0"/>
           </a:p>
         </p:txBody>
       </p:sp>
@@ -3934,14 +4145,14 @@
           <a:bodyPr wrap="square" rtlCol="0" anchor="t"/>
           <a:lstStyle/>
           <a:p>
-            <a:pPr marL="0" indent="0">
+            <a:pPr indent="0" marL="0">
               <a:lnSpc>
                 <a:spcPct val="130000"/>
               </a:lnSpc>
               <a:buNone/>
             </a:pPr>
             <a:r>
-              <a:rPr lang="en-US" dirty="0">
+              <a:rPr lang="en-US" sz="1500" dirty="0">
                 <a:solidFill>
                   <a:srgbClr val="222633"/>
                 </a:solidFill>
@@ -3951,17 +4162,17 @@
               </a:rPr>
               <a:t>A기업 자본총계(순자산): 8,000억 원</a:t>
             </a:r>
-            <a:endParaRPr lang="en-US" dirty="0"/>
-          </a:p>
-          <a:p>
-            <a:pPr marL="0" indent="0">
+            <a:endParaRPr lang="en-US" sz="1500" dirty="0"/>
+          </a:p>
+          <a:p>
+            <a:pPr indent="0" marL="0">
               <a:lnSpc>
                 <a:spcPct val="130000"/>
               </a:lnSpc>
               <a:buNone/>
             </a:pPr>
             <a:r>
-              <a:rPr lang="en-US" dirty="0">
+              <a:rPr lang="en-US" sz="1500" dirty="0">
                 <a:solidFill>
                   <a:srgbClr val="222633"/>
                 </a:solidFill>
@@ -3971,26 +4182,26 @@
               </a:rPr>
               <a:t>발행주식수: 2,000만 주</a:t>
             </a:r>
-            <a:endParaRPr lang="en-US" dirty="0"/>
-          </a:p>
-          <a:p>
-            <a:pPr marL="0" indent="0">
+            <a:endParaRPr lang="en-US" sz="1500" dirty="0"/>
+          </a:p>
+          <a:p>
+            <a:pPr indent="0" marL="0">
               <a:lnSpc>
                 <a:spcPct val="130000"/>
               </a:lnSpc>
               <a:buNone/>
             </a:pPr>
-            <a:endParaRPr lang="en-US" dirty="0"/>
-          </a:p>
-          <a:p>
-            <a:pPr marL="0" indent="0">
+            <a:endParaRPr lang="en-US" sz="1500" dirty="0"/>
+          </a:p>
+          <a:p>
+            <a:pPr indent="0" marL="0">
               <a:lnSpc>
                 <a:spcPct val="130000"/>
               </a:lnSpc>
               <a:buNone/>
             </a:pPr>
             <a:r>
-              <a:rPr lang="en-US" dirty="0">
+              <a:rPr lang="en-US" sz="1500" dirty="0">
                 <a:solidFill>
                   <a:srgbClr val="222633"/>
                 </a:solidFill>
@@ -4000,17 +4211,17 @@
               </a:rPr>
               <a:t>BPS = 8,000억 원 ÷ 2,000만 주 = 40,000원</a:t>
             </a:r>
-            <a:endParaRPr lang="en-US" dirty="0"/>
-          </a:p>
-          <a:p>
-            <a:pPr marL="0" indent="0">
+            <a:endParaRPr lang="en-US" sz="1500" dirty="0"/>
+          </a:p>
+          <a:p>
+            <a:pPr indent="0" marL="0">
               <a:lnSpc>
                 <a:spcPct val="130000"/>
               </a:lnSpc>
               <a:buNone/>
             </a:pPr>
             <a:r>
-              <a:rPr lang="en-US" dirty="0">
+              <a:rPr lang="en-US" sz="1500" dirty="0">
                 <a:solidFill>
                   <a:srgbClr val="222633"/>
                 </a:solidFill>
@@ -4020,7 +4231,7 @@
               </a:rPr>
               <a:t>PBR = 100,000원 ÷ 40,000원 = 2.5배</a:t>
             </a:r>
-            <a:endParaRPr lang="en-US" dirty="0"/>
+            <a:endParaRPr lang="en-US" sz="1500" dirty="0"/>
           </a:p>
         </p:txBody>
       </p:sp>
@@ -4050,13 +4261,6 @@
             <a:prstDash val="solid"/>
           </a:ln>
         </p:spPr>
-        <p:txBody>
-          <a:bodyPr/>
-          <a:lstStyle/>
-          <a:p>
-            <a:endParaRPr lang="ko-KR" altLang="en-US" sz="2400"/>
-          </a:p>
-        </p:txBody>
       </p:sp>
       <p:sp>
         <p:nvSpPr>
@@ -4079,11 +4283,11 @@
           <a:bodyPr wrap="square" rtlCol="0" anchor="ctr"/>
           <a:lstStyle/>
           <a:p>
-            <a:pPr marL="0" indent="0">
-              <a:buNone/>
-            </a:pPr>
-            <a:r>
-              <a:rPr lang="en-US" sz="1600" b="1" dirty="0">
+            <a:pPr indent="0" marL="0">
+              <a:buNone/>
+            </a:pPr>
+            <a:r>
+              <a:rPr lang="en-US" sz="1250" b="1" dirty="0">
                 <a:solidFill>
                   <a:srgbClr val="1E2761"/>
                 </a:solidFill>
@@ -4093,7 +4297,7 @@
               </a:rPr>
               <a:t>해석</a:t>
             </a:r>
-            <a:endParaRPr lang="en-US" sz="1600" dirty="0"/>
+            <a:endParaRPr lang="en-US" sz="1250" dirty="0"/>
           </a:p>
         </p:txBody>
       </p:sp>
@@ -4118,11 +4322,11 @@
           <a:bodyPr wrap="square" rtlCol="0" anchor="t"/>
           <a:lstStyle/>
           <a:p>
-            <a:pPr marL="0" indent="0">
-              <a:buNone/>
-            </a:pPr>
-            <a:r>
-              <a:rPr lang="en-US" dirty="0">
+            <a:pPr indent="0" marL="0">
+              <a:buNone/>
+            </a:pPr>
+            <a:r>
+              <a:rPr lang="en-US" sz="1400" dirty="0">
                 <a:solidFill>
                   <a:srgbClr val="222633"/>
                 </a:solidFill>
@@ -4132,7 +4336,7 @@
               </a:rPr>
               <a:t>시장이 이 회사의 장부상 순자산가치보다 2.5배 높게 평가</a:t>
             </a:r>
-            <a:endParaRPr lang="en-US" dirty="0"/>
+            <a:endParaRPr lang="en-US" sz="1400" dirty="0"/>
           </a:p>
         </p:txBody>
       </p:sp>
@@ -4144,7 +4348,7 @@
         </p:nvSpPr>
         <p:spPr>
           <a:xfrm>
-            <a:off x="548640" y="4848014"/>
+            <a:off x="548640" y="4754880"/>
             <a:ext cx="10881360" cy="365760"/>
           </a:xfrm>
           <a:prstGeom prst="rect">
@@ -4157,11 +4361,11 @@
           <a:bodyPr wrap="square" rtlCol="0" anchor="ctr"/>
           <a:lstStyle/>
           <a:p>
-            <a:pPr marL="0" indent="0">
-              <a:buNone/>
-            </a:pPr>
-            <a:r>
-              <a:rPr lang="en-US" sz="2000" b="1" dirty="0">
+            <a:pPr indent="0" marL="0">
+              <a:buNone/>
+            </a:pPr>
+            <a:r>
+              <a:rPr lang="en-US" sz="1700" b="1" dirty="0">
                 <a:solidFill>
                   <a:srgbClr val="1E2761"/>
                 </a:solidFill>
@@ -4171,7 +4375,7 @@
               </a:rPr>
               <a:t>PBR 1배 미만의 의미</a:t>
             </a:r>
-            <a:endParaRPr lang="en-US" sz="2000" dirty="0"/>
+            <a:endParaRPr lang="en-US" sz="1700" dirty="0"/>
           </a:p>
         </p:txBody>
       </p:sp>
@@ -4183,7 +4387,7 @@
         </p:nvSpPr>
         <p:spPr>
           <a:xfrm>
-            <a:off x="548640" y="5232062"/>
+            <a:off x="548640" y="5138928"/>
             <a:ext cx="10881360" cy="420624"/>
           </a:xfrm>
           <a:prstGeom prst="rect">
@@ -4196,11 +4400,11 @@
           <a:bodyPr wrap="square" rtlCol="0" anchor="ctr"/>
           <a:lstStyle/>
           <a:p>
-            <a:pPr marL="0" indent="0">
-              <a:buNone/>
-            </a:pPr>
-            <a:r>
-              <a:rPr lang="en-US" dirty="0">
+            <a:pPr indent="0" marL="0">
+              <a:buNone/>
+            </a:pPr>
+            <a:r>
+              <a:rPr lang="en-US" sz="1400" dirty="0">
                 <a:solidFill>
                   <a:srgbClr val="222633"/>
                 </a:solidFill>
@@ -4210,7 +4414,7 @@
               </a:rPr>
               <a:t>•  이론상 “청산해서 자산을 나눠 갖는 게 현재 주가로 사는 것보다 유리” — 저평가 신호로 해석</a:t>
             </a:r>
-            <a:endParaRPr lang="en-US" dirty="0"/>
+            <a:endParaRPr lang="en-US" sz="1400" dirty="0"/>
           </a:p>
         </p:txBody>
       </p:sp>
@@ -4222,7 +4426,7 @@
         </p:nvSpPr>
         <p:spPr>
           <a:xfrm>
-            <a:off x="548640" y="5670974"/>
+            <a:off x="548640" y="5577840"/>
             <a:ext cx="10881360" cy="420624"/>
           </a:xfrm>
           <a:prstGeom prst="rect">
@@ -4235,11 +4439,11 @@
           <a:bodyPr wrap="square" rtlCol="0" anchor="ctr"/>
           <a:lstStyle/>
           <a:p>
-            <a:pPr marL="0" indent="0">
-              <a:buNone/>
-            </a:pPr>
-            <a:r>
-              <a:rPr lang="en-US" dirty="0">
+            <a:pPr indent="0" marL="0">
+              <a:buNone/>
+            </a:pPr>
+            <a:r>
+              <a:rPr lang="en-US" sz="1400" dirty="0">
                 <a:solidFill>
                   <a:srgbClr val="222633"/>
                 </a:solidFill>
@@ -4249,7 +4453,7 @@
               </a:rPr>
               <a:t>•  한국 은행주·지주회사는 PBR 0.3~0.5배 수준도 흔함 (“코리아 디스카운트” 사례)</a:t>
             </a:r>
-            <a:endParaRPr lang="en-US" dirty="0"/>
+            <a:endParaRPr lang="en-US" sz="1400" dirty="0"/>
           </a:p>
         </p:txBody>
       </p:sp>
@@ -4274,7 +4478,7 @@
           <a:bodyPr wrap="square" rtlCol="0" anchor="ctr"/>
           <a:lstStyle/>
           <a:p>
-            <a:pPr marL="0" indent="0" algn="r">
+            <a:pPr algn="r" indent="0" marL="0">
               <a:buNone/>
             </a:pPr>
             <a:r>
@@ -4308,7 +4512,6 @@
         <a:solidFill>
           <a:srgbClr val="FFFFFF"/>
         </a:solidFill>
-        <a:effectLst/>
       </p:bgPr>
     </p:bg>
     <p:spTree>
@@ -4346,11 +4549,11 @@
           <a:bodyPr wrap="square" rtlCol="0" anchor="ctr"/>
           <a:lstStyle/>
           <a:p>
-            <a:pPr marL="0" indent="0">
-              <a:buNone/>
-            </a:pPr>
-            <a:r>
-              <a:rPr lang="en-US" sz="1300" b="1" kern="0" spc="200" dirty="0">
+            <a:pPr indent="0" marL="0">
+              <a:buNone/>
+            </a:pPr>
+            <a:r>
+              <a:rPr lang="en-US" sz="1300" b="1" spc="200" kern="0" dirty="0">
                 <a:solidFill>
                   <a:srgbClr val="9C7A0A"/>
                 </a:solidFill>
@@ -4385,7 +4588,7 @@
           <a:bodyPr wrap="square" rtlCol="0" anchor="ctr"/>
           <a:lstStyle/>
           <a:p>
-            <a:pPr marL="0" indent="0" algn="l">
+            <a:pPr algn="l" indent="0" marL="0">
               <a:buNone/>
             </a:pPr>
             <a:r>
@@ -4424,11 +4627,11 @@
           <a:bodyPr wrap="square" rtlCol="0" anchor="ctr"/>
           <a:lstStyle/>
           <a:p>
-            <a:pPr marL="0" indent="0">
-              <a:buNone/>
-            </a:pPr>
-            <a:r>
-              <a:rPr lang="en-US" dirty="0">
+            <a:pPr indent="0" marL="0">
+              <a:buNone/>
+            </a:pPr>
+            <a:r>
+              <a:rPr lang="en-US" sz="1500" dirty="0">
                 <a:solidFill>
                   <a:srgbClr val="5A5F73"/>
                 </a:solidFill>
@@ -4438,7 +4641,7 @@
               </a:rPr>
               <a:t>시가총액을 매출액으로 나눈 값. 이익이 없거나 적자인 성장기업 평가에 활용</a:t>
             </a:r>
-            <a:endParaRPr lang="en-US" dirty="0"/>
+            <a:endParaRPr lang="en-US" sz="1500" dirty="0"/>
           </a:p>
         </p:txBody>
       </p:sp>
@@ -4468,13 +4671,6 @@
             <a:prstDash val="solid"/>
           </a:ln>
         </p:spPr>
-        <p:txBody>
-          <a:bodyPr/>
-          <a:lstStyle/>
-          <a:p>
-            <a:endParaRPr lang="ko-KR" altLang="en-US" sz="2400"/>
-          </a:p>
-        </p:txBody>
       </p:sp>
       <p:sp>
         <p:nvSpPr>
@@ -4497,11 +4693,11 @@
           <a:bodyPr wrap="square" rtlCol="0" anchor="ctr"/>
           <a:lstStyle/>
           <a:p>
-            <a:pPr marL="0" indent="0">
-              <a:buNone/>
-            </a:pPr>
-            <a:r>
-              <a:rPr lang="en-US" sz="1600" b="1" dirty="0">
+            <a:pPr indent="0" marL="0">
+              <a:buNone/>
+            </a:pPr>
+            <a:r>
+              <a:rPr lang="en-US" sz="1250" b="1" dirty="0">
                 <a:solidFill>
                   <a:srgbClr val="9C7A0A"/>
                 </a:solidFill>
@@ -4511,7 +4707,7 @@
               </a:rPr>
               <a:t>계산식</a:t>
             </a:r>
-            <a:endParaRPr lang="en-US" sz="1600" dirty="0"/>
+            <a:endParaRPr lang="en-US" sz="1250" dirty="0"/>
           </a:p>
         </p:txBody>
       </p:sp>
@@ -4536,11 +4732,11 @@
           <a:bodyPr wrap="square" rtlCol="0" anchor="t"/>
           <a:lstStyle/>
           <a:p>
-            <a:pPr marL="0" indent="0">
-              <a:buNone/>
-            </a:pPr>
-            <a:r>
-              <a:rPr lang="en-US" sz="2400" b="1" dirty="0">
+            <a:pPr indent="0" marL="0">
+              <a:buNone/>
+            </a:pPr>
+            <a:r>
+              <a:rPr lang="en-US" sz="1900" b="1" dirty="0">
                 <a:solidFill>
                   <a:srgbClr val="1E2761"/>
                 </a:solidFill>
@@ -4550,14 +4746,14 @@
               </a:rPr>
               <a:t>PSR = 시가총액</a:t>
             </a:r>
-            <a:endParaRPr lang="en-US" sz="2400" dirty="0"/>
-          </a:p>
-          <a:p>
-            <a:pPr marL="0" indent="0">
-              <a:buNone/>
-            </a:pPr>
-            <a:r>
-              <a:rPr lang="en-US" sz="2400" b="1" dirty="0">
+            <a:endParaRPr lang="en-US" sz="1900" dirty="0"/>
+          </a:p>
+          <a:p>
+            <a:pPr indent="0" marL="0">
+              <a:buNone/>
+            </a:pPr>
+            <a:r>
+              <a:rPr lang="en-US" sz="1900" b="1" dirty="0">
                 <a:solidFill>
                   <a:srgbClr val="1E2761"/>
                 </a:solidFill>
@@ -4567,7 +4763,7 @@
               </a:rPr>
               <a:t>÷ 매출액</a:t>
             </a:r>
-            <a:endParaRPr lang="en-US" sz="2400" dirty="0"/>
+            <a:endParaRPr lang="en-US" sz="1900" dirty="0"/>
           </a:p>
         </p:txBody>
       </p:sp>
@@ -4597,13 +4793,6 @@
             <a:prstDash val="solid"/>
           </a:ln>
         </p:spPr>
-        <p:txBody>
-          <a:bodyPr/>
-          <a:lstStyle/>
-          <a:p>
-            <a:endParaRPr lang="ko-KR" altLang="en-US" sz="2400"/>
-          </a:p>
-        </p:txBody>
       </p:sp>
       <p:sp>
         <p:nvSpPr>
@@ -4626,11 +4815,11 @@
           <a:bodyPr wrap="square" rtlCol="0" anchor="ctr"/>
           <a:lstStyle/>
           <a:p>
-            <a:pPr marL="0" indent="0">
-              <a:buNone/>
-            </a:pPr>
-            <a:r>
-              <a:rPr lang="en-US" sz="1600" b="1" dirty="0">
+            <a:pPr indent="0" marL="0">
+              <a:buNone/>
+            </a:pPr>
+            <a:r>
+              <a:rPr lang="en-US" sz="1250" b="1" dirty="0">
                 <a:solidFill>
                   <a:srgbClr val="9C7A0A"/>
                 </a:solidFill>
@@ -4640,7 +4829,7 @@
               </a:rPr>
               <a:t>숫자 예시</a:t>
             </a:r>
-            <a:endParaRPr lang="en-US" sz="1600" dirty="0"/>
+            <a:endParaRPr lang="en-US" sz="1250" dirty="0"/>
           </a:p>
         </p:txBody>
       </p:sp>
@@ -4665,14 +4854,14 @@
           <a:bodyPr wrap="square" rtlCol="0" anchor="t"/>
           <a:lstStyle/>
           <a:p>
-            <a:pPr marL="0" indent="0">
+            <a:pPr indent="0" marL="0">
               <a:lnSpc>
                 <a:spcPct val="130000"/>
               </a:lnSpc>
               <a:buNone/>
             </a:pPr>
             <a:r>
-              <a:rPr lang="en-US" dirty="0">
+              <a:rPr lang="en-US" sz="1500" dirty="0">
                 <a:solidFill>
                   <a:srgbClr val="222633"/>
                 </a:solidFill>
@@ -4682,17 +4871,17 @@
               </a:rPr>
               <a:t>C기업(적자 스타트업) 시가총액: 1조 원</a:t>
             </a:r>
-            <a:endParaRPr lang="en-US" dirty="0"/>
-          </a:p>
-          <a:p>
-            <a:pPr marL="0" indent="0">
+            <a:endParaRPr lang="en-US" sz="1500" dirty="0"/>
+          </a:p>
+          <a:p>
+            <a:pPr indent="0" marL="0">
               <a:lnSpc>
                 <a:spcPct val="130000"/>
               </a:lnSpc>
               <a:buNone/>
             </a:pPr>
             <a:r>
-              <a:rPr lang="en-US" dirty="0">
+              <a:rPr lang="en-US" sz="1500" dirty="0">
                 <a:solidFill>
                   <a:srgbClr val="222633"/>
                 </a:solidFill>
@@ -4702,26 +4891,26 @@
               </a:rPr>
               <a:t>연매출: 2,000억 원</a:t>
             </a:r>
-            <a:endParaRPr lang="en-US" dirty="0"/>
-          </a:p>
-          <a:p>
-            <a:pPr marL="0" indent="0">
+            <a:endParaRPr lang="en-US" sz="1500" dirty="0"/>
+          </a:p>
+          <a:p>
+            <a:pPr indent="0" marL="0">
               <a:lnSpc>
                 <a:spcPct val="130000"/>
               </a:lnSpc>
               <a:buNone/>
             </a:pPr>
-            <a:endParaRPr lang="en-US" dirty="0"/>
-          </a:p>
-          <a:p>
-            <a:pPr marL="0" indent="0">
+            <a:endParaRPr lang="en-US" sz="1500" dirty="0"/>
+          </a:p>
+          <a:p>
+            <a:pPr indent="0" marL="0">
               <a:lnSpc>
                 <a:spcPct val="130000"/>
               </a:lnSpc>
               <a:buNone/>
             </a:pPr>
             <a:r>
-              <a:rPr lang="en-US" dirty="0">
+              <a:rPr lang="en-US" sz="1500" dirty="0">
                 <a:solidFill>
                   <a:srgbClr val="222633"/>
                 </a:solidFill>
@@ -4731,17 +4920,17 @@
               </a:rPr>
               <a:t>PSR = 1조 원 ÷ 2,000억 원</a:t>
             </a:r>
-            <a:endParaRPr lang="en-US" dirty="0"/>
-          </a:p>
-          <a:p>
-            <a:pPr marL="0" indent="0">
+            <a:endParaRPr lang="en-US" sz="1500" dirty="0"/>
+          </a:p>
+          <a:p>
+            <a:pPr indent="0" marL="0">
               <a:lnSpc>
                 <a:spcPct val="130000"/>
               </a:lnSpc>
               <a:buNone/>
             </a:pPr>
             <a:r>
-              <a:rPr lang="en-US" dirty="0">
+              <a:rPr lang="en-US" sz="1500" dirty="0">
                 <a:solidFill>
                   <a:srgbClr val="222633"/>
                 </a:solidFill>
@@ -4751,7 +4940,7 @@
               </a:rPr>
               <a:t>= 5배</a:t>
             </a:r>
-            <a:endParaRPr lang="en-US" dirty="0"/>
+            <a:endParaRPr lang="en-US" sz="1500" dirty="0"/>
           </a:p>
         </p:txBody>
       </p:sp>
@@ -4781,13 +4970,6 @@
             <a:prstDash val="solid"/>
           </a:ln>
         </p:spPr>
-        <p:txBody>
-          <a:bodyPr/>
-          <a:lstStyle/>
-          <a:p>
-            <a:endParaRPr lang="ko-KR" altLang="en-US" sz="2400"/>
-          </a:p>
-        </p:txBody>
       </p:sp>
       <p:sp>
         <p:nvSpPr>
@@ -4810,11 +4992,11 @@
           <a:bodyPr wrap="square" rtlCol="0" anchor="ctr"/>
           <a:lstStyle/>
           <a:p>
-            <a:pPr marL="0" indent="0">
-              <a:buNone/>
-            </a:pPr>
-            <a:r>
-              <a:rPr lang="en-US" sz="1600" b="1" dirty="0">
+            <a:pPr indent="0" marL="0">
+              <a:buNone/>
+            </a:pPr>
+            <a:r>
+              <a:rPr lang="en-US" sz="1250" b="1" dirty="0">
                 <a:solidFill>
                   <a:srgbClr val="1E2761"/>
                 </a:solidFill>
@@ -4824,7 +5006,7 @@
               </a:rPr>
               <a:t>해석</a:t>
             </a:r>
-            <a:endParaRPr lang="en-US" sz="1600" dirty="0"/>
+            <a:endParaRPr lang="en-US" sz="1250" dirty="0"/>
           </a:p>
         </p:txBody>
       </p:sp>
@@ -4849,11 +5031,11 @@
           <a:bodyPr wrap="square" rtlCol="0" anchor="t"/>
           <a:lstStyle/>
           <a:p>
-            <a:pPr marL="0" indent="0">
-              <a:buNone/>
-            </a:pPr>
-            <a:r>
-              <a:rPr lang="en-US" dirty="0">
+            <a:pPr indent="0" marL="0">
+              <a:buNone/>
+            </a:pPr>
+            <a:r>
+              <a:rPr lang="en-US" sz="1400" dirty="0">
                 <a:solidFill>
                   <a:srgbClr val="222633"/>
                 </a:solidFill>
@@ -4863,7 +5045,7 @@
               </a:rPr>
               <a:t>PER은 순이익이 마이너스면 계산이 무의미하지만, PSR은 매출만 있으면 계산 가능</a:t>
             </a:r>
-            <a:endParaRPr lang="en-US" dirty="0"/>
+            <a:endParaRPr lang="en-US" sz="1400" dirty="0"/>
           </a:p>
         </p:txBody>
       </p:sp>
@@ -4888,11 +5070,11 @@
           <a:bodyPr wrap="square" rtlCol="0" anchor="ctr"/>
           <a:lstStyle/>
           <a:p>
-            <a:pPr marL="0" indent="0">
-              <a:buNone/>
-            </a:pPr>
-            <a:r>
-              <a:rPr lang="en-US" sz="2000" b="1" dirty="0">
+            <a:pPr indent="0" marL="0">
+              <a:buNone/>
+            </a:pPr>
+            <a:r>
+              <a:rPr lang="en-US" sz="1700" b="1" dirty="0">
                 <a:solidFill>
                   <a:srgbClr val="1E2761"/>
                 </a:solidFill>
@@ -4902,7 +5084,7 @@
               </a:rPr>
               <a:t>활용과 한계</a:t>
             </a:r>
-            <a:endParaRPr lang="en-US" sz="2000" dirty="0"/>
+            <a:endParaRPr lang="en-US" sz="1700" dirty="0"/>
           </a:p>
         </p:txBody>
       </p:sp>
@@ -4927,11 +5109,11 @@
           <a:bodyPr wrap="square" rtlCol="0" anchor="ctr"/>
           <a:lstStyle/>
           <a:p>
-            <a:pPr marL="0" indent="0">
-              <a:buNone/>
-            </a:pPr>
-            <a:r>
-              <a:rPr lang="en-US" dirty="0">
+            <a:pPr indent="0" marL="0">
+              <a:buNone/>
+            </a:pPr>
+            <a:r>
+              <a:rPr lang="en-US" sz="1400" dirty="0">
                 <a:solidFill>
                   <a:srgbClr val="222633"/>
                 </a:solidFill>
@@ -4941,7 +5123,7 @@
               </a:rPr>
               <a:t>•  활용: 쿠팡·테슬라 초기처럼 적자였지만 매출 성장이 빠른 기업, SaaS 기업 평가에 널리 사용</a:t>
             </a:r>
-            <a:endParaRPr lang="en-US" dirty="0"/>
+            <a:endParaRPr lang="en-US" sz="1400" dirty="0"/>
           </a:p>
         </p:txBody>
       </p:sp>
@@ -4966,11 +5148,11 @@
           <a:bodyPr wrap="square" rtlCol="0" anchor="ctr"/>
           <a:lstStyle/>
           <a:p>
-            <a:pPr marL="0" indent="0">
-              <a:buNone/>
-            </a:pPr>
-            <a:r>
-              <a:rPr lang="en-US" dirty="0">
+            <a:pPr indent="0" marL="0">
+              <a:buNone/>
+            </a:pPr>
+            <a:r>
+              <a:rPr lang="en-US" sz="1400" dirty="0">
                 <a:solidFill>
                   <a:srgbClr val="222633"/>
                 </a:solidFill>
@@ -4980,7 +5162,7 @@
               </a:rPr>
               <a:t>•  한계: 수익성(마진)을 반영하지 못해, 매출은 크지만 마진이 낮은 기업도 낮은 PSR로 착시 가능</a:t>
             </a:r>
-            <a:endParaRPr lang="en-US" dirty="0"/>
+            <a:endParaRPr lang="en-US" sz="1400" dirty="0"/>
           </a:p>
         </p:txBody>
       </p:sp>
@@ -5005,7 +5187,7 @@
           <a:bodyPr wrap="square" rtlCol="0" anchor="ctr"/>
           <a:lstStyle/>
           <a:p>
-            <a:pPr marL="0" indent="0" algn="r">
+            <a:pPr algn="r" indent="0" marL="0">
               <a:buNone/>
             </a:pPr>
             <a:r>
@@ -5039,7 +5221,6 @@
         <a:solidFill>
           <a:srgbClr val="FFFFFF"/>
         </a:solidFill>
-        <a:effectLst/>
       </p:bgPr>
     </p:bg>
     <p:spTree>
@@ -5077,11 +5258,11 @@
           <a:bodyPr wrap="square" rtlCol="0" anchor="ctr"/>
           <a:lstStyle/>
           <a:p>
-            <a:pPr marL="0" indent="0">
-              <a:buNone/>
-            </a:pPr>
-            <a:r>
-              <a:rPr lang="en-US" sz="1300" b="1" kern="0" spc="200" dirty="0">
+            <a:pPr indent="0" marL="0">
+              <a:buNone/>
+            </a:pPr>
+            <a:r>
+              <a:rPr lang="en-US" sz="1300" b="1" spc="200" kern="0" dirty="0">
                 <a:solidFill>
                   <a:srgbClr val="9C7A0A"/>
                 </a:solidFill>
@@ -5116,7 +5297,7 @@
           <a:bodyPr wrap="square" rtlCol="0" anchor="ctr"/>
           <a:lstStyle/>
           <a:p>
-            <a:pPr marL="0" indent="0" algn="l">
+            <a:pPr algn="l" indent="0" marL="0">
               <a:buNone/>
             </a:pPr>
             <a:r>
@@ -5160,13 +5341,6 @@
             <a:prstDash val="solid"/>
           </a:ln>
         </p:spPr>
-        <p:txBody>
-          <a:bodyPr/>
-          <a:lstStyle/>
-          <a:p>
-            <a:endParaRPr lang="ko-KR" altLang="en-US" sz="2400"/>
-          </a:p>
-        </p:txBody>
       </p:sp>
       <p:sp>
         <p:nvSpPr>
@@ -5189,11 +5363,11 @@
           <a:bodyPr wrap="square" rtlCol="0" anchor="ctr"/>
           <a:lstStyle/>
           <a:p>
-            <a:pPr marL="0" indent="0">
-              <a:buNone/>
-            </a:pPr>
-            <a:r>
-              <a:rPr lang="en-US" sz="2800" b="1" dirty="0">
+            <a:pPr indent="0" marL="0">
+              <a:buNone/>
+            </a:pPr>
+            <a:r>
+              <a:rPr lang="en-US" sz="2000" b="1" dirty="0">
                 <a:solidFill>
                   <a:srgbClr val="1E2761"/>
                 </a:solidFill>
@@ -5203,7 +5377,7 @@
               </a:rPr>
               <a:t>EV (기업가치)</a:t>
             </a:r>
-            <a:endParaRPr lang="en-US" sz="2800" dirty="0"/>
+            <a:endParaRPr lang="en-US" sz="2000" dirty="0"/>
           </a:p>
         </p:txBody>
       </p:sp>
@@ -5228,11 +5402,11 @@
           <a:bodyPr wrap="square" rtlCol="0" anchor="ctr"/>
           <a:lstStyle/>
           <a:p>
-            <a:pPr marL="0" indent="0">
-              <a:buNone/>
-            </a:pPr>
-            <a:r>
-              <a:rPr lang="en-US" sz="1600" i="1" dirty="0">
+            <a:pPr indent="0" marL="0">
+              <a:buNone/>
+            </a:pPr>
+            <a:r>
+              <a:rPr lang="en-US" sz="1250" i="1" dirty="0">
                 <a:solidFill>
                   <a:srgbClr val="5A5F73"/>
                 </a:solidFill>
@@ -5242,7 +5416,7 @@
               </a:rPr>
               <a:t>Enterprise Value</a:t>
             </a:r>
-            <a:endParaRPr lang="en-US" sz="1600" dirty="0"/>
+            <a:endParaRPr lang="en-US" sz="1250" dirty="0"/>
           </a:p>
         </p:txBody>
       </p:sp>
@@ -5267,11 +5441,11 @@
           <a:bodyPr wrap="square" rtlCol="0" anchor="ctr"/>
           <a:lstStyle/>
           <a:p>
-            <a:pPr marL="0" indent="0">
-              <a:buNone/>
-            </a:pPr>
-            <a:r>
-              <a:rPr lang="en-US" sz="1600" dirty="0">
+            <a:pPr indent="0" marL="0">
+              <a:buNone/>
+            </a:pPr>
+            <a:r>
+              <a:rPr lang="en-US" sz="1350" dirty="0">
                 <a:solidFill>
                   <a:srgbClr val="222633"/>
                 </a:solidFill>
@@ -5281,7 +5455,7 @@
               </a:rPr>
               <a:t>기업 전체를 인수한다고 가정할 때 실질적으로 지불해야 하는 총 가치</a:t>
             </a:r>
-            <a:endParaRPr lang="en-US" sz="1600" dirty="0"/>
+            <a:endParaRPr lang="en-US" sz="1350" dirty="0"/>
           </a:p>
         </p:txBody>
       </p:sp>
@@ -5304,13 +5478,6 @@
           </a:solidFill>
           <a:ln/>
         </p:spPr>
-        <p:txBody>
-          <a:bodyPr/>
-          <a:lstStyle/>
-          <a:p>
-            <a:endParaRPr lang="ko-KR" altLang="en-US" sz="2400"/>
-          </a:p>
-        </p:txBody>
       </p:sp>
       <p:sp>
         <p:nvSpPr>
@@ -5333,11 +5500,11 @@
           <a:bodyPr wrap="square" rtlCol="0" anchor="ctr"/>
           <a:lstStyle/>
           <a:p>
-            <a:pPr marL="0" indent="0">
-              <a:buNone/>
-            </a:pPr>
-            <a:r>
-              <a:rPr lang="en-US" sz="1600" b="1" dirty="0">
+            <a:pPr indent="0" marL="0">
+              <a:buNone/>
+            </a:pPr>
+            <a:r>
+              <a:rPr lang="en-US" sz="1250" b="1" dirty="0">
                 <a:solidFill>
                   <a:srgbClr val="1E2761"/>
                 </a:solidFill>
@@ -5347,7 +5514,7 @@
               </a:rPr>
               <a:t>D기업 예시</a:t>
             </a:r>
-            <a:endParaRPr lang="en-US" sz="1600" dirty="0"/>
+            <a:endParaRPr lang="en-US" sz="1250" dirty="0"/>
           </a:p>
         </p:txBody>
       </p:sp>
@@ -5372,14 +5539,14 @@
           <a:bodyPr wrap="square" rtlCol="0" anchor="ctr"/>
           <a:lstStyle/>
           <a:p>
-            <a:pPr marL="0" indent="0">
+            <a:pPr indent="0" marL="0">
               <a:lnSpc>
                 <a:spcPct val="125000"/>
               </a:lnSpc>
               <a:buNone/>
             </a:pPr>
             <a:r>
-              <a:rPr lang="en-US" dirty="0">
+              <a:rPr lang="en-US" sz="1450" dirty="0">
                 <a:solidFill>
                   <a:srgbClr val="222633"/>
                 </a:solidFill>
@@ -5389,17 +5556,17 @@
               </a:rPr>
               <a:t>시가총액   5,000억 원</a:t>
             </a:r>
-            <a:endParaRPr lang="en-US" dirty="0"/>
-          </a:p>
-          <a:p>
-            <a:pPr marL="0" indent="0">
+            <a:endParaRPr lang="en-US" sz="1450" dirty="0"/>
+          </a:p>
+          <a:p>
+            <a:pPr indent="0" marL="0">
               <a:lnSpc>
                 <a:spcPct val="125000"/>
               </a:lnSpc>
               <a:buNone/>
             </a:pPr>
             <a:r>
-              <a:rPr lang="en-US" dirty="0">
+              <a:rPr lang="en-US" sz="1450" dirty="0">
                 <a:solidFill>
                   <a:srgbClr val="222633"/>
                 </a:solidFill>
@@ -5409,17 +5576,17 @@
               </a:rPr>
               <a:t>(+) 총차입금  2,000억 원</a:t>
             </a:r>
-            <a:endParaRPr lang="en-US" dirty="0"/>
-          </a:p>
-          <a:p>
-            <a:pPr marL="0" indent="0">
+            <a:endParaRPr lang="en-US" sz="1450" dirty="0"/>
+          </a:p>
+          <a:p>
+            <a:pPr indent="0" marL="0">
               <a:lnSpc>
                 <a:spcPct val="125000"/>
               </a:lnSpc>
               <a:buNone/>
             </a:pPr>
             <a:r>
-              <a:rPr lang="en-US" dirty="0">
+              <a:rPr lang="en-US" sz="1450" dirty="0">
                 <a:solidFill>
                   <a:srgbClr val="222633"/>
                 </a:solidFill>
@@ -5429,7 +5596,7 @@
               </a:rPr>
               <a:t>(−) 현금      500억 원</a:t>
             </a:r>
-            <a:endParaRPr lang="en-US" dirty="0"/>
+            <a:endParaRPr lang="en-US" sz="1450" dirty="0"/>
           </a:p>
         </p:txBody>
       </p:sp>
@@ -5459,13 +5626,6 @@
             <a:prstDash val="solid"/>
           </a:ln>
         </p:spPr>
-        <p:txBody>
-          <a:bodyPr/>
-          <a:lstStyle/>
-          <a:p>
-            <a:endParaRPr lang="ko-KR" altLang="en-US" sz="2400"/>
-          </a:p>
-        </p:txBody>
       </p:sp>
       <p:sp>
         <p:nvSpPr>
@@ -5488,11 +5648,11 @@
           <a:bodyPr wrap="square" rtlCol="0" anchor="ctr"/>
           <a:lstStyle/>
           <a:p>
-            <a:pPr marL="0" indent="0" algn="ctr">
-              <a:buNone/>
-            </a:pPr>
-            <a:r>
-              <a:rPr lang="en-US" sz="2000" b="1" dirty="0">
+            <a:pPr algn="ctr" indent="0" marL="0">
+              <a:buNone/>
+            </a:pPr>
+            <a:r>
+              <a:rPr lang="en-US" sz="1700" b="1" dirty="0">
                 <a:solidFill>
                   <a:srgbClr val="1E2761"/>
                 </a:solidFill>
@@ -5502,7 +5662,7 @@
               </a:rPr>
               <a:t>EV = 6,500억 원</a:t>
             </a:r>
-            <a:endParaRPr lang="en-US" sz="2000" dirty="0"/>
+            <a:endParaRPr lang="en-US" sz="1700" dirty="0"/>
           </a:p>
         </p:txBody>
       </p:sp>
@@ -5527,11 +5687,11 @@
           <a:bodyPr wrap="square" rtlCol="0" anchor="ctr"/>
           <a:lstStyle/>
           <a:p>
-            <a:pPr marL="0" indent="0">
-              <a:buNone/>
-            </a:pPr>
-            <a:r>
-              <a:rPr lang="en-US" sz="1600" i="1" dirty="0">
+            <a:pPr indent="0" marL="0">
+              <a:buNone/>
+            </a:pPr>
+            <a:r>
+              <a:rPr lang="en-US" sz="1300" i="1" dirty="0">
                 <a:solidFill>
                   <a:srgbClr val="5A5F73"/>
                 </a:solidFill>
@@ -5541,7 +5701,7 @@
               </a:rPr>
               <a:t>→ 주식을 전부 사는 비용 + 부채 부담 − 인수 후 즉시 회수 가능한 현금</a:t>
             </a:r>
-            <a:endParaRPr lang="en-US" sz="1600" dirty="0"/>
+            <a:endParaRPr lang="en-US" sz="1300" dirty="0"/>
           </a:p>
         </p:txBody>
       </p:sp>
@@ -5571,13 +5731,6 @@
             <a:prstDash val="solid"/>
           </a:ln>
         </p:spPr>
-        <p:txBody>
-          <a:bodyPr/>
-          <a:lstStyle/>
-          <a:p>
-            <a:endParaRPr lang="ko-KR" altLang="en-US" sz="2400"/>
-          </a:p>
-        </p:txBody>
       </p:sp>
       <p:sp>
         <p:nvSpPr>
@@ -5600,11 +5753,11 @@
           <a:bodyPr wrap="square" rtlCol="0" anchor="ctr"/>
           <a:lstStyle/>
           <a:p>
-            <a:pPr marL="0" indent="0">
-              <a:buNone/>
-            </a:pPr>
-            <a:r>
-              <a:rPr lang="en-US" sz="2800" b="1" dirty="0">
+            <a:pPr indent="0" marL="0">
+              <a:buNone/>
+            </a:pPr>
+            <a:r>
+              <a:rPr lang="en-US" sz="2000" b="1" dirty="0">
                 <a:solidFill>
                   <a:srgbClr val="1E2761"/>
                 </a:solidFill>
@@ -5614,7 +5767,7 @@
               </a:rPr>
               <a:t>EBITDA</a:t>
             </a:r>
-            <a:endParaRPr lang="en-US" sz="2800" dirty="0"/>
+            <a:endParaRPr lang="en-US" sz="2000" dirty="0"/>
           </a:p>
         </p:txBody>
       </p:sp>
@@ -5639,11 +5792,11 @@
           <a:bodyPr wrap="square" rtlCol="0" anchor="ctr"/>
           <a:lstStyle/>
           <a:p>
-            <a:pPr marL="0" indent="0">
-              <a:buNone/>
-            </a:pPr>
-            <a:r>
-              <a:rPr lang="en-US" sz="1600" i="1" dirty="0">
+            <a:pPr indent="0" marL="0">
+              <a:buNone/>
+            </a:pPr>
+            <a:r>
+              <a:rPr lang="en-US" sz="1250" i="1" dirty="0">
                 <a:solidFill>
                   <a:srgbClr val="5A5F73"/>
                 </a:solidFill>
@@ -5653,7 +5806,7 @@
               </a:rPr>
               <a:t>이자·세금·감가상각 전 영업이익</a:t>
             </a:r>
-            <a:endParaRPr lang="en-US" sz="1600" dirty="0"/>
+            <a:endParaRPr lang="en-US" sz="1250" dirty="0"/>
           </a:p>
         </p:txBody>
       </p:sp>
@@ -5678,11 +5831,11 @@
           <a:bodyPr wrap="square" rtlCol="0" anchor="ctr"/>
           <a:lstStyle/>
           <a:p>
-            <a:pPr marL="0" indent="0">
-              <a:buNone/>
-            </a:pPr>
-            <a:r>
-              <a:rPr lang="en-US" sz="1600" dirty="0">
+            <a:pPr indent="0" marL="0">
+              <a:buNone/>
+            </a:pPr>
+            <a:r>
+              <a:rPr lang="en-US" sz="1350" dirty="0">
                 <a:solidFill>
                   <a:srgbClr val="222633"/>
                 </a:solidFill>
@@ -5692,7 +5845,7 @@
               </a:rPr>
               <a:t>기업의 “현금창출능력”에 가깝게 근사한 지표</a:t>
             </a:r>
-            <a:endParaRPr lang="en-US" sz="1600" dirty="0"/>
+            <a:endParaRPr lang="en-US" sz="1350" dirty="0"/>
           </a:p>
         </p:txBody>
       </p:sp>
@@ -5715,13 +5868,6 @@
           </a:solidFill>
           <a:ln/>
         </p:spPr>
-        <p:txBody>
-          <a:bodyPr/>
-          <a:lstStyle/>
-          <a:p>
-            <a:endParaRPr lang="ko-KR" altLang="en-US" sz="2400"/>
-          </a:p>
-        </p:txBody>
       </p:sp>
       <p:sp>
         <p:nvSpPr>
@@ -5744,11 +5890,11 @@
           <a:bodyPr wrap="square" rtlCol="0" anchor="ctr"/>
           <a:lstStyle/>
           <a:p>
-            <a:pPr marL="0" indent="0">
-              <a:buNone/>
-            </a:pPr>
-            <a:r>
-              <a:rPr lang="en-US" sz="1600" b="1" dirty="0">
+            <a:pPr indent="0" marL="0">
+              <a:buNone/>
+            </a:pPr>
+            <a:r>
+              <a:rPr lang="en-US" sz="1250" b="1" dirty="0">
                 <a:solidFill>
                   <a:srgbClr val="1E2761"/>
                 </a:solidFill>
@@ -5758,7 +5904,7 @@
               </a:rPr>
               <a:t>E기업 예시</a:t>
             </a:r>
-            <a:endParaRPr lang="en-US" sz="1600" dirty="0"/>
+            <a:endParaRPr lang="en-US" sz="1250" dirty="0"/>
           </a:p>
         </p:txBody>
       </p:sp>
@@ -5783,14 +5929,14 @@
           <a:bodyPr wrap="square" rtlCol="0" anchor="ctr"/>
           <a:lstStyle/>
           <a:p>
-            <a:pPr marL="0" indent="0">
+            <a:pPr indent="0" marL="0">
               <a:lnSpc>
                 <a:spcPct val="125000"/>
               </a:lnSpc>
               <a:buNone/>
             </a:pPr>
             <a:r>
-              <a:rPr lang="en-US" dirty="0">
+              <a:rPr lang="en-US" sz="1450" dirty="0">
                 <a:solidFill>
                   <a:srgbClr val="222633"/>
                 </a:solidFill>
@@ -5800,17 +5946,17 @@
               </a:rPr>
               <a:t>영업이익      800억 원</a:t>
             </a:r>
-            <a:endParaRPr lang="en-US" dirty="0"/>
-          </a:p>
-          <a:p>
-            <a:pPr marL="0" indent="0">
+            <a:endParaRPr lang="en-US" sz="1450" dirty="0"/>
+          </a:p>
+          <a:p>
+            <a:pPr indent="0" marL="0">
               <a:lnSpc>
                 <a:spcPct val="125000"/>
               </a:lnSpc>
               <a:buNone/>
             </a:pPr>
             <a:r>
-              <a:rPr lang="en-US" dirty="0">
+              <a:rPr lang="en-US" sz="1450" dirty="0">
                 <a:solidFill>
                   <a:srgbClr val="222633"/>
                 </a:solidFill>
@@ -5820,7 +5966,7 @@
               </a:rPr>
               <a:t>(+) 감가상각비   200억 원</a:t>
             </a:r>
-            <a:endParaRPr lang="en-US" dirty="0"/>
+            <a:endParaRPr lang="en-US" sz="1450" dirty="0"/>
           </a:p>
         </p:txBody>
       </p:sp>
@@ -5850,13 +5996,6 @@
             <a:prstDash val="solid"/>
           </a:ln>
         </p:spPr>
-        <p:txBody>
-          <a:bodyPr/>
-          <a:lstStyle/>
-          <a:p>
-            <a:endParaRPr lang="ko-KR" altLang="en-US" sz="2400"/>
-          </a:p>
-        </p:txBody>
       </p:sp>
       <p:sp>
         <p:nvSpPr>
@@ -5879,11 +6018,11 @@
           <a:bodyPr wrap="square" rtlCol="0" anchor="ctr"/>
           <a:lstStyle/>
           <a:p>
-            <a:pPr marL="0" indent="0" algn="ctr">
-              <a:buNone/>
-            </a:pPr>
-            <a:r>
-              <a:rPr lang="en-US" sz="2000" b="1" dirty="0">
+            <a:pPr algn="ctr" indent="0" marL="0">
+              <a:buNone/>
+            </a:pPr>
+            <a:r>
+              <a:rPr lang="en-US" sz="1700" b="1" dirty="0">
                 <a:solidFill>
                   <a:srgbClr val="9C7A0A"/>
                 </a:solidFill>
@@ -5893,7 +6032,7 @@
               </a:rPr>
               <a:t>EBITDA = 1,000억 원</a:t>
             </a:r>
-            <a:endParaRPr lang="en-US" sz="2000" dirty="0"/>
+            <a:endParaRPr lang="en-US" sz="1700" dirty="0"/>
           </a:p>
         </p:txBody>
       </p:sp>
@@ -5918,11 +6057,11 @@
           <a:bodyPr wrap="square" rtlCol="0" anchor="ctr"/>
           <a:lstStyle/>
           <a:p>
-            <a:pPr marL="0" indent="0">
-              <a:buNone/>
-            </a:pPr>
-            <a:r>
-              <a:rPr lang="en-US" sz="1600" i="1" dirty="0">
+            <a:pPr indent="0" marL="0">
+              <a:buNone/>
+            </a:pPr>
+            <a:r>
+              <a:rPr lang="en-US" sz="1300" i="1" dirty="0">
                 <a:solidFill>
                   <a:srgbClr val="5A5F73"/>
                 </a:solidFill>
@@ -5932,7 +6071,7 @@
               </a:rPr>
               <a:t>→ 감가상각비는 실제 현금유출이 아니므로 다시 더해 “현금 기준 수익성”을 봄</a:t>
             </a:r>
-            <a:endParaRPr lang="en-US" sz="1600" dirty="0"/>
+            <a:endParaRPr lang="en-US" sz="1300" dirty="0"/>
           </a:p>
         </p:txBody>
       </p:sp>
@@ -5957,11 +6096,11 @@
           <a:bodyPr wrap="square" rtlCol="0" anchor="ctr"/>
           <a:lstStyle/>
           <a:p>
-            <a:pPr marL="0" indent="0" algn="r">
-              <a:buNone/>
-            </a:pPr>
-            <a:r>
-              <a:rPr lang="en-US" sz="1400" dirty="0">
+            <a:pPr algn="r" indent="0" marL="0">
+              <a:buNone/>
+            </a:pPr>
+            <a:r>
+              <a:rPr lang="en-US" sz="1100" dirty="0">
                 <a:solidFill>
                   <a:srgbClr val="5A5F73"/>
                 </a:solidFill>
@@ -5971,7 +6110,7 @@
               </a:rPr>
               <a:t>14</a:t>
             </a:r>
-            <a:endParaRPr lang="en-US" sz="1400" dirty="0"/>
+            <a:endParaRPr lang="en-US" sz="1100" dirty="0"/>
           </a:p>
         </p:txBody>
       </p:sp>
@@ -5991,7 +6130,6 @@
         <a:solidFill>
           <a:srgbClr val="FFFFFF"/>
         </a:solidFill>
-        <a:effectLst/>
       </p:bgPr>
     </p:bg>
     <p:spTree>
@@ -6029,11 +6167,11 @@
           <a:bodyPr wrap="square" rtlCol="0" anchor="ctr"/>
           <a:lstStyle/>
           <a:p>
-            <a:pPr marL="0" indent="0">
-              <a:buNone/>
-            </a:pPr>
-            <a:r>
-              <a:rPr lang="en-US" sz="1300" b="1" kern="0" spc="200" dirty="0">
+            <a:pPr indent="0" marL="0">
+              <a:buNone/>
+            </a:pPr>
+            <a:r>
+              <a:rPr lang="en-US" sz="1300" b="1" spc="200" kern="0" dirty="0">
                 <a:solidFill>
                   <a:srgbClr val="9C7A0A"/>
                 </a:solidFill>
@@ -6068,7 +6206,7 @@
           <a:bodyPr wrap="square" rtlCol="0" anchor="ctr"/>
           <a:lstStyle/>
           <a:p>
-            <a:pPr marL="0" indent="0" algn="l">
+            <a:pPr algn="l" indent="0" marL="0">
               <a:buNone/>
             </a:pPr>
             <a:r>
@@ -6095,23 +6233,23 @@
         <p:spPr>
           <a:xfrm>
             <a:off x="548640" y="1234440"/>
-            <a:ext cx="11363960" cy="457200"/>
-          </a:xfrm>
-          <a:prstGeom prst="rect">
-            <a:avLst/>
-          </a:prstGeom>
-          <a:noFill/>
-          <a:ln/>
-        </p:spPr>
-        <p:txBody>
-          <a:bodyPr wrap="square" rtlCol="0" anchor="ctr"/>
-          <a:lstStyle/>
-          <a:p>
-            <a:pPr marL="0" indent="0">
-              <a:buNone/>
-            </a:pPr>
-            <a:r>
-              <a:rPr lang="en-US" dirty="0">
+            <a:ext cx="10881360" cy="457200"/>
+          </a:xfrm>
+          <a:prstGeom prst="rect">
+            <a:avLst/>
+          </a:prstGeom>
+          <a:noFill/>
+          <a:ln/>
+        </p:spPr>
+        <p:txBody>
+          <a:bodyPr wrap="square" rtlCol="0" anchor="ctr"/>
+          <a:lstStyle/>
+          <a:p>
+            <a:pPr indent="0" marL="0">
+              <a:buNone/>
+            </a:pPr>
+            <a:r>
+              <a:rPr lang="en-US" sz="1450" dirty="0">
                 <a:solidFill>
                   <a:srgbClr val="5A5F73"/>
                 </a:solidFill>
@@ -6121,7 +6259,7 @@
               </a:rPr>
               <a:t>F기업(무차입)과 G기업(차입금 많음)을 비교하면, 부채 구조의 영향이 어떻게 다르게 나타나는지 알 수 있습니다.</a:t>
             </a:r>
-            <a:endParaRPr lang="en-US" dirty="0"/>
+            <a:endParaRPr lang="en-US" sz="1450" dirty="0"/>
           </a:p>
         </p:txBody>
       </p:sp>
@@ -6134,7 +6272,7 @@
           <p:nvPr>
             <p:extLst>
               <p:ext uri="{D42A27DB-BD31-4B8C-83A1-F6EECF244321}">
-                <p14:modId xmlns:p14="http://schemas.microsoft.com/office/powerpoint/2010/main" val="3750882152"/>
+                <p14:modId xmlns:p14="http://schemas.microsoft.com/office/powerpoint/2010/main" val="1579011935"/>
               </p:ext>
             </p:extLst>
           </p:nvPr>
@@ -6148,27 +6286,9 @@
             <a:tbl>
               <a:tblPr/>
               <a:tblGrid>
-                <a:gridCol w="3749040">
-                  <a:extLst>
-                    <a:ext uri="{9D8B030D-6E8A-4147-A177-3AD203B41FA5}">
-                      <a16:colId xmlns:a16="http://schemas.microsoft.com/office/drawing/2014/main" val="20000"/>
-                    </a:ext>
-                  </a:extLst>
-                </a:gridCol>
-                <a:gridCol w="3657600">
-                  <a:extLst>
-                    <a:ext uri="{9D8B030D-6E8A-4147-A177-3AD203B41FA5}">
-                      <a16:colId xmlns:a16="http://schemas.microsoft.com/office/drawing/2014/main" val="20001"/>
-                    </a:ext>
-                  </a:extLst>
-                </a:gridCol>
-                <a:gridCol w="3657600">
-                  <a:extLst>
-                    <a:ext uri="{9D8B030D-6E8A-4147-A177-3AD203B41FA5}">
-                      <a16:colId xmlns:a16="http://schemas.microsoft.com/office/drawing/2014/main" val="20002"/>
-                    </a:ext>
-                  </a:extLst>
-                </a:gridCol>
+                <a:gridCol w="3749040"/>
+                <a:gridCol w="3657600"/>
+                <a:gridCol w="3657600"/>
               </a:tblGrid>
               <a:tr h="401320">
                 <a:tc>
@@ -6176,11 +6296,11 @@
                     <a:bodyPr/>
                     <a:lstStyle/>
                     <a:p>
-                      <a:pPr marL="0" indent="0" algn="ctr">
+                      <a:pPr algn="ctr" indent="0" marL="0">
                         <a:buNone/>
                       </a:pPr>
                       <a:r>
-                        <a:rPr lang="en-US" sz="1600" b="1" dirty="0">
+                        <a:rPr lang="en-US" sz="1500" b="1" dirty="0">
                           <a:solidFill>
                             <a:srgbClr val="1E2761"/>
                           </a:solidFill>
@@ -6190,14 +6310,14 @@
                         </a:rPr>
                         <a:t>구분</a:t>
                       </a:r>
-                      <a:endParaRPr lang="en-US" sz="1600" dirty="0">
+                      <a:endParaRPr lang="en-US" sz="1500" dirty="0">
                         <a:latin typeface="Calibri" charset="0"/>
                         <a:ea typeface="Calibri" charset="0"/>
                         <a:cs typeface="Calibri" charset="0"/>
                       </a:endParaRPr>
                     </a:p>
                   </a:txBody>
-                  <a:tcPr anchor="ctr">
+                  <a:tcPr marL="91440" marR="91440" marT="45720" marB="45720" anchor="ctr">
                     <a:lnL w="9525" cap="flat" cmpd="sng" algn="ctr">
                       <a:solidFill>
                         <a:srgbClr val="C9D2E3"/>
@@ -6244,11 +6364,11 @@
                     <a:bodyPr/>
                     <a:lstStyle/>
                     <a:p>
-                      <a:pPr marL="0" indent="0" algn="ctr">
+                      <a:pPr algn="ctr" indent="0" marL="0">
                         <a:buNone/>
                       </a:pPr>
                       <a:r>
-                        <a:rPr lang="en-US" sz="1600" b="1" dirty="0">
+                        <a:rPr lang="en-US" sz="1500" b="1" dirty="0">
                           <a:solidFill>
                             <a:srgbClr val="1E2761"/>
                           </a:solidFill>
@@ -6258,14 +6378,14 @@
                         </a:rPr>
                         <a:t>F기업 (무차입)</a:t>
                       </a:r>
-                      <a:endParaRPr lang="en-US" sz="1600" dirty="0">
+                      <a:endParaRPr lang="en-US" sz="1500" dirty="0">
                         <a:latin typeface="Calibri" charset="0"/>
                         <a:ea typeface="Calibri" charset="0"/>
                         <a:cs typeface="Calibri" charset="0"/>
                       </a:endParaRPr>
                     </a:p>
                   </a:txBody>
-                  <a:tcPr anchor="ctr">
+                  <a:tcPr marL="91440" marR="91440" marT="45720" marB="45720" anchor="ctr">
                     <a:lnL w="9525" cap="flat" cmpd="sng" algn="ctr">
                       <a:solidFill>
                         <a:srgbClr val="C9D2E3"/>
@@ -6312,11 +6432,11 @@
                     <a:bodyPr/>
                     <a:lstStyle/>
                     <a:p>
-                      <a:pPr marL="0" indent="0" algn="ctr">
+                      <a:pPr algn="ctr" indent="0" marL="0">
                         <a:buNone/>
                       </a:pPr>
                       <a:r>
-                        <a:rPr lang="en-US" sz="1600" b="1" dirty="0">
+                        <a:rPr lang="en-US" sz="1500" b="1" dirty="0">
                           <a:solidFill>
                             <a:srgbClr val="1E2761"/>
                           </a:solidFill>
@@ -6326,14 +6446,14 @@
                         </a:rPr>
                         <a:t>G기업 (차입금 많음)</a:t>
                       </a:r>
-                      <a:endParaRPr lang="en-US" sz="1600" dirty="0">
+                      <a:endParaRPr lang="en-US" sz="1500" dirty="0">
                         <a:latin typeface="Calibri" charset="0"/>
                         <a:ea typeface="Calibri" charset="0"/>
                         <a:cs typeface="Calibri" charset="0"/>
                       </a:endParaRPr>
                     </a:p>
                   </a:txBody>
-                  <a:tcPr anchor="ctr">
+                  <a:tcPr marL="91440" marR="91440" marT="45720" marB="45720" anchor="ctr">
                     <a:lnL w="9525" cap="flat" cmpd="sng" algn="ctr">
                       <a:solidFill>
                         <a:srgbClr val="C9D2E3"/>
@@ -6375,11 +6495,6 @@
                     </a:solidFill>
                   </a:tcPr>
                 </a:tc>
-                <a:extLst>
-                  <a:ext uri="{0D108BD9-81ED-4DB2-BD59-A6C34878D82A}">
-                    <a16:rowId xmlns:a16="http://schemas.microsoft.com/office/drawing/2014/main" val="10000"/>
-                  </a:ext>
-                </a:extLst>
               </a:tr>
               <a:tr h="401320">
                 <a:tc>
@@ -6387,11 +6502,11 @@
                     <a:bodyPr/>
                     <a:lstStyle/>
                     <a:p>
-                      <a:pPr marL="0" indent="0" algn="ctr">
+                      <a:pPr algn="ctr" indent="0" marL="0">
                         <a:buNone/>
                       </a:pPr>
                       <a:r>
-                        <a:rPr lang="en-US" sz="1600" dirty="0">
+                        <a:rPr lang="en-US" sz="1500" dirty="0">
                           <a:solidFill>
                             <a:srgbClr val="222633"/>
                           </a:solidFill>
@@ -6401,14 +6516,14 @@
                         </a:rPr>
                         <a:t>영업이익</a:t>
                       </a:r>
-                      <a:endParaRPr lang="en-US" sz="1600" dirty="0">
+                      <a:endParaRPr lang="en-US" sz="1500" dirty="0">
                         <a:latin typeface="Calibri" charset="0"/>
                         <a:ea typeface="Calibri" charset="0"/>
                         <a:cs typeface="Calibri" charset="0"/>
                       </a:endParaRPr>
                     </a:p>
                   </a:txBody>
-                  <a:tcPr anchor="ctr">
+                  <a:tcPr marL="91440" marR="91440" marT="45720" marB="45720" anchor="ctr">
                     <a:lnL w="9525" cap="flat" cmpd="sng" algn="ctr">
                       <a:solidFill>
                         <a:srgbClr val="C9D2E3"/>
@@ -6452,11 +6567,11 @@
                     <a:bodyPr/>
                     <a:lstStyle/>
                     <a:p>
-                      <a:pPr marL="0" indent="0" algn="ctr">
+                      <a:pPr algn="ctr" indent="0" marL="0">
                         <a:buNone/>
                       </a:pPr>
                       <a:r>
-                        <a:rPr lang="en-US" sz="1600" dirty="0">
+                        <a:rPr lang="en-US" sz="1500" dirty="0">
                           <a:solidFill>
                             <a:srgbClr val="222633"/>
                           </a:solidFill>
@@ -6466,14 +6581,14 @@
                         </a:rPr>
                         <a:t>500억 원</a:t>
                       </a:r>
-                      <a:endParaRPr lang="en-US" sz="1600" dirty="0">
+                      <a:endParaRPr lang="en-US" sz="1500" dirty="0">
                         <a:latin typeface="Calibri" charset="0"/>
                         <a:ea typeface="Calibri" charset="0"/>
                         <a:cs typeface="Calibri" charset="0"/>
                       </a:endParaRPr>
                     </a:p>
                   </a:txBody>
-                  <a:tcPr anchor="ctr">
+                  <a:tcPr marL="91440" marR="91440" marT="45720" marB="45720" anchor="ctr">
                     <a:lnL w="9525" cap="flat" cmpd="sng" algn="ctr">
                       <a:solidFill>
                         <a:srgbClr val="C9D2E3"/>
@@ -6517,11 +6632,11 @@
                     <a:bodyPr/>
                     <a:lstStyle/>
                     <a:p>
-                      <a:pPr marL="0" indent="0" algn="ctr">
+                      <a:pPr algn="ctr" indent="0" marL="0">
                         <a:buNone/>
                       </a:pPr>
                       <a:r>
-                        <a:rPr lang="en-US" sz="1600" dirty="0">
+                        <a:rPr lang="en-US" sz="1500" dirty="0">
                           <a:solidFill>
                             <a:srgbClr val="222633"/>
                           </a:solidFill>
@@ -6531,14 +6646,14 @@
                         </a:rPr>
                         <a:t>500억 원</a:t>
                       </a:r>
-                      <a:endParaRPr lang="en-US" sz="1600" dirty="0">
+                      <a:endParaRPr lang="en-US" sz="1500" dirty="0">
                         <a:latin typeface="Calibri" charset="0"/>
                         <a:ea typeface="Calibri" charset="0"/>
                         <a:cs typeface="Calibri" charset="0"/>
                       </a:endParaRPr>
                     </a:p>
                   </a:txBody>
-                  <a:tcPr anchor="ctr">
+                  <a:tcPr marL="91440" marR="91440" marT="45720" marB="45720" anchor="ctr">
                     <a:lnL w="9525" cap="flat" cmpd="sng" algn="ctr">
                       <a:solidFill>
                         <a:srgbClr val="C9D2E3"/>
@@ -6577,11 +6692,6 @@
                     </a:lnB>
                   </a:tcPr>
                 </a:tc>
-                <a:extLst>
-                  <a:ext uri="{0D108BD9-81ED-4DB2-BD59-A6C34878D82A}">
-                    <a16:rowId xmlns:a16="http://schemas.microsoft.com/office/drawing/2014/main" val="10001"/>
-                  </a:ext>
-                </a:extLst>
               </a:tr>
               <a:tr h="401320">
                 <a:tc>
@@ -6589,11 +6699,11 @@
                     <a:bodyPr/>
                     <a:lstStyle/>
                     <a:p>
-                      <a:pPr marL="0" indent="0" algn="ctr">
+                      <a:pPr algn="ctr" indent="0" marL="0">
                         <a:buNone/>
                       </a:pPr>
                       <a:r>
-                        <a:rPr lang="en-US" sz="1600" dirty="0">
+                        <a:rPr lang="en-US" sz="1500" dirty="0">
                           <a:solidFill>
                             <a:srgbClr val="222633"/>
                           </a:solidFill>
@@ -6603,14 +6713,14 @@
                         </a:rPr>
                         <a:t>이자비용</a:t>
                       </a:r>
-                      <a:endParaRPr lang="en-US" sz="1600" dirty="0">
+                      <a:endParaRPr lang="en-US" sz="1500" dirty="0">
                         <a:latin typeface="Calibri" charset="0"/>
                         <a:ea typeface="Calibri" charset="0"/>
                         <a:cs typeface="Calibri" charset="0"/>
                       </a:endParaRPr>
                     </a:p>
                   </a:txBody>
-                  <a:tcPr anchor="ctr">
+                  <a:tcPr marL="91440" marR="91440" marT="45720" marB="45720" anchor="ctr">
                     <a:lnL w="9525" cap="flat" cmpd="sng" algn="ctr">
                       <a:solidFill>
                         <a:srgbClr val="C9D2E3"/>
@@ -6654,11 +6764,11 @@
                     <a:bodyPr/>
                     <a:lstStyle/>
                     <a:p>
-                      <a:pPr marL="0" indent="0" algn="ctr">
+                      <a:pPr algn="ctr" indent="0" marL="0">
                         <a:buNone/>
                       </a:pPr>
                       <a:r>
-                        <a:rPr lang="en-US" sz="1600" dirty="0">
+                        <a:rPr lang="en-US" sz="1500" dirty="0">
                           <a:solidFill>
                             <a:srgbClr val="222633"/>
                           </a:solidFill>
@@ -6668,14 +6778,14 @@
                         </a:rPr>
                         <a:t>0원</a:t>
                       </a:r>
-                      <a:endParaRPr lang="en-US" sz="1600" dirty="0">
+                      <a:endParaRPr lang="en-US" sz="1500" dirty="0">
                         <a:latin typeface="Calibri" charset="0"/>
                         <a:ea typeface="Calibri" charset="0"/>
                         <a:cs typeface="Calibri" charset="0"/>
                       </a:endParaRPr>
                     </a:p>
                   </a:txBody>
-                  <a:tcPr anchor="ctr">
+                  <a:tcPr marL="91440" marR="91440" marT="45720" marB="45720" anchor="ctr">
                     <a:lnL w="9525" cap="flat" cmpd="sng" algn="ctr">
                       <a:solidFill>
                         <a:srgbClr val="C9D2E3"/>
@@ -6719,11 +6829,11 @@
                     <a:bodyPr/>
                     <a:lstStyle/>
                     <a:p>
-                      <a:pPr marL="0" indent="0" algn="ctr">
+                      <a:pPr algn="ctr" indent="0" marL="0">
                         <a:buNone/>
                       </a:pPr>
                       <a:r>
-                        <a:rPr lang="en-US" sz="1600" dirty="0">
+                        <a:rPr lang="en-US" sz="1500" dirty="0">
                           <a:solidFill>
                             <a:srgbClr val="222633"/>
                           </a:solidFill>
@@ -6733,14 +6843,14 @@
                         </a:rPr>
                         <a:t>200억 원</a:t>
                       </a:r>
-                      <a:endParaRPr lang="en-US" sz="1600" dirty="0">
+                      <a:endParaRPr lang="en-US" sz="1500" dirty="0">
                         <a:latin typeface="Calibri" charset="0"/>
                         <a:ea typeface="Calibri" charset="0"/>
                         <a:cs typeface="Calibri" charset="0"/>
                       </a:endParaRPr>
                     </a:p>
                   </a:txBody>
-                  <a:tcPr anchor="ctr">
+                  <a:tcPr marL="91440" marR="91440" marT="45720" marB="45720" anchor="ctr">
                     <a:lnL w="9525" cap="flat" cmpd="sng" algn="ctr">
                       <a:solidFill>
                         <a:srgbClr val="C9D2E3"/>
@@ -6779,11 +6889,6 @@
                     </a:lnB>
                   </a:tcPr>
                 </a:tc>
-                <a:extLst>
-                  <a:ext uri="{0D108BD9-81ED-4DB2-BD59-A6C34878D82A}">
-                    <a16:rowId xmlns:a16="http://schemas.microsoft.com/office/drawing/2014/main" val="10002"/>
-                  </a:ext>
-                </a:extLst>
               </a:tr>
               <a:tr h="401320">
                 <a:tc>
@@ -6791,11 +6896,11 @@
                     <a:bodyPr/>
                     <a:lstStyle/>
                     <a:p>
-                      <a:pPr marL="0" indent="0" algn="ctr">
+                      <a:pPr algn="ctr" indent="0" marL="0">
                         <a:buNone/>
                       </a:pPr>
                       <a:r>
-                        <a:rPr lang="en-US" sz="1600" dirty="0">
+                        <a:rPr lang="en-US" sz="1500" dirty="0">
                           <a:solidFill>
                             <a:srgbClr val="222633"/>
                           </a:solidFill>
@@ -6805,14 +6910,14 @@
                         </a:rPr>
                         <a:t>순이익 (세율 20% 가정)</a:t>
                       </a:r>
-                      <a:endParaRPr lang="en-US" sz="1600" dirty="0">
+                      <a:endParaRPr lang="en-US" sz="1500" dirty="0">
                         <a:latin typeface="Calibri" charset="0"/>
                         <a:ea typeface="Calibri" charset="0"/>
                         <a:cs typeface="Calibri" charset="0"/>
                       </a:endParaRPr>
                     </a:p>
                   </a:txBody>
-                  <a:tcPr anchor="ctr">
+                  <a:tcPr marL="91440" marR="91440" marT="45720" marB="45720" anchor="ctr">
                     <a:lnL w="9525" cap="flat" cmpd="sng" algn="ctr">
                       <a:solidFill>
                         <a:srgbClr val="C9D2E3"/>
@@ -6856,11 +6961,11 @@
                     <a:bodyPr/>
                     <a:lstStyle/>
                     <a:p>
-                      <a:pPr marL="0" indent="0" algn="ctr">
+                      <a:pPr algn="ctr" indent="0" marL="0">
                         <a:buNone/>
                       </a:pPr>
                       <a:r>
-                        <a:rPr lang="en-US" sz="1600" dirty="0">
+                        <a:rPr lang="en-US" sz="1500" dirty="0">
                           <a:solidFill>
                             <a:srgbClr val="222633"/>
                           </a:solidFill>
@@ -6870,14 +6975,14 @@
                         </a:rPr>
                         <a:t>400억 원</a:t>
                       </a:r>
-                      <a:endParaRPr lang="en-US" sz="1600" dirty="0">
+                      <a:endParaRPr lang="en-US" sz="1500" dirty="0">
                         <a:latin typeface="Calibri" charset="0"/>
                         <a:ea typeface="Calibri" charset="0"/>
                         <a:cs typeface="Calibri" charset="0"/>
                       </a:endParaRPr>
                     </a:p>
                   </a:txBody>
-                  <a:tcPr anchor="ctr">
+                  <a:tcPr marL="91440" marR="91440" marT="45720" marB="45720" anchor="ctr">
                     <a:lnL w="9525" cap="flat" cmpd="sng" algn="ctr">
                       <a:solidFill>
                         <a:srgbClr val="C9D2E3"/>
@@ -6921,11 +7026,11 @@
                     <a:bodyPr/>
                     <a:lstStyle/>
                     <a:p>
-                      <a:pPr marL="0" indent="0" algn="ctr">
+                      <a:pPr algn="ctr" indent="0" marL="0">
                         <a:buNone/>
                       </a:pPr>
                       <a:r>
-                        <a:rPr lang="en-US" sz="1600" dirty="0">
+                        <a:rPr lang="en-US" sz="1500" dirty="0">
                           <a:solidFill>
                             <a:srgbClr val="222633"/>
                           </a:solidFill>
@@ -6935,14 +7040,14 @@
                         </a:rPr>
                         <a:t>240억 원</a:t>
                       </a:r>
-                      <a:endParaRPr lang="en-US" sz="1600" dirty="0">
+                      <a:endParaRPr lang="en-US" sz="1500" dirty="0">
                         <a:latin typeface="Calibri" charset="0"/>
                         <a:ea typeface="Calibri" charset="0"/>
                         <a:cs typeface="Calibri" charset="0"/>
                       </a:endParaRPr>
                     </a:p>
                   </a:txBody>
-                  <a:tcPr anchor="ctr">
+                  <a:tcPr marL="91440" marR="91440" marT="45720" marB="45720" anchor="ctr">
                     <a:lnL w="9525" cap="flat" cmpd="sng" algn="ctr">
                       <a:solidFill>
                         <a:srgbClr val="C9D2E3"/>
@@ -6981,11 +7086,6 @@
                     </a:lnB>
                   </a:tcPr>
                 </a:tc>
-                <a:extLst>
-                  <a:ext uri="{0D108BD9-81ED-4DB2-BD59-A6C34878D82A}">
-                    <a16:rowId xmlns:a16="http://schemas.microsoft.com/office/drawing/2014/main" val="10003"/>
-                  </a:ext>
-                </a:extLst>
               </a:tr>
               <a:tr h="401320">
                 <a:tc>
@@ -6993,11 +7093,11 @@
                     <a:bodyPr/>
                     <a:lstStyle/>
                     <a:p>
-                      <a:pPr marL="0" indent="0" algn="ctr">
+                      <a:pPr algn="ctr" indent="0" marL="0">
                         <a:buNone/>
                       </a:pPr>
                       <a:r>
-                        <a:rPr lang="en-US" sz="1600" dirty="0">
+                        <a:rPr lang="en-US" sz="1500" dirty="0">
                           <a:solidFill>
                             <a:srgbClr val="222633"/>
                           </a:solidFill>
@@ -7007,14 +7107,14 @@
                         </a:rPr>
                         <a:t>시가총액</a:t>
                       </a:r>
-                      <a:endParaRPr lang="en-US" sz="1600" dirty="0">
+                      <a:endParaRPr lang="en-US" sz="1500" dirty="0">
                         <a:latin typeface="Calibri" charset="0"/>
                         <a:ea typeface="Calibri" charset="0"/>
                         <a:cs typeface="Calibri" charset="0"/>
                       </a:endParaRPr>
                     </a:p>
                   </a:txBody>
-                  <a:tcPr anchor="ctr">
+                  <a:tcPr marL="91440" marR="91440" marT="45720" marB="45720" anchor="ctr">
                     <a:lnL w="9525" cap="flat" cmpd="sng" algn="ctr">
                       <a:solidFill>
                         <a:srgbClr val="C9D2E3"/>
@@ -7058,11 +7158,11 @@
                     <a:bodyPr/>
                     <a:lstStyle/>
                     <a:p>
-                      <a:pPr marL="0" indent="0" algn="ctr">
+                      <a:pPr algn="ctr" indent="0" marL="0">
                         <a:buNone/>
                       </a:pPr>
                       <a:r>
-                        <a:rPr lang="en-US" sz="1600" dirty="0">
+                        <a:rPr lang="en-US" sz="1500" dirty="0">
                           <a:solidFill>
                             <a:srgbClr val="222633"/>
                           </a:solidFill>
@@ -7072,14 +7172,14 @@
                         </a:rPr>
                         <a:t>4,000억 원</a:t>
                       </a:r>
-                      <a:endParaRPr lang="en-US" sz="1600" dirty="0">
+                      <a:endParaRPr lang="en-US" sz="1500" dirty="0">
                         <a:latin typeface="Calibri" charset="0"/>
                         <a:ea typeface="Calibri" charset="0"/>
                         <a:cs typeface="Calibri" charset="0"/>
                       </a:endParaRPr>
                     </a:p>
                   </a:txBody>
-                  <a:tcPr anchor="ctr">
+                  <a:tcPr marL="91440" marR="91440" marT="45720" marB="45720" anchor="ctr">
                     <a:lnL w="9525" cap="flat" cmpd="sng" algn="ctr">
                       <a:solidFill>
                         <a:srgbClr val="C9D2E3"/>
@@ -7123,11 +7223,11 @@
                     <a:bodyPr/>
                     <a:lstStyle/>
                     <a:p>
-                      <a:pPr marL="0" indent="0" algn="ctr">
+                      <a:pPr algn="ctr" indent="0" marL="0">
                         <a:buNone/>
                       </a:pPr>
                       <a:r>
-                        <a:rPr lang="en-US" sz="1600" dirty="0">
+                        <a:rPr lang="en-US" sz="1500" dirty="0">
                           <a:solidFill>
                             <a:srgbClr val="222633"/>
                           </a:solidFill>
@@ -7137,14 +7237,14 @@
                         </a:rPr>
                         <a:t>4,000억 원</a:t>
                       </a:r>
-                      <a:endParaRPr lang="en-US" sz="1600" dirty="0">
+                      <a:endParaRPr lang="en-US" sz="1500" dirty="0">
                         <a:latin typeface="Calibri" charset="0"/>
                         <a:ea typeface="Calibri" charset="0"/>
                         <a:cs typeface="Calibri" charset="0"/>
                       </a:endParaRPr>
                     </a:p>
                   </a:txBody>
-                  <a:tcPr anchor="ctr">
+                  <a:tcPr marL="91440" marR="91440" marT="45720" marB="45720" anchor="ctr">
                     <a:lnL w="9525" cap="flat" cmpd="sng" algn="ctr">
                       <a:solidFill>
                         <a:srgbClr val="C9D2E3"/>
@@ -7183,11 +7283,6 @@
                     </a:lnB>
                   </a:tcPr>
                 </a:tc>
-                <a:extLst>
-                  <a:ext uri="{0D108BD9-81ED-4DB2-BD59-A6C34878D82A}">
-                    <a16:rowId xmlns:a16="http://schemas.microsoft.com/office/drawing/2014/main" val="10004"/>
-                  </a:ext>
-                </a:extLst>
               </a:tr>
               <a:tr h="401320">
                 <a:tc>
@@ -7195,11 +7290,11 @@
                     <a:bodyPr/>
                     <a:lstStyle/>
                     <a:p>
-                      <a:pPr marL="0" indent="0" algn="ctr">
+                      <a:pPr algn="ctr" indent="0" marL="0">
                         <a:buNone/>
                       </a:pPr>
                       <a:r>
-                        <a:rPr lang="en-US" sz="1600" b="1" dirty="0">
+                        <a:rPr lang="en-US" sz="1500" b="1" dirty="0">
                           <a:solidFill>
                             <a:srgbClr val="222633"/>
                           </a:solidFill>
@@ -7209,14 +7304,14 @@
                         </a:rPr>
                         <a:t>PER</a:t>
                       </a:r>
-                      <a:endParaRPr lang="en-US" sz="1600" dirty="0">
+                      <a:endParaRPr lang="en-US" sz="1500" dirty="0">
                         <a:latin typeface="Calibri" charset="0"/>
                         <a:ea typeface="Calibri" charset="0"/>
                         <a:cs typeface="Calibri" charset="0"/>
                       </a:endParaRPr>
                     </a:p>
                   </a:txBody>
-                  <a:tcPr anchor="ctr">
+                  <a:tcPr marL="91440" marR="91440" marT="45720" marB="45720" anchor="ctr">
                     <a:lnL w="9525" cap="flat" cmpd="sng" algn="ctr">
                       <a:solidFill>
                         <a:srgbClr val="C9D2E3"/>
@@ -7260,11 +7355,11 @@
                     <a:bodyPr/>
                     <a:lstStyle/>
                     <a:p>
-                      <a:pPr marL="0" indent="0" algn="ctr">
+                      <a:pPr algn="ctr" indent="0" marL="0">
                         <a:buNone/>
                       </a:pPr>
                       <a:r>
-                        <a:rPr lang="en-US" sz="1600" b="1" dirty="0">
+                        <a:rPr lang="en-US" sz="1500" b="1" dirty="0">
                           <a:solidFill>
                             <a:srgbClr val="222633"/>
                           </a:solidFill>
@@ -7274,14 +7369,14 @@
                         </a:rPr>
                         <a:t>10배</a:t>
                       </a:r>
-                      <a:endParaRPr lang="en-US" sz="1600" dirty="0">
+                      <a:endParaRPr lang="en-US" sz="1500" dirty="0">
                         <a:latin typeface="Calibri" charset="0"/>
                         <a:ea typeface="Calibri" charset="0"/>
                         <a:cs typeface="Calibri" charset="0"/>
                       </a:endParaRPr>
                     </a:p>
                   </a:txBody>
-                  <a:tcPr anchor="ctr">
+                  <a:tcPr marL="91440" marR="91440" marT="45720" marB="45720" anchor="ctr">
                     <a:lnL w="9525" cap="flat" cmpd="sng" algn="ctr">
                       <a:solidFill>
                         <a:srgbClr val="C9D2E3"/>
@@ -7325,11 +7420,11 @@
                     <a:bodyPr/>
                     <a:lstStyle/>
                     <a:p>
-                      <a:pPr marL="0" indent="0" algn="ctr">
+                      <a:pPr algn="ctr" indent="0" marL="0">
                         <a:buNone/>
                       </a:pPr>
                       <a:r>
-                        <a:rPr lang="en-US" sz="1600" b="1" dirty="0">
+                        <a:rPr lang="en-US" sz="1500" b="1" dirty="0">
                           <a:solidFill>
                             <a:srgbClr val="A6382B"/>
                           </a:solidFill>
@@ -7339,14 +7434,14 @@
                         </a:rPr>
                         <a:t>16.7배</a:t>
                       </a:r>
-                      <a:endParaRPr lang="en-US" sz="1600" dirty="0">
+                      <a:endParaRPr lang="en-US" sz="1500" dirty="0">
                         <a:latin typeface="Calibri" charset="0"/>
                         <a:ea typeface="Calibri" charset="0"/>
                         <a:cs typeface="Calibri" charset="0"/>
                       </a:endParaRPr>
                     </a:p>
                   </a:txBody>
-                  <a:tcPr anchor="ctr">
+                  <a:tcPr marL="91440" marR="91440" marT="45720" marB="45720" anchor="ctr">
                     <a:lnL w="9525" cap="flat" cmpd="sng" algn="ctr">
                       <a:solidFill>
                         <a:srgbClr val="C9D2E3"/>
@@ -7385,11 +7480,6 @@
                     </a:lnB>
                   </a:tcPr>
                 </a:tc>
-                <a:extLst>
-                  <a:ext uri="{0D108BD9-81ED-4DB2-BD59-A6C34878D82A}">
-                    <a16:rowId xmlns:a16="http://schemas.microsoft.com/office/drawing/2014/main" val="10005"/>
-                  </a:ext>
-                </a:extLst>
               </a:tr>
               <a:tr h="401320">
                 <a:tc>
@@ -7397,11 +7487,11 @@
                     <a:bodyPr/>
                     <a:lstStyle/>
                     <a:p>
-                      <a:pPr marL="0" indent="0" algn="ctr">
+                      <a:pPr algn="ctr" indent="0" marL="0">
                         <a:buNone/>
                       </a:pPr>
                       <a:r>
-                        <a:rPr lang="en-US" sz="1600" dirty="0">
+                        <a:rPr lang="en-US" sz="1500" dirty="0">
                           <a:solidFill>
                             <a:srgbClr val="222633"/>
                           </a:solidFill>
@@ -7411,14 +7501,14 @@
                         </a:rPr>
                         <a:t>EV (부채 포함)</a:t>
                       </a:r>
-                      <a:endParaRPr lang="en-US" sz="1600" dirty="0">
+                      <a:endParaRPr lang="en-US" sz="1500" dirty="0">
                         <a:latin typeface="Calibri" charset="0"/>
                         <a:ea typeface="Calibri" charset="0"/>
                         <a:cs typeface="Calibri" charset="0"/>
                       </a:endParaRPr>
                     </a:p>
                   </a:txBody>
-                  <a:tcPr anchor="ctr">
+                  <a:tcPr marL="91440" marR="91440" marT="45720" marB="45720" anchor="ctr">
                     <a:lnL w="9525" cap="flat" cmpd="sng" algn="ctr">
                       <a:solidFill>
                         <a:srgbClr val="C9D2E3"/>
@@ -7462,11 +7552,11 @@
                     <a:bodyPr/>
                     <a:lstStyle/>
                     <a:p>
-                      <a:pPr marL="0" indent="0" algn="ctr">
+                      <a:pPr algn="ctr" indent="0" marL="0">
                         <a:buNone/>
                       </a:pPr>
                       <a:r>
-                        <a:rPr lang="en-US" sz="1600" dirty="0">
+                        <a:rPr lang="en-US" sz="1500" dirty="0">
                           <a:solidFill>
                             <a:srgbClr val="222633"/>
                           </a:solidFill>
@@ -7476,14 +7566,14 @@
                         </a:rPr>
                         <a:t>4,000억 원</a:t>
                       </a:r>
-                      <a:endParaRPr lang="en-US" sz="1600" dirty="0">
+                      <a:endParaRPr lang="en-US" sz="1500" dirty="0">
                         <a:latin typeface="Calibri" charset="0"/>
                         <a:ea typeface="Calibri" charset="0"/>
                         <a:cs typeface="Calibri" charset="0"/>
                       </a:endParaRPr>
                     </a:p>
                   </a:txBody>
-                  <a:tcPr anchor="ctr">
+                  <a:tcPr marL="91440" marR="91440" marT="45720" marB="45720" anchor="ctr">
                     <a:lnL w="9525" cap="flat" cmpd="sng" algn="ctr">
                       <a:solidFill>
                         <a:srgbClr val="C9D2E3"/>
@@ -7527,11 +7617,11 @@
                     <a:bodyPr/>
                     <a:lstStyle/>
                     <a:p>
-                      <a:pPr marL="0" indent="0" algn="ctr">
+                      <a:pPr algn="ctr" indent="0" marL="0">
                         <a:buNone/>
                       </a:pPr>
                       <a:r>
-                        <a:rPr lang="en-US" sz="1600" dirty="0">
+                        <a:rPr lang="en-US" sz="1500" dirty="0">
                           <a:solidFill>
                             <a:srgbClr val="222633"/>
                           </a:solidFill>
@@ -7541,14 +7631,14 @@
                         </a:rPr>
                         <a:t>6,000억 원</a:t>
                       </a:r>
-                      <a:endParaRPr lang="en-US" sz="1600" dirty="0">
+                      <a:endParaRPr lang="en-US" sz="1500" dirty="0">
                         <a:latin typeface="Calibri" charset="0"/>
                         <a:ea typeface="Calibri" charset="0"/>
                         <a:cs typeface="Calibri" charset="0"/>
                       </a:endParaRPr>
                     </a:p>
                   </a:txBody>
-                  <a:tcPr anchor="ctr">
+                  <a:tcPr marL="91440" marR="91440" marT="45720" marB="45720" anchor="ctr">
                     <a:lnL w="9525" cap="flat" cmpd="sng" algn="ctr">
                       <a:solidFill>
                         <a:srgbClr val="C9D2E3"/>
@@ -7587,11 +7677,6 @@
                     </a:lnB>
                   </a:tcPr>
                 </a:tc>
-                <a:extLst>
-                  <a:ext uri="{0D108BD9-81ED-4DB2-BD59-A6C34878D82A}">
-                    <a16:rowId xmlns:a16="http://schemas.microsoft.com/office/drawing/2014/main" val="10006"/>
-                  </a:ext>
-                </a:extLst>
               </a:tr>
               <a:tr h="401320">
                 <a:tc>
@@ -7599,11 +7684,11 @@
                     <a:bodyPr/>
                     <a:lstStyle/>
                     <a:p>
-                      <a:pPr marL="0" indent="0" algn="ctr">
+                      <a:pPr algn="ctr" indent="0" marL="0">
                         <a:buNone/>
                       </a:pPr>
                       <a:r>
-                        <a:rPr lang="en-US" sz="1600" dirty="0">
+                        <a:rPr lang="en-US" sz="1500" dirty="0">
                           <a:solidFill>
                             <a:srgbClr val="222633"/>
                           </a:solidFill>
@@ -7613,14 +7698,14 @@
                         </a:rPr>
                         <a:t>EBITDA</a:t>
                       </a:r>
-                      <a:endParaRPr lang="en-US" sz="1600" dirty="0">
+                      <a:endParaRPr lang="en-US" sz="1500" dirty="0">
                         <a:latin typeface="Calibri" charset="0"/>
                         <a:ea typeface="Calibri" charset="0"/>
                         <a:cs typeface="Calibri" charset="0"/>
                       </a:endParaRPr>
                     </a:p>
                   </a:txBody>
-                  <a:tcPr anchor="ctr">
+                  <a:tcPr marL="91440" marR="91440" marT="45720" marB="45720" anchor="ctr">
                     <a:lnL w="9525" cap="flat" cmpd="sng" algn="ctr">
                       <a:solidFill>
                         <a:srgbClr val="C9D2E3"/>
@@ -7664,11 +7749,11 @@
                     <a:bodyPr/>
                     <a:lstStyle/>
                     <a:p>
-                      <a:pPr marL="0" indent="0" algn="ctr">
+                      <a:pPr algn="ctr" indent="0" marL="0">
                         <a:buNone/>
                       </a:pPr>
                       <a:r>
-                        <a:rPr lang="en-US" sz="1600" dirty="0">
+                        <a:rPr lang="en-US" sz="1500" dirty="0">
                           <a:solidFill>
                             <a:srgbClr val="222633"/>
                           </a:solidFill>
@@ -7678,14 +7763,14 @@
                         </a:rPr>
                         <a:t>600억 원</a:t>
                       </a:r>
-                      <a:endParaRPr lang="en-US" sz="1600" dirty="0">
+                      <a:endParaRPr lang="en-US" sz="1500" dirty="0">
                         <a:latin typeface="Calibri" charset="0"/>
                         <a:ea typeface="Calibri" charset="0"/>
                         <a:cs typeface="Calibri" charset="0"/>
                       </a:endParaRPr>
                     </a:p>
                   </a:txBody>
-                  <a:tcPr anchor="ctr">
+                  <a:tcPr marL="91440" marR="91440" marT="45720" marB="45720" anchor="ctr">
                     <a:lnL w="9525" cap="flat" cmpd="sng" algn="ctr">
                       <a:solidFill>
                         <a:srgbClr val="C9D2E3"/>
@@ -7729,11 +7814,11 @@
                     <a:bodyPr/>
                     <a:lstStyle/>
                     <a:p>
-                      <a:pPr marL="0" indent="0" algn="ctr">
+                      <a:pPr algn="ctr" indent="0" marL="0">
                         <a:buNone/>
                       </a:pPr>
                       <a:r>
-                        <a:rPr lang="en-US" sz="1600" dirty="0">
+                        <a:rPr lang="en-US" sz="1500" dirty="0">
                           <a:solidFill>
                             <a:srgbClr val="222633"/>
                           </a:solidFill>
@@ -7743,14 +7828,14 @@
                         </a:rPr>
                         <a:t>600억 원</a:t>
                       </a:r>
-                      <a:endParaRPr lang="en-US" sz="1600" dirty="0">
+                      <a:endParaRPr lang="en-US" sz="1500" dirty="0">
                         <a:latin typeface="Calibri" charset="0"/>
                         <a:ea typeface="Calibri" charset="0"/>
                         <a:cs typeface="Calibri" charset="0"/>
                       </a:endParaRPr>
                     </a:p>
                   </a:txBody>
-                  <a:tcPr anchor="ctr">
+                  <a:tcPr marL="91440" marR="91440" marT="45720" marB="45720" anchor="ctr">
                     <a:lnL w="9525" cap="flat" cmpd="sng" algn="ctr">
                       <a:solidFill>
                         <a:srgbClr val="C9D2E3"/>
@@ -7789,11 +7874,6 @@
                     </a:lnB>
                   </a:tcPr>
                 </a:tc>
-                <a:extLst>
-                  <a:ext uri="{0D108BD9-81ED-4DB2-BD59-A6C34878D82A}">
-                    <a16:rowId xmlns:a16="http://schemas.microsoft.com/office/drawing/2014/main" val="10007"/>
-                  </a:ext>
-                </a:extLst>
               </a:tr>
               <a:tr h="401320">
                 <a:tc>
@@ -7801,11 +7881,11 @@
                     <a:bodyPr/>
                     <a:lstStyle/>
                     <a:p>
-                      <a:pPr marL="0" indent="0" algn="ctr">
+                      <a:pPr algn="ctr" indent="0" marL="0">
                         <a:buNone/>
                       </a:pPr>
                       <a:r>
-                        <a:rPr lang="en-US" sz="1600" b="1" dirty="0">
+                        <a:rPr lang="en-US" sz="1500" b="1" dirty="0">
                           <a:solidFill>
                             <a:srgbClr val="1E2761"/>
                           </a:solidFill>
@@ -7815,14 +7895,14 @@
                         </a:rPr>
                         <a:t>EV/EBITDA</a:t>
                       </a:r>
-                      <a:endParaRPr lang="en-US" sz="1600" dirty="0">
+                      <a:endParaRPr lang="en-US" sz="1500" dirty="0">
                         <a:latin typeface="Calibri" charset="0"/>
                         <a:ea typeface="Calibri" charset="0"/>
                         <a:cs typeface="Calibri" charset="0"/>
                       </a:endParaRPr>
                     </a:p>
                   </a:txBody>
-                  <a:tcPr anchor="ctr">
+                  <a:tcPr marL="91440" marR="91440" marT="45720" marB="45720" anchor="ctr">
                     <a:lnL w="9525" cap="flat" cmpd="sng" algn="ctr">
                       <a:solidFill>
                         <a:srgbClr val="C9D2E3"/>
@@ -7866,11 +7946,11 @@
                     <a:bodyPr/>
                     <a:lstStyle/>
                     <a:p>
-                      <a:pPr marL="0" indent="0" algn="ctr">
+                      <a:pPr algn="ctr" indent="0" marL="0">
                         <a:buNone/>
                       </a:pPr>
                       <a:r>
-                        <a:rPr lang="en-US" sz="1600" b="1" dirty="0">
+                        <a:rPr lang="en-US" sz="1500" b="1" dirty="0">
                           <a:solidFill>
                             <a:srgbClr val="1E2761"/>
                           </a:solidFill>
@@ -7880,14 +7960,14 @@
                         </a:rPr>
                         <a:t>6.7배</a:t>
                       </a:r>
-                      <a:endParaRPr lang="en-US" sz="1600" dirty="0">
+                      <a:endParaRPr lang="en-US" sz="1500" dirty="0">
                         <a:latin typeface="Calibri" charset="0"/>
                         <a:ea typeface="Calibri" charset="0"/>
                         <a:cs typeface="Calibri" charset="0"/>
                       </a:endParaRPr>
                     </a:p>
                   </a:txBody>
-                  <a:tcPr anchor="ctr">
+                  <a:tcPr marL="91440" marR="91440" marT="45720" marB="45720" anchor="ctr">
                     <a:lnL w="9525" cap="flat" cmpd="sng" algn="ctr">
                       <a:solidFill>
                         <a:srgbClr val="C9D2E3"/>
@@ -7931,11 +8011,11 @@
                     <a:bodyPr/>
                     <a:lstStyle/>
                     <a:p>
-                      <a:pPr marL="0" indent="0" algn="ctr">
+                      <a:pPr algn="ctr" indent="0" marL="0">
                         <a:buNone/>
                       </a:pPr>
                       <a:r>
-                        <a:rPr lang="en-US" sz="1600" b="1" dirty="0">
+                        <a:rPr lang="en-US" sz="1500" b="1" dirty="0">
                           <a:solidFill>
                             <a:srgbClr val="1E2761"/>
                           </a:solidFill>
@@ -7945,14 +8025,14 @@
                         </a:rPr>
                         <a:t>10배</a:t>
                       </a:r>
-                      <a:endParaRPr lang="en-US" sz="1600" dirty="0">
+                      <a:endParaRPr lang="en-US" sz="1500" dirty="0">
                         <a:latin typeface="Calibri" charset="0"/>
                         <a:ea typeface="Calibri" charset="0"/>
                         <a:cs typeface="Calibri" charset="0"/>
                       </a:endParaRPr>
                     </a:p>
                   </a:txBody>
-                  <a:tcPr anchor="ctr">
+                  <a:tcPr marL="91440" marR="91440" marT="45720" marB="45720" anchor="ctr">
                     <a:lnL w="9525" cap="flat" cmpd="sng" algn="ctr">
                       <a:solidFill>
                         <a:srgbClr val="C9D2E3"/>
@@ -7991,11 +8071,6 @@
                     </a:lnB>
                   </a:tcPr>
                 </a:tc>
-                <a:extLst>
-                  <a:ext uri="{0D108BD9-81ED-4DB2-BD59-A6C34878D82A}">
-                    <a16:rowId xmlns:a16="http://schemas.microsoft.com/office/drawing/2014/main" val="10008"/>
-                  </a:ext>
-                </a:extLst>
               </a:tr>
             </a:tbl>
           </a:graphicData>
@@ -8009,7 +8084,7 @@
         </p:nvSpPr>
         <p:spPr>
           <a:xfrm>
-            <a:off x="563880" y="5623560"/>
+            <a:off x="548640" y="5623560"/>
             <a:ext cx="11064240" cy="960120"/>
           </a:xfrm>
           <a:prstGeom prst="roundRect">
@@ -8027,13 +8102,6 @@
             <a:prstDash val="solid"/>
           </a:ln>
         </p:spPr>
-        <p:txBody>
-          <a:bodyPr/>
-          <a:lstStyle/>
-          <a:p>
-            <a:endParaRPr lang="ko-KR" altLang="en-US" sz="2400"/>
-          </a:p>
-        </p:txBody>
       </p:sp>
       <p:sp>
         <p:nvSpPr>
@@ -8056,12 +8124,11 @@
           <a:bodyPr wrap="square" rtlCol="0" anchor="ctr"/>
           <a:lstStyle/>
           <a:p>
-            <a:pPr marL="285750" indent="-285750">
-              <a:buFont typeface="Arial" panose="020B0604020202020204" pitchFamily="34" charset="0"/>
-              <a:buChar char="•"/>
-            </a:pPr>
-            <a:r>
-              <a:rPr lang="en-US" dirty="0">
+            <a:pPr indent="0" marL="0">
+              <a:buNone/>
+            </a:pPr>
+            <a:r>
+              <a:rPr lang="en-US" sz="1350" dirty="0">
                 <a:solidFill>
                   <a:srgbClr val="222633"/>
                 </a:solidFill>
@@ -8071,15 +8138,14 @@
               </a:rPr>
               <a:t>PER만 보면 G기업이 훨씬 비싸 보이지만, 이는 이자비용 때문에 순이익이 줄어든 영향일 뿐입니다.</a:t>
             </a:r>
-            <a:endParaRPr lang="en-US" dirty="0"/>
-          </a:p>
-          <a:p>
-            <a:pPr marL="285750" indent="-285750">
-              <a:buFont typeface="Arial" panose="020B0604020202020204" pitchFamily="34" charset="0"/>
-              <a:buChar char="•"/>
-            </a:pPr>
-            <a:r>
-              <a:rPr lang="en-US" dirty="0">
+            <a:endParaRPr lang="en-US" sz="1350" dirty="0"/>
+          </a:p>
+          <a:p>
+            <a:pPr indent="0" marL="0">
+              <a:buNone/>
+            </a:pPr>
+            <a:r>
+              <a:rPr lang="en-US" sz="1350" dirty="0">
                 <a:solidFill>
                   <a:srgbClr val="222633"/>
                 </a:solidFill>
@@ -8089,7 +8155,7 @@
               </a:rPr>
               <a:t>EV/EBITDA로 보면 부채 구조 차이의 영향이 줄어들어, 두 기업의 “영업 자체의 밸류에이션 격차”가 더 조정되어 나타납니다.</a:t>
             </a:r>
-            <a:endParaRPr lang="en-US" dirty="0"/>
+            <a:endParaRPr lang="en-US" sz="1350" dirty="0"/>
           </a:p>
         </p:txBody>
       </p:sp>
@@ -8114,7 +8180,7 @@
           <a:bodyPr wrap="square" rtlCol="0" anchor="ctr"/>
           <a:lstStyle/>
           <a:p>
-            <a:pPr marL="0" indent="0" algn="r">
+            <a:pPr algn="r" indent="0" marL="0">
               <a:buNone/>
             </a:pPr>
             <a:r>
@@ -8148,7 +8214,6 @@
         <a:solidFill>
           <a:srgbClr val="FFFFFF"/>
         </a:solidFill>
-        <a:effectLst/>
       </p:bgPr>
     </p:bg>
     <p:spTree>
@@ -8186,11 +8251,11 @@
           <a:bodyPr wrap="square" rtlCol="0" anchor="ctr"/>
           <a:lstStyle/>
           <a:p>
-            <a:pPr marL="0" indent="0">
-              <a:buNone/>
-            </a:pPr>
-            <a:r>
-              <a:rPr lang="en-US" sz="1300" b="1" kern="0" spc="200" dirty="0">
+            <a:pPr indent="0" marL="0">
+              <a:buNone/>
+            </a:pPr>
+            <a:r>
+              <a:rPr lang="en-US" sz="1300" b="1" spc="200" kern="0" dirty="0">
                 <a:solidFill>
                   <a:srgbClr val="9C7A0A"/>
                 </a:solidFill>
@@ -8225,7 +8290,7 @@
           <a:bodyPr wrap="square" rtlCol="0" anchor="ctr"/>
           <a:lstStyle/>
           <a:p>
-            <a:pPr marL="0" indent="0" algn="l">
+            <a:pPr algn="l" indent="0" marL="0">
               <a:buNone/>
             </a:pPr>
             <a:r>
@@ -8269,13 +8334,6 @@
             <a:prstDash val="solid"/>
           </a:ln>
         </p:spPr>
-        <p:txBody>
-          <a:bodyPr/>
-          <a:lstStyle/>
-          <a:p>
-            <a:endParaRPr lang="ko-KR" altLang="en-US" sz="2400"/>
-          </a:p>
-        </p:txBody>
       </p:sp>
       <p:sp>
         <p:nvSpPr>
@@ -8298,11 +8356,11 @@
           <a:bodyPr wrap="square" rtlCol="0" anchor="ctr"/>
           <a:lstStyle/>
           <a:p>
-            <a:pPr marL="0" indent="0">
-              <a:buNone/>
-            </a:pPr>
-            <a:r>
-              <a:rPr lang="en-US" sz="2800" b="1" dirty="0">
+            <a:pPr indent="0" marL="0">
+              <a:buNone/>
+            </a:pPr>
+            <a:r>
+              <a:rPr lang="en-US" sz="2000" b="1" dirty="0">
                 <a:solidFill>
                   <a:srgbClr val="1E2761"/>
                 </a:solidFill>
@@ -8312,7 +8370,7 @@
               </a:rPr>
               <a:t>EPS</a:t>
             </a:r>
-            <a:endParaRPr lang="en-US" sz="2800" dirty="0"/>
+            <a:endParaRPr lang="en-US" sz="2000" dirty="0"/>
           </a:p>
         </p:txBody>
       </p:sp>
@@ -8337,11 +8395,11 @@
           <a:bodyPr wrap="square" rtlCol="0" anchor="ctr"/>
           <a:lstStyle/>
           <a:p>
-            <a:pPr marL="0" indent="0">
-              <a:buNone/>
-            </a:pPr>
-            <a:r>
-              <a:rPr lang="en-US" dirty="0">
+            <a:pPr indent="0" marL="0">
+              <a:buNone/>
+            </a:pPr>
+            <a:r>
+              <a:rPr lang="en-US" sz="1300" dirty="0">
                 <a:solidFill>
                   <a:srgbClr val="5A5F73"/>
                 </a:solidFill>
@@ -8351,7 +8409,7 @@
               </a:rPr>
               <a:t>주당이익</a:t>
             </a:r>
-            <a:endParaRPr lang="en-US" dirty="0"/>
+            <a:endParaRPr lang="en-US" sz="1300" dirty="0"/>
           </a:p>
         </p:txBody>
       </p:sp>
@@ -8376,11 +8434,11 @@
           <a:bodyPr wrap="square" rtlCol="0" anchor="ctr"/>
           <a:lstStyle/>
           <a:p>
-            <a:pPr marL="0" indent="0" algn="ctr">
-              <a:buNone/>
-            </a:pPr>
-            <a:r>
-              <a:rPr lang="en-US" sz="3200" b="1" dirty="0">
+            <a:pPr algn="ctr" indent="0" marL="0">
+              <a:buNone/>
+            </a:pPr>
+            <a:r>
+              <a:rPr lang="en-US" sz="2600" b="1" dirty="0">
                 <a:solidFill>
                   <a:srgbClr val="9C7A0A"/>
                 </a:solidFill>
@@ -8390,7 +8448,7 @@
               </a:rPr>
               <a:t>→</a:t>
             </a:r>
-            <a:endParaRPr lang="en-US" sz="3200" dirty="0"/>
+            <a:endParaRPr lang="en-US" sz="2600" dirty="0"/>
           </a:p>
         </p:txBody>
       </p:sp>
@@ -8420,13 +8478,6 @@
             <a:prstDash val="solid"/>
           </a:ln>
         </p:spPr>
-        <p:txBody>
-          <a:bodyPr/>
-          <a:lstStyle/>
-          <a:p>
-            <a:endParaRPr lang="ko-KR" altLang="en-US" sz="2400"/>
-          </a:p>
-        </p:txBody>
       </p:sp>
       <p:sp>
         <p:nvSpPr>
@@ -8449,11 +8500,11 @@
           <a:bodyPr wrap="square" rtlCol="0" anchor="ctr"/>
           <a:lstStyle/>
           <a:p>
-            <a:pPr marL="0" indent="0">
-              <a:buNone/>
-            </a:pPr>
-            <a:r>
-              <a:rPr lang="en-US" sz="2800" b="1" dirty="0">
+            <a:pPr indent="0" marL="0">
+              <a:buNone/>
+            </a:pPr>
+            <a:r>
+              <a:rPr lang="en-US" sz="2000" b="1" dirty="0">
                 <a:solidFill>
                   <a:srgbClr val="1E2761"/>
                 </a:solidFill>
@@ -8463,7 +8514,7 @@
               </a:rPr>
               <a:t>PER</a:t>
             </a:r>
-            <a:endParaRPr lang="en-US" sz="2800" dirty="0"/>
+            <a:endParaRPr lang="en-US" sz="2000" dirty="0"/>
           </a:p>
         </p:txBody>
       </p:sp>
@@ -8488,11 +8539,11 @@
           <a:bodyPr wrap="square" rtlCol="0" anchor="ctr"/>
           <a:lstStyle/>
           <a:p>
-            <a:pPr marL="0" indent="0">
-              <a:buNone/>
-            </a:pPr>
-            <a:r>
-              <a:rPr lang="en-US" dirty="0">
+            <a:pPr indent="0" marL="0">
+              <a:buNone/>
+            </a:pPr>
+            <a:r>
+              <a:rPr lang="en-US" sz="1300" dirty="0">
                 <a:solidFill>
                   <a:srgbClr val="5A5F73"/>
                 </a:solidFill>
@@ -8502,7 +8553,7 @@
               </a:rPr>
               <a:t>이익 대비 주가</a:t>
             </a:r>
-            <a:endParaRPr lang="en-US" dirty="0"/>
+            <a:endParaRPr lang="en-US" sz="1300" dirty="0"/>
           </a:p>
         </p:txBody>
       </p:sp>
@@ -8532,13 +8583,6 @@
             <a:prstDash val="solid"/>
           </a:ln>
         </p:spPr>
-        <p:txBody>
-          <a:bodyPr/>
-          <a:lstStyle/>
-          <a:p>
-            <a:endParaRPr lang="ko-KR" altLang="en-US" sz="2400"/>
-          </a:p>
-        </p:txBody>
       </p:sp>
       <p:sp>
         <p:nvSpPr>
@@ -8561,11 +8605,11 @@
           <a:bodyPr wrap="square" rtlCol="0" anchor="ctr"/>
           <a:lstStyle/>
           <a:p>
-            <a:pPr marL="0" indent="0">
-              <a:buNone/>
-            </a:pPr>
-            <a:r>
-              <a:rPr lang="en-US" sz="2800" b="1" dirty="0">
+            <a:pPr indent="0" marL="0">
+              <a:buNone/>
+            </a:pPr>
+            <a:r>
+              <a:rPr lang="en-US" sz="2000" b="1" dirty="0">
                 <a:solidFill>
                   <a:srgbClr val="1E2761"/>
                 </a:solidFill>
@@ -8575,7 +8619,7 @@
               </a:rPr>
               <a:t>BPS</a:t>
             </a:r>
-            <a:endParaRPr lang="en-US" sz="2800" dirty="0"/>
+            <a:endParaRPr lang="en-US" sz="2000" dirty="0"/>
           </a:p>
         </p:txBody>
       </p:sp>
@@ -8600,11 +8644,11 @@
           <a:bodyPr wrap="square" rtlCol="0" anchor="ctr"/>
           <a:lstStyle/>
           <a:p>
-            <a:pPr marL="0" indent="0">
-              <a:buNone/>
-            </a:pPr>
-            <a:r>
-              <a:rPr lang="en-US" dirty="0">
+            <a:pPr indent="0" marL="0">
+              <a:buNone/>
+            </a:pPr>
+            <a:r>
+              <a:rPr lang="en-US" sz="1300" dirty="0">
                 <a:solidFill>
                   <a:srgbClr val="5A5F73"/>
                 </a:solidFill>
@@ -8614,7 +8658,7 @@
               </a:rPr>
               <a:t>주당순자산</a:t>
             </a:r>
-            <a:endParaRPr lang="en-US" dirty="0"/>
+            <a:endParaRPr lang="en-US" sz="1300" dirty="0"/>
           </a:p>
         </p:txBody>
       </p:sp>
@@ -8639,11 +8683,11 @@
           <a:bodyPr wrap="square" rtlCol="0" anchor="ctr"/>
           <a:lstStyle/>
           <a:p>
-            <a:pPr marL="0" indent="0" algn="ctr">
-              <a:buNone/>
-            </a:pPr>
-            <a:r>
-              <a:rPr lang="en-US" sz="3200" b="1" dirty="0">
+            <a:pPr algn="ctr" indent="0" marL="0">
+              <a:buNone/>
+            </a:pPr>
+            <a:r>
+              <a:rPr lang="en-US" sz="2600" b="1" dirty="0">
                 <a:solidFill>
                   <a:srgbClr val="9C7A0A"/>
                 </a:solidFill>
@@ -8653,7 +8697,7 @@
               </a:rPr>
               <a:t>→</a:t>
             </a:r>
-            <a:endParaRPr lang="en-US" sz="3200" dirty="0"/>
+            <a:endParaRPr lang="en-US" sz="2600" dirty="0"/>
           </a:p>
         </p:txBody>
       </p:sp>
@@ -8683,13 +8727,6 @@
             <a:prstDash val="solid"/>
           </a:ln>
         </p:spPr>
-        <p:txBody>
-          <a:bodyPr/>
-          <a:lstStyle/>
-          <a:p>
-            <a:endParaRPr lang="ko-KR" altLang="en-US" sz="2400"/>
-          </a:p>
-        </p:txBody>
       </p:sp>
       <p:sp>
         <p:nvSpPr>
@@ -8712,11 +8749,11 @@
           <a:bodyPr wrap="square" rtlCol="0" anchor="ctr"/>
           <a:lstStyle/>
           <a:p>
-            <a:pPr marL="0" indent="0">
-              <a:buNone/>
-            </a:pPr>
-            <a:r>
-              <a:rPr lang="en-US" sz="2800" b="1" dirty="0">
+            <a:pPr indent="0" marL="0">
+              <a:buNone/>
+            </a:pPr>
+            <a:r>
+              <a:rPr lang="en-US" sz="2000" b="1" dirty="0">
                 <a:solidFill>
                   <a:srgbClr val="1E2761"/>
                 </a:solidFill>
@@ -8726,7 +8763,7 @@
               </a:rPr>
               <a:t>PBR</a:t>
             </a:r>
-            <a:endParaRPr lang="en-US" sz="2800" dirty="0"/>
+            <a:endParaRPr lang="en-US" sz="2000" dirty="0"/>
           </a:p>
         </p:txBody>
       </p:sp>
@@ -8751,11 +8788,11 @@
           <a:bodyPr wrap="square" rtlCol="0" anchor="ctr"/>
           <a:lstStyle/>
           <a:p>
-            <a:pPr marL="0" indent="0">
-              <a:buNone/>
-            </a:pPr>
-            <a:r>
-              <a:rPr lang="en-US" dirty="0">
+            <a:pPr indent="0" marL="0">
+              <a:buNone/>
+            </a:pPr>
+            <a:r>
+              <a:rPr lang="en-US" sz="1300" dirty="0">
                 <a:solidFill>
                   <a:srgbClr val="5A5F73"/>
                 </a:solidFill>
@@ -8765,7 +8802,7 @@
               </a:rPr>
               <a:t>자산 대비 주가</a:t>
             </a:r>
-            <a:endParaRPr lang="en-US" dirty="0"/>
+            <a:endParaRPr lang="en-US" sz="1300" dirty="0"/>
           </a:p>
         </p:txBody>
       </p:sp>
@@ -8795,13 +8832,6 @@
             <a:prstDash val="solid"/>
           </a:ln>
         </p:spPr>
-        <p:txBody>
-          <a:bodyPr/>
-          <a:lstStyle/>
-          <a:p>
-            <a:endParaRPr lang="ko-KR" altLang="en-US" sz="2400"/>
-          </a:p>
-        </p:txBody>
       </p:sp>
       <p:sp>
         <p:nvSpPr>
@@ -8824,11 +8854,11 @@
           <a:bodyPr wrap="square" rtlCol="0" anchor="ctr"/>
           <a:lstStyle/>
           <a:p>
-            <a:pPr marL="0" indent="0">
-              <a:buNone/>
-            </a:pPr>
-            <a:r>
-              <a:rPr lang="en-US" sz="2800" b="1" dirty="0">
+            <a:pPr indent="0" marL="0">
+              <a:buNone/>
+            </a:pPr>
+            <a:r>
+              <a:rPr lang="en-US" sz="2000" b="1" dirty="0">
                 <a:solidFill>
                   <a:srgbClr val="1E2761"/>
                 </a:solidFill>
@@ -8838,7 +8868,7 @@
               </a:rPr>
               <a:t>매출액</a:t>
             </a:r>
-            <a:endParaRPr lang="en-US" sz="2800" dirty="0"/>
+            <a:endParaRPr lang="en-US" sz="2000" dirty="0"/>
           </a:p>
         </p:txBody>
       </p:sp>
@@ -8863,11 +8893,11 @@
           <a:bodyPr wrap="square" rtlCol="0" anchor="ctr"/>
           <a:lstStyle/>
           <a:p>
-            <a:pPr marL="0" indent="0">
-              <a:buNone/>
-            </a:pPr>
-            <a:r>
-              <a:rPr lang="en-US" dirty="0">
+            <a:pPr indent="0" marL="0">
+              <a:buNone/>
+            </a:pPr>
+            <a:r>
+              <a:rPr lang="en-US" sz="1300" dirty="0">
                 <a:solidFill>
                   <a:srgbClr val="5A5F73"/>
                 </a:solidFill>
@@ -8877,7 +8907,7 @@
               </a:rPr>
               <a:t>Sales</a:t>
             </a:r>
-            <a:endParaRPr lang="en-US" dirty="0"/>
+            <a:endParaRPr lang="en-US" sz="1300" dirty="0"/>
           </a:p>
         </p:txBody>
       </p:sp>
@@ -8902,11 +8932,11 @@
           <a:bodyPr wrap="square" rtlCol="0" anchor="ctr"/>
           <a:lstStyle/>
           <a:p>
-            <a:pPr marL="0" indent="0" algn="ctr">
-              <a:buNone/>
-            </a:pPr>
-            <a:r>
-              <a:rPr lang="en-US" sz="3200" b="1" dirty="0">
+            <a:pPr algn="ctr" indent="0" marL="0">
+              <a:buNone/>
+            </a:pPr>
+            <a:r>
+              <a:rPr lang="en-US" sz="2600" b="1" dirty="0">
                 <a:solidFill>
                   <a:srgbClr val="9C7A0A"/>
                 </a:solidFill>
@@ -8916,7 +8946,7 @@
               </a:rPr>
               <a:t>→</a:t>
             </a:r>
-            <a:endParaRPr lang="en-US" sz="3200" dirty="0"/>
+            <a:endParaRPr lang="en-US" sz="2600" dirty="0"/>
           </a:p>
         </p:txBody>
       </p:sp>
@@ -8946,13 +8976,6 @@
             <a:prstDash val="solid"/>
           </a:ln>
         </p:spPr>
-        <p:txBody>
-          <a:bodyPr/>
-          <a:lstStyle/>
-          <a:p>
-            <a:endParaRPr lang="ko-KR" altLang="en-US" sz="2400"/>
-          </a:p>
-        </p:txBody>
       </p:sp>
       <p:sp>
         <p:nvSpPr>
@@ -8975,11 +8998,11 @@
           <a:bodyPr wrap="square" rtlCol="0" anchor="ctr"/>
           <a:lstStyle/>
           <a:p>
-            <a:pPr marL="0" indent="0">
-              <a:buNone/>
-            </a:pPr>
-            <a:r>
-              <a:rPr lang="en-US" sz="2800" b="1" dirty="0">
+            <a:pPr indent="0" marL="0">
+              <a:buNone/>
+            </a:pPr>
+            <a:r>
+              <a:rPr lang="en-US" sz="2000" b="1" dirty="0">
                 <a:solidFill>
                   <a:srgbClr val="1E2761"/>
                 </a:solidFill>
@@ -8989,7 +9012,7 @@
               </a:rPr>
               <a:t>PSR</a:t>
             </a:r>
-            <a:endParaRPr lang="en-US" sz="2800" dirty="0"/>
+            <a:endParaRPr lang="en-US" sz="2000" dirty="0"/>
           </a:p>
         </p:txBody>
       </p:sp>
@@ -9014,11 +9037,11 @@
           <a:bodyPr wrap="square" rtlCol="0" anchor="ctr"/>
           <a:lstStyle/>
           <a:p>
-            <a:pPr marL="0" indent="0">
-              <a:buNone/>
-            </a:pPr>
-            <a:r>
-              <a:rPr lang="en-US" dirty="0">
+            <a:pPr indent="0" marL="0">
+              <a:buNone/>
+            </a:pPr>
+            <a:r>
+              <a:rPr lang="en-US" sz="1300" dirty="0">
                 <a:solidFill>
                   <a:srgbClr val="5A5F73"/>
                 </a:solidFill>
@@ -9028,7 +9051,7 @@
               </a:rPr>
               <a:t>매출 대비 시총</a:t>
             </a:r>
-            <a:endParaRPr lang="en-US" dirty="0"/>
+            <a:endParaRPr lang="en-US" sz="1300" dirty="0"/>
           </a:p>
         </p:txBody>
       </p:sp>
@@ -9058,13 +9081,6 @@
             <a:prstDash val="solid"/>
           </a:ln>
         </p:spPr>
-        <p:txBody>
-          <a:bodyPr/>
-          <a:lstStyle/>
-          <a:p>
-            <a:endParaRPr lang="ko-KR" altLang="en-US" sz="2400"/>
-          </a:p>
-        </p:txBody>
       </p:sp>
       <p:sp>
         <p:nvSpPr>
@@ -9087,11 +9103,11 @@
           <a:bodyPr wrap="square" rtlCol="0" anchor="ctr"/>
           <a:lstStyle/>
           <a:p>
-            <a:pPr marL="0" indent="0">
-              <a:buNone/>
-            </a:pPr>
-            <a:r>
-              <a:rPr lang="en-US" sz="2800" b="1" dirty="0">
+            <a:pPr indent="0" marL="0">
+              <a:buNone/>
+            </a:pPr>
+            <a:r>
+              <a:rPr lang="en-US" sz="2000" b="1" dirty="0">
                 <a:solidFill>
                   <a:srgbClr val="1E2761"/>
                 </a:solidFill>
@@ -9101,7 +9117,7 @@
               </a:rPr>
               <a:t>EV + EBITDA</a:t>
             </a:r>
-            <a:endParaRPr lang="en-US" sz="2800" dirty="0"/>
+            <a:endParaRPr lang="en-US" sz="2000" dirty="0"/>
           </a:p>
         </p:txBody>
       </p:sp>
@@ -9126,11 +9142,11 @@
           <a:bodyPr wrap="square" rtlCol="0" anchor="ctr"/>
           <a:lstStyle/>
           <a:p>
-            <a:pPr marL="0" indent="0">
-              <a:buNone/>
-            </a:pPr>
-            <a:r>
-              <a:rPr lang="en-US" dirty="0">
+            <a:pPr indent="0" marL="0">
+              <a:buNone/>
+            </a:pPr>
+            <a:r>
+              <a:rPr lang="en-US" sz="1300" dirty="0">
                 <a:solidFill>
                   <a:srgbClr val="5A5F73"/>
                 </a:solidFill>
@@ -9140,7 +9156,7 @@
               </a:rPr>
               <a:t>기업가치 + 현금창출력</a:t>
             </a:r>
-            <a:endParaRPr lang="en-US" dirty="0"/>
+            <a:endParaRPr lang="en-US" sz="1300" dirty="0"/>
           </a:p>
         </p:txBody>
       </p:sp>
@@ -9165,11 +9181,11 @@
           <a:bodyPr wrap="square" rtlCol="0" anchor="ctr"/>
           <a:lstStyle/>
           <a:p>
-            <a:pPr marL="0" indent="0" algn="ctr">
-              <a:buNone/>
-            </a:pPr>
-            <a:r>
-              <a:rPr lang="en-US" sz="3200" b="1" dirty="0">
+            <a:pPr algn="ctr" indent="0" marL="0">
+              <a:buNone/>
+            </a:pPr>
+            <a:r>
+              <a:rPr lang="en-US" sz="2600" b="1" dirty="0">
                 <a:solidFill>
                   <a:srgbClr val="9C7A0A"/>
                 </a:solidFill>
@@ -9179,7 +9195,7 @@
               </a:rPr>
               <a:t>→</a:t>
             </a:r>
-            <a:endParaRPr lang="en-US" sz="3200" dirty="0"/>
+            <a:endParaRPr lang="en-US" sz="2600" dirty="0"/>
           </a:p>
         </p:txBody>
       </p:sp>
@@ -9209,13 +9225,6 @@
             <a:prstDash val="solid"/>
           </a:ln>
         </p:spPr>
-        <p:txBody>
-          <a:bodyPr/>
-          <a:lstStyle/>
-          <a:p>
-            <a:endParaRPr lang="ko-KR" altLang="en-US" sz="2400"/>
-          </a:p>
-        </p:txBody>
       </p:sp>
       <p:sp>
         <p:nvSpPr>
@@ -9238,11 +9247,11 @@
           <a:bodyPr wrap="square" rtlCol="0" anchor="ctr"/>
           <a:lstStyle/>
           <a:p>
-            <a:pPr marL="0" indent="0">
-              <a:buNone/>
-            </a:pPr>
-            <a:r>
-              <a:rPr lang="en-US" sz="2800" b="1" dirty="0">
+            <a:pPr indent="0" marL="0">
+              <a:buNone/>
+            </a:pPr>
+            <a:r>
+              <a:rPr lang="en-US" sz="2000" b="1" dirty="0">
                 <a:solidFill>
                   <a:srgbClr val="1E2761"/>
                 </a:solidFill>
@@ -9252,7 +9261,7 @@
               </a:rPr>
               <a:t>EV/EBITDA</a:t>
             </a:r>
-            <a:endParaRPr lang="en-US" sz="2800" dirty="0"/>
+            <a:endParaRPr lang="en-US" sz="2000" dirty="0"/>
           </a:p>
         </p:txBody>
       </p:sp>
@@ -9277,11 +9286,11 @@
           <a:bodyPr wrap="square" rtlCol="0" anchor="ctr"/>
           <a:lstStyle/>
           <a:p>
-            <a:pPr marL="0" indent="0">
-              <a:buNone/>
-            </a:pPr>
-            <a:r>
-              <a:rPr lang="en-US" dirty="0">
+            <a:pPr indent="0" marL="0">
+              <a:buNone/>
+            </a:pPr>
+            <a:r>
+              <a:rPr lang="en-US" sz="1300" dirty="0">
                 <a:solidFill>
                   <a:srgbClr val="5A5F73"/>
                 </a:solidFill>
@@ -9291,7 +9300,7 @@
               </a:rPr>
               <a:t>부채구조 영향 제거 비교</a:t>
             </a:r>
-            <a:endParaRPr lang="en-US" dirty="0"/>
+            <a:endParaRPr lang="en-US" sz="1300" dirty="0"/>
           </a:p>
         </p:txBody>
       </p:sp>
@@ -9316,7 +9325,7 @@
           <a:bodyPr wrap="square" rtlCol="0" anchor="ctr"/>
           <a:lstStyle/>
           <a:p>
-            <a:pPr marL="0" indent="0" algn="r">
+            <a:pPr algn="r" indent="0" marL="0">
               <a:buNone/>
             </a:pPr>
             <a:r>
@@ -9350,7 +9359,6 @@
         <a:solidFill>
           <a:srgbClr val="FFFFFF"/>
         </a:solidFill>
-        <a:effectLst/>
       </p:bgPr>
     </p:bg>
     <p:spTree>
@@ -9386,13 +9394,6 @@
           </a:solidFill>
           <a:ln/>
         </p:spPr>
-        <p:txBody>
-          <a:bodyPr/>
-          <a:lstStyle/>
-          <a:p>
-            <a:endParaRPr lang="ko-KR" altLang="en-US"/>
-          </a:p>
-        </p:txBody>
       </p:sp>
       <p:sp>
         <p:nvSpPr>
@@ -9415,11 +9416,11 @@
           <a:bodyPr wrap="square" rtlCol="0" anchor="ctr"/>
           <a:lstStyle/>
           <a:p>
-            <a:pPr marL="0" indent="0">
-              <a:buNone/>
-            </a:pPr>
-            <a:r>
-              <a:rPr lang="en-US" sz="1600" b="1" kern="0" spc="300" dirty="0">
+            <a:pPr indent="0" marL="0">
+              <a:buNone/>
+            </a:pPr>
+            <a:r>
+              <a:rPr lang="en-US" sz="1600" b="1" spc="300" kern="0" dirty="0">
                 <a:solidFill>
                   <a:srgbClr val="9C7A0A"/>
                 </a:solidFill>
@@ -9454,7 +9455,7 @@
           <a:bodyPr wrap="square" rtlCol="0" anchor="ctr"/>
           <a:lstStyle/>
           <a:p>
-            <a:pPr marL="0" indent="0">
+            <a:pPr indent="0" marL="0">
               <a:buNone/>
             </a:pPr>
             <a:r>
@@ -9493,11 +9494,11 @@
           <a:bodyPr wrap="square" rtlCol="0" anchor="ctr"/>
           <a:lstStyle/>
           <a:p>
-            <a:pPr marL="0" indent="0">
-              <a:buNone/>
-            </a:pPr>
-            <a:r>
-              <a:rPr lang="en-US" sz="2000" dirty="0">
+            <a:pPr indent="0" marL="0">
+              <a:buNone/>
+            </a:pPr>
+            <a:r>
+              <a:rPr lang="en-US" sz="1700" dirty="0">
                 <a:solidFill>
                   <a:srgbClr val="5A5F73"/>
                 </a:solidFill>
@@ -9507,7 +9508,7 @@
               </a:rPr>
               <a:t>기업의 가치를 추정하는 두 가지 접근법과 대표 지표들</a:t>
             </a:r>
-            <a:endParaRPr lang="en-US" sz="2000" dirty="0"/>
+            <a:endParaRPr lang="en-US" sz="1700" dirty="0"/>
           </a:p>
         </p:txBody>
       </p:sp>
@@ -9527,7 +9528,6 @@
         <a:solidFill>
           <a:srgbClr val="FFFFFF"/>
         </a:solidFill>
-        <a:effectLst/>
       </p:bgPr>
     </p:bg>
     <p:spTree>
@@ -9565,11 +9565,11 @@
           <a:bodyPr wrap="square" rtlCol="0" anchor="ctr"/>
           <a:lstStyle/>
           <a:p>
-            <a:pPr marL="0" indent="0">
-              <a:buNone/>
-            </a:pPr>
-            <a:r>
-              <a:rPr lang="en-US" sz="1300" b="1" kern="0" spc="200" dirty="0">
+            <a:pPr indent="0" marL="0">
+              <a:buNone/>
+            </a:pPr>
+            <a:r>
+              <a:rPr lang="en-US" sz="1300" b="1" spc="200" kern="0" dirty="0">
                 <a:solidFill>
                   <a:srgbClr val="9C7A0A"/>
                 </a:solidFill>
@@ -9604,7 +9604,7 @@
           <a:bodyPr wrap="square" rtlCol="0" anchor="ctr"/>
           <a:lstStyle/>
           <a:p>
-            <a:pPr marL="0" indent="0" algn="l">
+            <a:pPr algn="l" indent="0" marL="0">
               <a:buNone/>
             </a:pPr>
             <a:r>
@@ -9643,11 +9643,11 @@
           <a:bodyPr wrap="square" rtlCol="0" anchor="ctr"/>
           <a:lstStyle/>
           <a:p>
-            <a:pPr marL="0" indent="0">
-              <a:buNone/>
-            </a:pPr>
-            <a:r>
-              <a:rPr lang="en-US" dirty="0">
+            <a:pPr indent="0" marL="0">
+              <a:buNone/>
+            </a:pPr>
+            <a:r>
+              <a:rPr lang="en-US" sz="1600" dirty="0">
                 <a:solidFill>
                   <a:srgbClr val="5A5F73"/>
                 </a:solidFill>
@@ -9657,7 +9657,7 @@
               </a:rPr>
               <a:t>기업의 “적정 가치”를 추정하는 과정. 현재 시장가격이 그 가치보다 높은지 낮은지를 판단해 투자 의사결정을 내리는 데 활용됩니다.</a:t>
             </a:r>
-            <a:endParaRPr lang="en-US" dirty="0"/>
+            <a:endParaRPr lang="en-US" sz="1600" dirty="0"/>
           </a:p>
         </p:txBody>
       </p:sp>
@@ -9687,13 +9687,6 @@
             <a:prstDash val="solid"/>
           </a:ln>
         </p:spPr>
-        <p:txBody>
-          <a:bodyPr/>
-          <a:lstStyle/>
-          <a:p>
-            <a:endParaRPr lang="ko-KR" altLang="en-US" sz="2000"/>
-          </a:p>
-        </p:txBody>
       </p:sp>
       <p:sp>
         <p:nvSpPr>
@@ -9719,13 +9712,6 @@
             <a:prstDash val="solid"/>
           </a:ln>
         </p:spPr>
-        <p:txBody>
-          <a:bodyPr/>
-          <a:lstStyle/>
-          <a:p>
-            <a:endParaRPr lang="ko-KR" altLang="en-US" sz="2000"/>
-          </a:p>
-        </p:txBody>
       </p:sp>
       <p:sp>
         <p:nvSpPr>
@@ -9748,11 +9734,11 @@
           <a:bodyPr wrap="square" rtlCol="0" anchor="ctr"/>
           <a:lstStyle/>
           <a:p>
-            <a:pPr marL="0" indent="0" algn="ctr">
-              <a:buNone/>
-            </a:pPr>
-            <a:r>
-              <a:rPr lang="en-US" sz="2800" b="1" dirty="0">
+            <a:pPr algn="ctr" indent="0" marL="0">
+              <a:buNone/>
+            </a:pPr>
+            <a:r>
+              <a:rPr lang="en-US" sz="2400" b="1" dirty="0">
                 <a:solidFill>
                   <a:srgbClr val="1E2761"/>
                 </a:solidFill>
@@ -9762,7 +9748,7 @@
               </a:rPr>
               <a:t>A</a:t>
             </a:r>
-            <a:endParaRPr lang="en-US" sz="2800" dirty="0"/>
+            <a:endParaRPr lang="en-US" sz="2400" dirty="0"/>
           </a:p>
         </p:txBody>
       </p:sp>
@@ -9787,11 +9773,11 @@
           <a:bodyPr wrap="square" rtlCol="0" anchor="ctr"/>
           <a:lstStyle/>
           <a:p>
-            <a:pPr marL="0" indent="0">
-              <a:buNone/>
-            </a:pPr>
-            <a:r>
-              <a:rPr lang="en-US" sz="2400" b="1" dirty="0">
+            <a:pPr indent="0" marL="0">
+              <a:buNone/>
+            </a:pPr>
+            <a:r>
+              <a:rPr lang="en-US" sz="2100" b="1" dirty="0">
                 <a:solidFill>
                   <a:srgbClr val="1E2761"/>
                 </a:solidFill>
@@ -9801,7 +9787,7 @@
               </a:rPr>
               <a:t>절대가치평가</a:t>
             </a:r>
-            <a:endParaRPr lang="en-US" sz="2400" dirty="0"/>
+            <a:endParaRPr lang="en-US" sz="2100" dirty="0"/>
           </a:p>
         </p:txBody>
       </p:sp>
@@ -9826,11 +9812,11 @@
           <a:bodyPr wrap="square" rtlCol="0" anchor="ctr"/>
           <a:lstStyle/>
           <a:p>
-            <a:pPr marL="0" indent="0">
-              <a:buNone/>
-            </a:pPr>
-            <a:r>
-              <a:rPr lang="en-US" i="1" dirty="0">
+            <a:pPr indent="0" marL="0">
+              <a:buNone/>
+            </a:pPr>
+            <a:r>
+              <a:rPr lang="en-US" sz="1250" i="1" dirty="0">
                 <a:solidFill>
                   <a:srgbClr val="5A5F73"/>
                 </a:solidFill>
@@ -9840,7 +9826,7 @@
               </a:rPr>
               <a:t>Absolute Valuation</a:t>
             </a:r>
-            <a:endParaRPr lang="en-US" dirty="0"/>
+            <a:endParaRPr lang="en-US" sz="1250" dirty="0"/>
           </a:p>
         </p:txBody>
       </p:sp>
@@ -9865,11 +9851,11 @@
           <a:bodyPr wrap="square" rtlCol="0" anchor="t"/>
           <a:lstStyle/>
           <a:p>
-            <a:pPr marL="0" indent="0">
-              <a:buNone/>
-            </a:pPr>
-            <a:r>
-              <a:rPr lang="en-US" dirty="0">
+            <a:pPr indent="0" marL="0">
+              <a:buNone/>
+            </a:pPr>
+            <a:r>
+              <a:rPr lang="en-US" sz="1600" dirty="0">
                 <a:solidFill>
                   <a:srgbClr val="222633"/>
                 </a:solidFill>
@@ -9879,8 +9865,11 @@
               </a:rPr>
               <a:t>기업 자체의 현금흐름, 자산가치 등을 바탕으로 </a:t>
             </a:r>
-            <a:r>
-              <a:rPr lang="en-US" b="1" dirty="0">
+            <a:pPr indent="0" marL="0">
+              <a:buNone/>
+            </a:pPr>
+            <a:r>
+              <a:rPr lang="en-US" sz="1600" b="1" dirty="0">
                 <a:solidFill>
                   <a:srgbClr val="1E2761"/>
                 </a:solidFill>
@@ -9890,8 +9879,11 @@
               </a:rPr>
               <a:t>독립적으로</a:t>
             </a:r>
-            <a:r>
-              <a:rPr lang="en-US" dirty="0">
+            <a:pPr indent="0" marL="0">
+              <a:buNone/>
+            </a:pPr>
+            <a:r>
+              <a:rPr lang="en-US" sz="1600" dirty="0">
                 <a:solidFill>
                   <a:srgbClr val="222633"/>
                 </a:solidFill>
@@ -9901,7 +9893,7 @@
               </a:rPr>
               <a:t> 가치를 산출</a:t>
             </a:r>
-            <a:endParaRPr lang="en-US" dirty="0"/>
+            <a:endParaRPr lang="en-US" sz="1600" dirty="0"/>
           </a:p>
         </p:txBody>
       </p:sp>
@@ -9913,7 +9905,7 @@
         </p:nvSpPr>
         <p:spPr>
           <a:xfrm>
-            <a:off x="868680" y="4654974"/>
+            <a:off x="868680" y="5120640"/>
             <a:ext cx="4572000" cy="731520"/>
           </a:xfrm>
           <a:prstGeom prst="rect">
@@ -9926,11 +9918,11 @@
           <a:bodyPr wrap="square" rtlCol="0" anchor="ctr"/>
           <a:lstStyle/>
           <a:p>
-            <a:pPr marL="0" indent="0">
-              <a:buNone/>
-            </a:pPr>
-            <a:r>
-              <a:rPr lang="en-US" dirty="0">
+            <a:pPr indent="0" marL="0">
+              <a:buNone/>
+            </a:pPr>
+            <a:r>
+              <a:rPr lang="en-US" sz="1400" dirty="0">
                 <a:solidFill>
                   <a:srgbClr val="5A5F73"/>
                 </a:solidFill>
@@ -9940,7 +9932,7 @@
               </a:rPr>
               <a:t>대표 방법: DCF(현금흐름할인법), DDM(배당할인모형), NAV(자산가치법)</a:t>
             </a:r>
-            <a:endParaRPr lang="en-US" dirty="0"/>
+            <a:endParaRPr lang="en-US" sz="1400" dirty="0"/>
           </a:p>
         </p:txBody>
       </p:sp>
@@ -9970,13 +9962,6 @@
             <a:prstDash val="solid"/>
           </a:ln>
         </p:spPr>
-        <p:txBody>
-          <a:bodyPr/>
-          <a:lstStyle/>
-          <a:p>
-            <a:endParaRPr lang="ko-KR" altLang="en-US" sz="2000"/>
-          </a:p>
-        </p:txBody>
       </p:sp>
       <p:sp>
         <p:nvSpPr>
@@ -10002,13 +9987,6 @@
             <a:prstDash val="solid"/>
           </a:ln>
         </p:spPr>
-        <p:txBody>
-          <a:bodyPr/>
-          <a:lstStyle/>
-          <a:p>
-            <a:endParaRPr lang="ko-KR" altLang="en-US" sz="2000"/>
-          </a:p>
-        </p:txBody>
       </p:sp>
       <p:sp>
         <p:nvSpPr>
@@ -10031,11 +10009,11 @@
           <a:bodyPr wrap="square" rtlCol="0" anchor="ctr"/>
           <a:lstStyle/>
           <a:p>
-            <a:pPr marL="0" indent="0" algn="ctr">
-              <a:buNone/>
-            </a:pPr>
-            <a:r>
-              <a:rPr lang="en-US" sz="2800" b="1" dirty="0">
+            <a:pPr algn="ctr" indent="0" marL="0">
+              <a:buNone/>
+            </a:pPr>
+            <a:r>
+              <a:rPr lang="en-US" sz="2400" b="1" dirty="0">
                 <a:solidFill>
                   <a:srgbClr val="9C7A0A"/>
                 </a:solidFill>
@@ -10045,7 +10023,7 @@
               </a:rPr>
               <a:t>B</a:t>
             </a:r>
-            <a:endParaRPr lang="en-US" sz="2800" dirty="0"/>
+            <a:endParaRPr lang="en-US" sz="2400" dirty="0"/>
           </a:p>
         </p:txBody>
       </p:sp>
@@ -10070,11 +10048,11 @@
           <a:bodyPr wrap="square" rtlCol="0" anchor="ctr"/>
           <a:lstStyle/>
           <a:p>
-            <a:pPr marL="0" indent="0">
-              <a:buNone/>
-            </a:pPr>
-            <a:r>
-              <a:rPr lang="en-US" sz="2400" b="1" dirty="0">
+            <a:pPr indent="0" marL="0">
+              <a:buNone/>
+            </a:pPr>
+            <a:r>
+              <a:rPr lang="en-US" sz="2100" b="1" dirty="0">
                 <a:solidFill>
                   <a:srgbClr val="1E2761"/>
                 </a:solidFill>
@@ -10084,7 +10062,7 @@
               </a:rPr>
               <a:t>상대가치평가</a:t>
             </a:r>
-            <a:endParaRPr lang="en-US" sz="2400" dirty="0"/>
+            <a:endParaRPr lang="en-US" sz="2100" dirty="0"/>
           </a:p>
         </p:txBody>
       </p:sp>
@@ -10109,11 +10087,11 @@
           <a:bodyPr wrap="square" rtlCol="0" anchor="ctr"/>
           <a:lstStyle/>
           <a:p>
-            <a:pPr marL="0" indent="0">
-              <a:buNone/>
-            </a:pPr>
-            <a:r>
-              <a:rPr lang="en-US" i="1" dirty="0">
+            <a:pPr indent="0" marL="0">
+              <a:buNone/>
+            </a:pPr>
+            <a:r>
+              <a:rPr lang="en-US" sz="1250" i="1" dirty="0">
                 <a:solidFill>
                   <a:srgbClr val="5A5F73"/>
                 </a:solidFill>
@@ -10123,7 +10101,7 @@
               </a:rPr>
               <a:t>Relative Valuation</a:t>
             </a:r>
-            <a:endParaRPr lang="en-US" dirty="0"/>
+            <a:endParaRPr lang="en-US" sz="1250" dirty="0"/>
           </a:p>
         </p:txBody>
       </p:sp>
@@ -10148,11 +10126,11 @@
           <a:bodyPr wrap="square" rtlCol="0" anchor="t"/>
           <a:lstStyle/>
           <a:p>
-            <a:pPr marL="0" indent="0">
-              <a:buNone/>
-            </a:pPr>
-            <a:r>
-              <a:rPr lang="en-US" dirty="0">
+            <a:pPr indent="0" marL="0">
+              <a:buNone/>
+            </a:pPr>
+            <a:r>
+              <a:rPr lang="en-US" sz="1600" dirty="0">
                 <a:solidFill>
                   <a:srgbClr val="222633"/>
                 </a:solidFill>
@@ -10162,8 +10140,11 @@
               </a:rPr>
               <a:t>비교 가능한 다른 기업들과 </a:t>
             </a:r>
-            <a:r>
-              <a:rPr lang="en-US" b="1" dirty="0">
+            <a:pPr indent="0" marL="0">
+              <a:buNone/>
+            </a:pPr>
+            <a:r>
+              <a:rPr lang="en-US" sz="1600" b="1" dirty="0">
                 <a:solidFill>
                   <a:srgbClr val="1E2761"/>
                 </a:solidFill>
@@ -10173,8 +10154,11 @@
               </a:rPr>
               <a:t>비교</a:t>
             </a:r>
-            <a:r>
-              <a:rPr lang="en-US" dirty="0">
+            <a:pPr indent="0" marL="0">
+              <a:buNone/>
+            </a:pPr>
+            <a:r>
+              <a:rPr lang="en-US" sz="1600" dirty="0">
                 <a:solidFill>
                   <a:srgbClr val="222633"/>
                 </a:solidFill>
@@ -10184,7 +10168,7 @@
               </a:rPr>
               <a:t>해 상대적으로 가치를 산출</a:t>
             </a:r>
-            <a:endParaRPr lang="en-US" dirty="0"/>
+            <a:endParaRPr lang="en-US" sz="1600" dirty="0"/>
           </a:p>
         </p:txBody>
       </p:sp>
@@ -10196,7 +10180,7 @@
         </p:nvSpPr>
         <p:spPr>
           <a:xfrm>
-            <a:off x="6492240" y="4654974"/>
+            <a:off x="6492240" y="5120640"/>
             <a:ext cx="4572000" cy="731520"/>
           </a:xfrm>
           <a:prstGeom prst="rect">
@@ -10209,11 +10193,11 @@
           <a:bodyPr wrap="square" rtlCol="0" anchor="ctr"/>
           <a:lstStyle/>
           <a:p>
-            <a:pPr marL="0" indent="0">
-              <a:buNone/>
-            </a:pPr>
-            <a:r>
-              <a:rPr lang="en-US" dirty="0">
+            <a:pPr indent="0" marL="0">
+              <a:buNone/>
+            </a:pPr>
+            <a:r>
+              <a:rPr lang="en-US" sz="1400" dirty="0">
                 <a:solidFill>
                   <a:srgbClr val="5A5F73"/>
                 </a:solidFill>
@@ -10223,7 +10207,7 @@
               </a:rPr>
               <a:t>대표 방법: PER, PBR, PSR, EV/EBITDA 등 멀티플(배수) 비교</a:t>
             </a:r>
-            <a:endParaRPr lang="en-US" dirty="0"/>
+            <a:endParaRPr lang="en-US" sz="1400" dirty="0"/>
           </a:p>
         </p:txBody>
       </p:sp>
@@ -10248,7 +10232,7 @@
           <a:bodyPr wrap="square" rtlCol="0" anchor="ctr"/>
           <a:lstStyle/>
           <a:p>
-            <a:pPr marL="0" indent="0" algn="r">
+            <a:pPr algn="r" indent="0" marL="0">
               <a:buNone/>
             </a:pPr>
             <a:r>
@@ -10282,7 +10266,6 @@
         <a:solidFill>
           <a:srgbClr val="FFFFFF"/>
         </a:solidFill>
-        <a:effectLst/>
       </p:bgPr>
     </p:bg>
     <p:spTree>
@@ -10320,11 +10303,11 @@
           <a:bodyPr wrap="square" rtlCol="0" anchor="ctr"/>
           <a:lstStyle/>
           <a:p>
-            <a:pPr marL="0" indent="0">
-              <a:buNone/>
-            </a:pPr>
-            <a:r>
-              <a:rPr lang="en-US" sz="1300" b="1" kern="0" spc="200" dirty="0">
+            <a:pPr indent="0" marL="0">
+              <a:buNone/>
+            </a:pPr>
+            <a:r>
+              <a:rPr lang="en-US" sz="1300" b="1" spc="200" kern="0" dirty="0">
                 <a:solidFill>
                   <a:srgbClr val="9C7A0A"/>
                 </a:solidFill>
@@ -10359,7 +10342,7 @@
           <a:bodyPr wrap="square" rtlCol="0" anchor="ctr"/>
           <a:lstStyle/>
           <a:p>
-            <a:pPr marL="0" indent="0" algn="l">
+            <a:pPr algn="l" indent="0" marL="0">
               <a:buNone/>
             </a:pPr>
             <a:r>
@@ -10398,11 +10381,11 @@
           <a:bodyPr wrap="square" rtlCol="0" anchor="ctr"/>
           <a:lstStyle/>
           <a:p>
-            <a:pPr marL="0" indent="0">
-              <a:buNone/>
-            </a:pPr>
-            <a:r>
-              <a:rPr lang="en-US" dirty="0">
+            <a:pPr indent="0" marL="0">
+              <a:buNone/>
+            </a:pPr>
+            <a:r>
+              <a:rPr lang="en-US" sz="1500" dirty="0">
                 <a:solidFill>
                   <a:srgbClr val="5A5F73"/>
                 </a:solidFill>
@@ -10412,7 +10395,7 @@
               </a:rPr>
               <a:t>멀티플 = 기업가치를 특정 재무지표로 나눈 배수 — “이 회사가 벌어들이는 돈(또는 자산·매출)의 몇 배로 거래되는가”</a:t>
             </a:r>
-            <a:endParaRPr lang="en-US" dirty="0"/>
+            <a:endParaRPr lang="en-US" sz="1500" dirty="0"/>
           </a:p>
         </p:txBody>
       </p:sp>
@@ -10442,13 +10425,6 @@
             <a:prstDash val="solid"/>
           </a:ln>
         </p:spPr>
-        <p:txBody>
-          <a:bodyPr/>
-          <a:lstStyle/>
-          <a:p>
-            <a:endParaRPr lang="ko-KR" altLang="en-US" sz="2400"/>
-          </a:p>
-        </p:txBody>
       </p:sp>
       <p:sp>
         <p:nvSpPr>
@@ -10471,11 +10447,11 @@
           <a:bodyPr wrap="square" rtlCol="0" anchor="ctr"/>
           <a:lstStyle/>
           <a:p>
-            <a:pPr marL="0" indent="0">
-              <a:buNone/>
-            </a:pPr>
-            <a:r>
-              <a:rPr lang="en-US" sz="2800" b="1" dirty="0">
+            <a:pPr indent="0" marL="0">
+              <a:buNone/>
+            </a:pPr>
+            <a:r>
+              <a:rPr lang="en-US" sz="2000" b="1" dirty="0">
                 <a:solidFill>
                   <a:srgbClr val="1E2761"/>
                 </a:solidFill>
@@ -10485,7 +10461,7 @@
               </a:rPr>
               <a:t>PER</a:t>
             </a:r>
-            <a:endParaRPr lang="en-US" sz="2800" dirty="0"/>
+            <a:endParaRPr lang="en-US" sz="2000" dirty="0"/>
           </a:p>
         </p:txBody>
       </p:sp>
@@ -10510,11 +10486,11 @@
           <a:bodyPr wrap="square" rtlCol="0" anchor="ctr"/>
           <a:lstStyle/>
           <a:p>
-            <a:pPr marL="0" indent="0">
-              <a:buNone/>
-            </a:pPr>
-            <a:r>
-              <a:rPr lang="en-US" sz="1600" dirty="0">
+            <a:pPr indent="0" marL="0">
+              <a:buNone/>
+            </a:pPr>
+            <a:r>
+              <a:rPr lang="en-US" sz="1250" dirty="0">
                 <a:solidFill>
                   <a:srgbClr val="5A5F73"/>
                 </a:solidFill>
@@ -10524,7 +10500,7 @@
               </a:rPr>
               <a:t>주가수익비율</a:t>
             </a:r>
-            <a:endParaRPr lang="en-US" sz="1600" dirty="0"/>
+            <a:endParaRPr lang="en-US" sz="1250" dirty="0"/>
           </a:p>
         </p:txBody>
       </p:sp>
@@ -10547,13 +10523,6 @@
           </a:solidFill>
           <a:ln/>
         </p:spPr>
-        <p:txBody>
-          <a:bodyPr/>
-          <a:lstStyle/>
-          <a:p>
-            <a:endParaRPr lang="ko-KR" altLang="en-US" sz="2400"/>
-          </a:p>
-        </p:txBody>
       </p:sp>
       <p:sp>
         <p:nvSpPr>
@@ -10576,11 +10545,11 @@
           <a:bodyPr wrap="square" rtlCol="0" anchor="ctr"/>
           <a:lstStyle/>
           <a:p>
-            <a:pPr marL="0" indent="0">
-              <a:buNone/>
-            </a:pPr>
-            <a:r>
-              <a:rPr lang="en-US" b="1" dirty="0">
+            <a:pPr indent="0" marL="0">
+              <a:buNone/>
+            </a:pPr>
+            <a:r>
+              <a:rPr lang="en-US" sz="1500" b="1" dirty="0">
                 <a:solidFill>
                   <a:srgbClr val="222633"/>
                 </a:solidFill>
@@ -10590,7 +10559,7 @@
               </a:rPr>
               <a:t>주가 ÷ EPS</a:t>
             </a:r>
-            <a:endParaRPr lang="en-US" dirty="0"/>
+            <a:endParaRPr lang="en-US" sz="1500" dirty="0"/>
           </a:p>
         </p:txBody>
       </p:sp>
@@ -10615,11 +10584,11 @@
           <a:bodyPr wrap="square" rtlCol="0" anchor="ctr"/>
           <a:lstStyle/>
           <a:p>
-            <a:pPr marL="0" indent="0">
-              <a:buNone/>
-            </a:pPr>
-            <a:r>
-              <a:rPr lang="en-US" sz="1600" dirty="0">
+            <a:pPr indent="0" marL="0">
+              <a:buNone/>
+            </a:pPr>
+            <a:r>
+              <a:rPr lang="en-US" sz="1250" dirty="0">
                 <a:solidFill>
                   <a:srgbClr val="5A5F73"/>
                 </a:solidFill>
@@ -10629,7 +10598,7 @@
               </a:rPr>
               <a:t>이익 기반, 가장 널리 사용</a:t>
             </a:r>
-            <a:endParaRPr lang="en-US" sz="1600" dirty="0"/>
+            <a:endParaRPr lang="en-US" sz="1250" dirty="0"/>
           </a:p>
         </p:txBody>
       </p:sp>
@@ -10659,13 +10628,6 @@
             <a:prstDash val="solid"/>
           </a:ln>
         </p:spPr>
-        <p:txBody>
-          <a:bodyPr/>
-          <a:lstStyle/>
-          <a:p>
-            <a:endParaRPr lang="ko-KR" altLang="en-US" sz="2400"/>
-          </a:p>
-        </p:txBody>
       </p:sp>
       <p:sp>
         <p:nvSpPr>
@@ -10688,11 +10650,11 @@
           <a:bodyPr wrap="square" rtlCol="0" anchor="ctr"/>
           <a:lstStyle/>
           <a:p>
-            <a:pPr marL="0" indent="0">
-              <a:buNone/>
-            </a:pPr>
-            <a:r>
-              <a:rPr lang="en-US" sz="2800" b="1" dirty="0">
+            <a:pPr indent="0" marL="0">
+              <a:buNone/>
+            </a:pPr>
+            <a:r>
+              <a:rPr lang="en-US" sz="2000" b="1" dirty="0">
                 <a:solidFill>
                   <a:srgbClr val="1E2761"/>
                 </a:solidFill>
@@ -10702,7 +10664,7 @@
               </a:rPr>
               <a:t>PBR</a:t>
             </a:r>
-            <a:endParaRPr lang="en-US" sz="2800" dirty="0"/>
+            <a:endParaRPr lang="en-US" sz="2000" dirty="0"/>
           </a:p>
         </p:txBody>
       </p:sp>
@@ -10727,11 +10689,11 @@
           <a:bodyPr wrap="square" rtlCol="0" anchor="ctr"/>
           <a:lstStyle/>
           <a:p>
-            <a:pPr marL="0" indent="0">
-              <a:buNone/>
-            </a:pPr>
-            <a:r>
-              <a:rPr lang="en-US" sz="1600" dirty="0">
+            <a:pPr indent="0" marL="0">
+              <a:buNone/>
+            </a:pPr>
+            <a:r>
+              <a:rPr lang="en-US" sz="1250" dirty="0">
                 <a:solidFill>
                   <a:srgbClr val="5A5F73"/>
                 </a:solidFill>
@@ -10741,7 +10703,7 @@
               </a:rPr>
               <a:t>주가순자산비율</a:t>
             </a:r>
-            <a:endParaRPr lang="en-US" sz="1600" dirty="0"/>
+            <a:endParaRPr lang="en-US" sz="1250" dirty="0"/>
           </a:p>
         </p:txBody>
       </p:sp>
@@ -10764,13 +10726,6 @@
           </a:solidFill>
           <a:ln/>
         </p:spPr>
-        <p:txBody>
-          <a:bodyPr/>
-          <a:lstStyle/>
-          <a:p>
-            <a:endParaRPr lang="ko-KR" altLang="en-US" sz="2400"/>
-          </a:p>
-        </p:txBody>
       </p:sp>
       <p:sp>
         <p:nvSpPr>
@@ -10793,11 +10748,11 @@
           <a:bodyPr wrap="square" rtlCol="0" anchor="ctr"/>
           <a:lstStyle/>
           <a:p>
-            <a:pPr marL="0" indent="0">
-              <a:buNone/>
-            </a:pPr>
-            <a:r>
-              <a:rPr lang="en-US" b="1" dirty="0">
+            <a:pPr indent="0" marL="0">
+              <a:buNone/>
+            </a:pPr>
+            <a:r>
+              <a:rPr lang="en-US" sz="1500" b="1" dirty="0">
                 <a:solidFill>
                   <a:srgbClr val="222633"/>
                 </a:solidFill>
@@ -10807,7 +10762,7 @@
               </a:rPr>
               <a:t>주가 ÷ BPS</a:t>
             </a:r>
-            <a:endParaRPr lang="en-US" dirty="0"/>
+            <a:endParaRPr lang="en-US" sz="1500" dirty="0"/>
           </a:p>
         </p:txBody>
       </p:sp>
@@ -10832,11 +10787,11 @@
           <a:bodyPr wrap="square" rtlCol="0" anchor="ctr"/>
           <a:lstStyle/>
           <a:p>
-            <a:pPr marL="0" indent="0">
-              <a:buNone/>
-            </a:pPr>
-            <a:r>
-              <a:rPr lang="en-US" sz="1600" dirty="0">
+            <a:pPr indent="0" marL="0">
+              <a:buNone/>
+            </a:pPr>
+            <a:r>
+              <a:rPr lang="en-US" sz="1250" dirty="0">
                 <a:solidFill>
                   <a:srgbClr val="5A5F73"/>
                 </a:solidFill>
@@ -10846,7 +10801,7 @@
               </a:rPr>
               <a:t>자산 기반, 금융·제조업</a:t>
             </a:r>
-            <a:endParaRPr lang="en-US" sz="1600" dirty="0"/>
+            <a:endParaRPr lang="en-US" sz="1250" dirty="0"/>
           </a:p>
         </p:txBody>
       </p:sp>
@@ -10876,13 +10831,6 @@
             <a:prstDash val="solid"/>
           </a:ln>
         </p:spPr>
-        <p:txBody>
-          <a:bodyPr/>
-          <a:lstStyle/>
-          <a:p>
-            <a:endParaRPr lang="ko-KR" altLang="en-US" sz="2400"/>
-          </a:p>
-        </p:txBody>
       </p:sp>
       <p:sp>
         <p:nvSpPr>
@@ -10905,11 +10853,11 @@
           <a:bodyPr wrap="square" rtlCol="0" anchor="ctr"/>
           <a:lstStyle/>
           <a:p>
-            <a:pPr marL="0" indent="0">
-              <a:buNone/>
-            </a:pPr>
-            <a:r>
-              <a:rPr lang="en-US" sz="2800" b="1" dirty="0">
+            <a:pPr indent="0" marL="0">
+              <a:buNone/>
+            </a:pPr>
+            <a:r>
+              <a:rPr lang="en-US" sz="2000" b="1" dirty="0">
                 <a:solidFill>
                   <a:srgbClr val="1E2761"/>
                 </a:solidFill>
@@ -10919,7 +10867,7 @@
               </a:rPr>
               <a:t>PSR</a:t>
             </a:r>
-            <a:endParaRPr lang="en-US" sz="2800" dirty="0"/>
+            <a:endParaRPr lang="en-US" sz="2000" dirty="0"/>
           </a:p>
         </p:txBody>
       </p:sp>
@@ -10944,11 +10892,11 @@
           <a:bodyPr wrap="square" rtlCol="0" anchor="ctr"/>
           <a:lstStyle/>
           <a:p>
-            <a:pPr marL="0" indent="0">
-              <a:buNone/>
-            </a:pPr>
-            <a:r>
-              <a:rPr lang="en-US" sz="1600" dirty="0">
+            <a:pPr indent="0" marL="0">
+              <a:buNone/>
+            </a:pPr>
+            <a:r>
+              <a:rPr lang="en-US" sz="1250" dirty="0">
                 <a:solidFill>
                   <a:srgbClr val="5A5F73"/>
                 </a:solidFill>
@@ -10958,7 +10906,7 @@
               </a:rPr>
               <a:t>주가매출비율</a:t>
             </a:r>
-            <a:endParaRPr lang="en-US" sz="1600" dirty="0"/>
+            <a:endParaRPr lang="en-US" sz="1250" dirty="0"/>
           </a:p>
         </p:txBody>
       </p:sp>
@@ -10981,13 +10929,6 @@
           </a:solidFill>
           <a:ln/>
         </p:spPr>
-        <p:txBody>
-          <a:bodyPr/>
-          <a:lstStyle/>
-          <a:p>
-            <a:endParaRPr lang="ko-KR" altLang="en-US" sz="2400"/>
-          </a:p>
-        </p:txBody>
       </p:sp>
       <p:sp>
         <p:nvSpPr>
@@ -11010,11 +10951,11 @@
           <a:bodyPr wrap="square" rtlCol="0" anchor="ctr"/>
           <a:lstStyle/>
           <a:p>
-            <a:pPr marL="0" indent="0">
-              <a:buNone/>
-            </a:pPr>
-            <a:r>
-              <a:rPr lang="en-US" b="1" dirty="0">
+            <a:pPr indent="0" marL="0">
+              <a:buNone/>
+            </a:pPr>
+            <a:r>
+              <a:rPr lang="en-US" sz="1500" b="1" dirty="0">
                 <a:solidFill>
                   <a:srgbClr val="222633"/>
                 </a:solidFill>
@@ -11024,7 +10965,7 @@
               </a:rPr>
               <a:t>시가총액 ÷ 매출액</a:t>
             </a:r>
-            <a:endParaRPr lang="en-US" dirty="0"/>
+            <a:endParaRPr lang="en-US" sz="1500" dirty="0"/>
           </a:p>
         </p:txBody>
       </p:sp>
@@ -11049,11 +10990,11 @@
           <a:bodyPr wrap="square" rtlCol="0" anchor="ctr"/>
           <a:lstStyle/>
           <a:p>
-            <a:pPr marL="0" indent="0">
-              <a:buNone/>
-            </a:pPr>
-            <a:r>
-              <a:rPr lang="en-US" sz="1600" dirty="0">
+            <a:pPr indent="0" marL="0">
+              <a:buNone/>
+            </a:pPr>
+            <a:r>
+              <a:rPr lang="en-US" sz="1250" dirty="0">
                 <a:solidFill>
                   <a:srgbClr val="5A5F73"/>
                 </a:solidFill>
@@ -11063,7 +11004,7 @@
               </a:rPr>
               <a:t>적자·성장기업 평가</a:t>
             </a:r>
-            <a:endParaRPr lang="en-US" sz="1600" dirty="0"/>
+            <a:endParaRPr lang="en-US" sz="1250" dirty="0"/>
           </a:p>
         </p:txBody>
       </p:sp>
@@ -11093,13 +11034,6 @@
             <a:prstDash val="solid"/>
           </a:ln>
         </p:spPr>
-        <p:txBody>
-          <a:bodyPr/>
-          <a:lstStyle/>
-          <a:p>
-            <a:endParaRPr lang="ko-KR" altLang="en-US" sz="2400"/>
-          </a:p>
-        </p:txBody>
       </p:sp>
       <p:sp>
         <p:nvSpPr>
@@ -11122,11 +11056,11 @@
           <a:bodyPr wrap="square" rtlCol="0" anchor="ctr"/>
           <a:lstStyle/>
           <a:p>
-            <a:pPr marL="0" indent="0">
-              <a:buNone/>
-            </a:pPr>
-            <a:r>
-              <a:rPr lang="en-US" sz="2800" b="1" dirty="0">
+            <a:pPr indent="0" marL="0">
+              <a:buNone/>
+            </a:pPr>
+            <a:r>
+              <a:rPr lang="en-US" sz="2000" b="1" dirty="0">
                 <a:solidFill>
                   <a:srgbClr val="1E2761"/>
                 </a:solidFill>
@@ -11136,7 +11070,7 @@
               </a:rPr>
               <a:t>EV/EBITDA</a:t>
             </a:r>
-            <a:endParaRPr lang="en-US" sz="2800" dirty="0"/>
+            <a:endParaRPr lang="en-US" sz="2000" dirty="0"/>
           </a:p>
         </p:txBody>
       </p:sp>
@@ -11161,11 +11095,11 @@
           <a:bodyPr wrap="square" rtlCol="0" anchor="ctr"/>
           <a:lstStyle/>
           <a:p>
-            <a:pPr marL="0" indent="0">
-              <a:buNone/>
-            </a:pPr>
-            <a:r>
-              <a:rPr lang="en-US" sz="1600" dirty="0">
+            <a:pPr indent="0" marL="0">
+              <a:buNone/>
+            </a:pPr>
+            <a:r>
+              <a:rPr lang="en-US" sz="1250" dirty="0">
                 <a:solidFill>
                   <a:srgbClr val="5A5F73"/>
                 </a:solidFill>
@@ -11175,7 +11109,7 @@
               </a:rPr>
               <a:t>기업가치 대비 현금창출력</a:t>
             </a:r>
-            <a:endParaRPr lang="en-US" sz="1600" dirty="0"/>
+            <a:endParaRPr lang="en-US" sz="1250" dirty="0"/>
           </a:p>
         </p:txBody>
       </p:sp>
@@ -11198,13 +11132,6 @@
           </a:solidFill>
           <a:ln/>
         </p:spPr>
-        <p:txBody>
-          <a:bodyPr/>
-          <a:lstStyle/>
-          <a:p>
-            <a:endParaRPr lang="ko-KR" altLang="en-US" sz="2400"/>
-          </a:p>
-        </p:txBody>
       </p:sp>
       <p:sp>
         <p:nvSpPr>
@@ -11227,11 +11154,11 @@
           <a:bodyPr wrap="square" rtlCol="0" anchor="ctr"/>
           <a:lstStyle/>
           <a:p>
-            <a:pPr marL="0" indent="0">
-              <a:buNone/>
-            </a:pPr>
-            <a:r>
-              <a:rPr lang="en-US" b="1" dirty="0">
+            <a:pPr indent="0" marL="0">
+              <a:buNone/>
+            </a:pPr>
+            <a:r>
+              <a:rPr lang="en-US" sz="1500" b="1" dirty="0">
                 <a:solidFill>
                   <a:srgbClr val="222633"/>
                 </a:solidFill>
@@ -11241,7 +11168,7 @@
               </a:rPr>
               <a:t>EV ÷ EBITDA</a:t>
             </a:r>
-            <a:endParaRPr lang="en-US" dirty="0"/>
+            <a:endParaRPr lang="en-US" sz="1500" dirty="0"/>
           </a:p>
         </p:txBody>
       </p:sp>
@@ -11266,11 +11193,11 @@
           <a:bodyPr wrap="square" rtlCol="0" anchor="ctr"/>
           <a:lstStyle/>
           <a:p>
-            <a:pPr marL="0" indent="0">
-              <a:buNone/>
-            </a:pPr>
-            <a:r>
-              <a:rPr lang="en-US" sz="1600" dirty="0">
+            <a:pPr indent="0" marL="0">
+              <a:buNone/>
+            </a:pPr>
+            <a:r>
+              <a:rPr lang="en-US" sz="1250" dirty="0">
                 <a:solidFill>
                   <a:srgbClr val="5A5F73"/>
                 </a:solidFill>
@@ -11280,7 +11207,7 @@
               </a:rPr>
               <a:t>자본구조 영향 최소화</a:t>
             </a:r>
-            <a:endParaRPr lang="en-US" sz="1600" dirty="0"/>
+            <a:endParaRPr lang="en-US" sz="1250" dirty="0"/>
           </a:p>
         </p:txBody>
       </p:sp>
@@ -11310,13 +11237,6 @@
             <a:prstDash val="solid"/>
           </a:ln>
         </p:spPr>
-        <p:txBody>
-          <a:bodyPr/>
-          <a:lstStyle/>
-          <a:p>
-            <a:endParaRPr lang="ko-KR" altLang="en-US" sz="2400"/>
-          </a:p>
-        </p:txBody>
       </p:sp>
       <p:sp>
         <p:nvSpPr>
@@ -11339,11 +11259,11 @@
           <a:bodyPr wrap="square" rtlCol="0" anchor="ctr"/>
           <a:lstStyle/>
           <a:p>
-            <a:pPr marL="0" indent="0">
-              <a:buNone/>
-            </a:pPr>
-            <a:r>
-              <a:rPr lang="en-US" sz="2800" b="1" dirty="0">
+            <a:pPr indent="0" marL="0">
+              <a:buNone/>
+            </a:pPr>
+            <a:r>
+              <a:rPr lang="en-US" sz="2000" b="1" dirty="0">
                 <a:solidFill>
                   <a:srgbClr val="1E2761"/>
                 </a:solidFill>
@@ -11353,7 +11273,7 @@
               </a:rPr>
               <a:t>EV/Sales</a:t>
             </a:r>
-            <a:endParaRPr lang="en-US" sz="2800" dirty="0"/>
+            <a:endParaRPr lang="en-US" sz="2000" dirty="0"/>
           </a:p>
         </p:txBody>
       </p:sp>
@@ -11378,11 +11298,11 @@
           <a:bodyPr wrap="square" rtlCol="0" anchor="ctr"/>
           <a:lstStyle/>
           <a:p>
-            <a:pPr marL="0" indent="0">
-              <a:buNone/>
-            </a:pPr>
-            <a:r>
-              <a:rPr lang="en-US" sz="1600" dirty="0">
+            <a:pPr indent="0" marL="0">
+              <a:buNone/>
+            </a:pPr>
+            <a:r>
+              <a:rPr lang="en-US" sz="1250" dirty="0">
                 <a:solidFill>
                   <a:srgbClr val="5A5F73"/>
                 </a:solidFill>
@@ -11392,7 +11312,7 @@
               </a:rPr>
               <a:t>기업가치 대비 매출</a:t>
             </a:r>
-            <a:endParaRPr lang="en-US" sz="1600" dirty="0"/>
+            <a:endParaRPr lang="en-US" sz="1250" dirty="0"/>
           </a:p>
         </p:txBody>
       </p:sp>
@@ -11415,13 +11335,6 @@
           </a:solidFill>
           <a:ln/>
         </p:spPr>
-        <p:txBody>
-          <a:bodyPr/>
-          <a:lstStyle/>
-          <a:p>
-            <a:endParaRPr lang="ko-KR" altLang="en-US" sz="2400"/>
-          </a:p>
-        </p:txBody>
       </p:sp>
       <p:sp>
         <p:nvSpPr>
@@ -11444,11 +11357,11 @@
           <a:bodyPr wrap="square" rtlCol="0" anchor="ctr"/>
           <a:lstStyle/>
           <a:p>
-            <a:pPr marL="0" indent="0">
-              <a:buNone/>
-            </a:pPr>
-            <a:r>
-              <a:rPr lang="en-US" b="1" dirty="0">
+            <a:pPr indent="0" marL="0">
+              <a:buNone/>
+            </a:pPr>
+            <a:r>
+              <a:rPr lang="en-US" sz="1500" b="1" dirty="0">
                 <a:solidFill>
                   <a:srgbClr val="222633"/>
                 </a:solidFill>
@@ -11458,7 +11371,7 @@
               </a:rPr>
               <a:t>EV ÷ 매출액</a:t>
             </a:r>
-            <a:endParaRPr lang="en-US" dirty="0"/>
+            <a:endParaRPr lang="en-US" sz="1500" dirty="0"/>
           </a:p>
         </p:txBody>
       </p:sp>
@@ -11483,11 +11396,11 @@
           <a:bodyPr wrap="square" rtlCol="0" anchor="ctr"/>
           <a:lstStyle/>
           <a:p>
-            <a:pPr marL="0" indent="0">
-              <a:buNone/>
-            </a:pPr>
-            <a:r>
-              <a:rPr lang="en-US" sz="1600" dirty="0">
+            <a:pPr indent="0" marL="0">
+              <a:buNone/>
+            </a:pPr>
+            <a:r>
+              <a:rPr lang="en-US" sz="1250" dirty="0">
                 <a:solidFill>
                   <a:srgbClr val="5A5F73"/>
                 </a:solidFill>
@@ -11497,7 +11410,7 @@
               </a:rPr>
               <a:t>초기 성장·플랫폼 기업</a:t>
             </a:r>
-            <a:endParaRPr lang="en-US" sz="1600" dirty="0"/>
+            <a:endParaRPr lang="en-US" sz="1250" dirty="0"/>
           </a:p>
         </p:txBody>
       </p:sp>
@@ -11527,13 +11440,6 @@
             <a:prstDash val="solid"/>
           </a:ln>
         </p:spPr>
-        <p:txBody>
-          <a:bodyPr/>
-          <a:lstStyle/>
-          <a:p>
-            <a:endParaRPr lang="ko-KR" altLang="en-US" sz="2400"/>
-          </a:p>
-        </p:txBody>
       </p:sp>
       <p:sp>
         <p:nvSpPr>
@@ -11556,11 +11462,11 @@
           <a:bodyPr wrap="square" rtlCol="0" anchor="ctr"/>
           <a:lstStyle/>
           <a:p>
-            <a:pPr marL="0" indent="0">
-              <a:buNone/>
-            </a:pPr>
-            <a:r>
-              <a:rPr lang="en-US" sz="2800" b="1" dirty="0">
+            <a:pPr indent="0" marL="0">
+              <a:buNone/>
+            </a:pPr>
+            <a:r>
+              <a:rPr lang="en-US" sz="2000" b="1" dirty="0">
                 <a:solidFill>
                   <a:srgbClr val="1E2761"/>
                 </a:solidFill>
@@ -11570,7 +11476,7 @@
               </a:rPr>
               <a:t>PEG</a:t>
             </a:r>
-            <a:endParaRPr lang="en-US" sz="2800" dirty="0"/>
+            <a:endParaRPr lang="en-US" sz="2000" dirty="0"/>
           </a:p>
         </p:txBody>
       </p:sp>
@@ -11595,11 +11501,11 @@
           <a:bodyPr wrap="square" rtlCol="0" anchor="ctr"/>
           <a:lstStyle/>
           <a:p>
-            <a:pPr marL="0" indent="0">
-              <a:buNone/>
-            </a:pPr>
-            <a:r>
-              <a:rPr lang="en-US" sz="1600" dirty="0">
+            <a:pPr indent="0" marL="0">
+              <a:buNone/>
+            </a:pPr>
+            <a:r>
+              <a:rPr lang="en-US" sz="1250" dirty="0">
                 <a:solidFill>
                   <a:srgbClr val="5A5F73"/>
                 </a:solidFill>
@@ -11609,7 +11515,7 @@
               </a:rPr>
               <a:t>성장성 대비 PER</a:t>
             </a:r>
-            <a:endParaRPr lang="en-US" sz="1600" dirty="0"/>
+            <a:endParaRPr lang="en-US" sz="1250" dirty="0"/>
           </a:p>
         </p:txBody>
       </p:sp>
@@ -11632,13 +11538,6 @@
           </a:solidFill>
           <a:ln/>
         </p:spPr>
-        <p:txBody>
-          <a:bodyPr/>
-          <a:lstStyle/>
-          <a:p>
-            <a:endParaRPr lang="ko-KR" altLang="en-US" sz="2400"/>
-          </a:p>
-        </p:txBody>
       </p:sp>
       <p:sp>
         <p:nvSpPr>
@@ -11661,11 +11560,11 @@
           <a:bodyPr wrap="square" rtlCol="0" anchor="ctr"/>
           <a:lstStyle/>
           <a:p>
-            <a:pPr marL="0" indent="0">
-              <a:buNone/>
-            </a:pPr>
-            <a:r>
-              <a:rPr lang="en-US" b="1" dirty="0">
+            <a:pPr indent="0" marL="0">
+              <a:buNone/>
+            </a:pPr>
+            <a:r>
+              <a:rPr lang="en-US" sz="1500" b="1" dirty="0">
                 <a:solidFill>
                   <a:srgbClr val="222633"/>
                 </a:solidFill>
@@ -11675,7 +11574,7 @@
               </a:rPr>
               <a:t>PER ÷ 이익성장률</a:t>
             </a:r>
-            <a:endParaRPr lang="en-US" dirty="0"/>
+            <a:endParaRPr lang="en-US" sz="1500" dirty="0"/>
           </a:p>
         </p:txBody>
       </p:sp>
@@ -11700,11 +11599,11 @@
           <a:bodyPr wrap="square" rtlCol="0" anchor="ctr"/>
           <a:lstStyle/>
           <a:p>
-            <a:pPr marL="0" indent="0">
-              <a:buNone/>
-            </a:pPr>
-            <a:r>
-              <a:rPr lang="en-US" sz="1600" dirty="0">
+            <a:pPr indent="0" marL="0">
+              <a:buNone/>
+            </a:pPr>
+            <a:r>
+              <a:rPr lang="en-US" sz="1250" dirty="0">
                 <a:solidFill>
                   <a:srgbClr val="5A5F73"/>
                 </a:solidFill>
@@ -11714,7 +11613,7 @@
               </a:rPr>
               <a:t>성장 대비 밸류에이션</a:t>
             </a:r>
-            <a:endParaRPr lang="en-US" sz="1600" dirty="0"/>
+            <a:endParaRPr lang="en-US" sz="1250" dirty="0"/>
           </a:p>
         </p:txBody>
       </p:sp>
@@ -11739,11 +11638,11 @@
           <a:bodyPr wrap="square" rtlCol="0" anchor="ctr"/>
           <a:lstStyle/>
           <a:p>
-            <a:pPr marL="0" indent="0" algn="r">
-              <a:buNone/>
-            </a:pPr>
-            <a:r>
-              <a:rPr lang="en-US" sz="1400" dirty="0">
+            <a:pPr algn="r" indent="0" marL="0">
+              <a:buNone/>
+            </a:pPr>
+            <a:r>
+              <a:rPr lang="en-US" sz="1100" dirty="0">
                 <a:solidFill>
                   <a:srgbClr val="5A5F73"/>
                 </a:solidFill>
@@ -11753,7 +11652,7 @@
               </a:rPr>
               <a:t>04</a:t>
             </a:r>
-            <a:endParaRPr lang="en-US" sz="1400" dirty="0"/>
+            <a:endParaRPr lang="en-US" sz="1100" dirty="0"/>
           </a:p>
         </p:txBody>
       </p:sp>
@@ -11773,7 +11672,6 @@
         <a:solidFill>
           <a:srgbClr val="FFFFFF"/>
         </a:solidFill>
-        <a:effectLst/>
       </p:bgPr>
     </p:bg>
     <p:spTree>
@@ -11811,11 +11709,11 @@
           <a:bodyPr wrap="square" rtlCol="0" anchor="ctr"/>
           <a:lstStyle/>
           <a:p>
-            <a:pPr marL="0" indent="0">
-              <a:buNone/>
-            </a:pPr>
-            <a:r>
-              <a:rPr lang="en-US" sz="1300" b="1" kern="0" spc="200" dirty="0">
+            <a:pPr indent="0" marL="0">
+              <a:buNone/>
+            </a:pPr>
+            <a:r>
+              <a:rPr lang="en-US" sz="1300" b="1" spc="200" kern="0" dirty="0">
                 <a:solidFill>
                   <a:srgbClr val="9C7A0A"/>
                 </a:solidFill>
@@ -11850,7 +11748,7 @@
           <a:bodyPr wrap="square" rtlCol="0" anchor="ctr"/>
           <a:lstStyle/>
           <a:p>
-            <a:pPr marL="0" indent="0" algn="l">
+            <a:pPr algn="l" indent="0" marL="0">
               <a:buNone/>
             </a:pPr>
             <a:r>
@@ -11889,11 +11787,11 @@
           <a:bodyPr wrap="square" rtlCol="0" anchor="ctr"/>
           <a:lstStyle/>
           <a:p>
-            <a:pPr marL="0" indent="0">
-              <a:buNone/>
-            </a:pPr>
-            <a:r>
-              <a:rPr lang="en-US" dirty="0">
+            <a:pPr indent="0" marL="0">
+              <a:buNone/>
+            </a:pPr>
+            <a:r>
+              <a:rPr lang="en-US" sz="1500" dirty="0">
                 <a:solidFill>
                   <a:srgbClr val="5A5F73"/>
                 </a:solidFill>
@@ -11903,7 +11801,7 @@
               </a:rPr>
               <a:t>이익 대비 주가가 얼마나 비싼가를 측정하는 가장 대표적인 지표</a:t>
             </a:r>
-            <a:endParaRPr lang="en-US" dirty="0"/>
+            <a:endParaRPr lang="en-US" sz="1500" dirty="0"/>
           </a:p>
         </p:txBody>
       </p:sp>
@@ -11933,13 +11831,6 @@
             <a:prstDash val="solid"/>
           </a:ln>
         </p:spPr>
-        <p:txBody>
-          <a:bodyPr/>
-          <a:lstStyle/>
-          <a:p>
-            <a:endParaRPr lang="ko-KR" altLang="en-US" sz="2400"/>
-          </a:p>
-        </p:txBody>
       </p:sp>
       <p:sp>
         <p:nvSpPr>
@@ -11962,11 +11853,11 @@
           <a:bodyPr wrap="square" rtlCol="0" anchor="ctr"/>
           <a:lstStyle/>
           <a:p>
-            <a:pPr marL="0" indent="0">
-              <a:buNone/>
-            </a:pPr>
-            <a:r>
-              <a:rPr lang="en-US" sz="2400" b="1" dirty="0">
+            <a:pPr indent="0" marL="0">
+              <a:buNone/>
+            </a:pPr>
+            <a:r>
+              <a:rPr lang="en-US" sz="2200" b="1" dirty="0">
                 <a:solidFill>
                   <a:srgbClr val="1E2761"/>
                 </a:solidFill>
@@ -11976,7 +11867,7 @@
               </a:rPr>
               <a:t>PER = 주가 ÷ EPS</a:t>
             </a:r>
-            <a:endParaRPr lang="en-US" sz="2400" dirty="0"/>
+            <a:endParaRPr lang="en-US" sz="2200" dirty="0"/>
           </a:p>
         </p:txBody>
       </p:sp>
@@ -12001,11 +11892,11 @@
           <a:bodyPr wrap="square" rtlCol="0" anchor="ctr"/>
           <a:lstStyle/>
           <a:p>
-            <a:pPr marL="0" indent="0">
-              <a:buNone/>
-            </a:pPr>
-            <a:r>
-              <a:rPr lang="en-US" dirty="0">
+            <a:pPr indent="0" marL="0">
+              <a:buNone/>
+            </a:pPr>
+            <a:r>
+              <a:rPr lang="en-US" sz="1500" dirty="0">
                 <a:solidFill>
                   <a:srgbClr val="5A5F73"/>
                 </a:solidFill>
@@ -12015,7 +11906,7 @@
               </a:rPr>
               <a:t>= 시가총액 ÷ 순이익</a:t>
             </a:r>
-            <a:endParaRPr lang="en-US" dirty="0"/>
+            <a:endParaRPr lang="en-US" sz="1500" dirty="0"/>
           </a:p>
         </p:txBody>
       </p:sp>
@@ -12045,13 +11936,6 @@
             <a:prstDash val="solid"/>
           </a:ln>
         </p:spPr>
-        <p:txBody>
-          <a:bodyPr/>
-          <a:lstStyle/>
-          <a:p>
-            <a:endParaRPr lang="ko-KR" altLang="en-US" sz="2400"/>
-          </a:p>
-        </p:txBody>
       </p:sp>
       <p:sp>
         <p:nvSpPr>
@@ -12074,11 +11958,11 @@
           <a:bodyPr wrap="square" rtlCol="0" anchor="ctr"/>
           <a:lstStyle/>
           <a:p>
-            <a:pPr marL="0" indent="0">
-              <a:buNone/>
-            </a:pPr>
-            <a:r>
-              <a:rPr lang="en-US" b="1" dirty="0">
+            <a:pPr indent="0" marL="0">
+              <a:buNone/>
+            </a:pPr>
+            <a:r>
+              <a:rPr lang="en-US" sz="1250" b="1" dirty="0">
                 <a:solidFill>
                   <a:srgbClr val="9C7A0A"/>
                 </a:solidFill>
@@ -12088,7 +11972,7 @@
               </a:rPr>
               <a:t>해석 포인트</a:t>
             </a:r>
-            <a:endParaRPr lang="en-US" dirty="0"/>
+            <a:endParaRPr lang="en-US" sz="1250" dirty="0"/>
           </a:p>
         </p:txBody>
       </p:sp>
@@ -12113,11 +11997,11 @@
           <a:bodyPr wrap="square" rtlCol="0" anchor="ctr"/>
           <a:lstStyle/>
           <a:p>
-            <a:pPr marL="0" indent="0">
-              <a:buNone/>
-            </a:pPr>
-            <a:r>
-              <a:rPr lang="en-US" dirty="0">
+            <a:pPr indent="0" marL="0">
+              <a:buNone/>
+            </a:pPr>
+            <a:r>
+              <a:rPr lang="en-US" sz="1400" dirty="0">
                 <a:solidFill>
                   <a:srgbClr val="222633"/>
                 </a:solidFill>
@@ -12127,7 +12011,7 @@
               </a:rPr>
               <a:t>PER 10배 = “현재 이익 수준이 유지된다면 투자원금 회수에 이론상 10년”</a:t>
             </a:r>
-            <a:endParaRPr lang="en-US" dirty="0"/>
+            <a:endParaRPr lang="en-US" sz="1400" dirty="0"/>
           </a:p>
         </p:txBody>
       </p:sp>
@@ -12139,7 +12023,7 @@
         </p:nvSpPr>
         <p:spPr>
           <a:xfrm>
-            <a:off x="396240" y="3246120"/>
+            <a:off x="548640" y="3246120"/>
             <a:ext cx="5212080" cy="365760"/>
           </a:xfrm>
           <a:prstGeom prst="rect">
@@ -12152,11 +12036,11 @@
           <a:bodyPr wrap="square" rtlCol="0" anchor="ctr"/>
           <a:lstStyle/>
           <a:p>
-            <a:pPr marL="0" indent="0">
-              <a:buNone/>
-            </a:pPr>
-            <a:r>
-              <a:rPr lang="en-US" b="1" dirty="0">
+            <a:pPr indent="0" marL="0">
+              <a:buNone/>
+            </a:pPr>
+            <a:r>
+              <a:rPr lang="en-US" sz="1700" b="1" dirty="0">
                 <a:solidFill>
                   <a:srgbClr val="1E2761"/>
                 </a:solidFill>
@@ -12166,7 +12050,7 @@
               </a:rPr>
               <a:t>업종별 정상 수준이 다름</a:t>
             </a:r>
-            <a:endParaRPr lang="en-US" dirty="0"/>
+            <a:endParaRPr lang="en-US" sz="1700" dirty="0"/>
           </a:p>
         </p:txBody>
       </p:sp>
@@ -12178,24 +12062,24 @@
         </p:nvSpPr>
         <p:spPr>
           <a:xfrm>
-            <a:off x="396240" y="3690114"/>
-            <a:ext cx="5852160" cy="420624"/>
-          </a:xfrm>
-          <a:prstGeom prst="rect">
-            <a:avLst/>
-          </a:prstGeom>
-          <a:noFill/>
-          <a:ln/>
-        </p:spPr>
-        <p:txBody>
-          <a:bodyPr wrap="square" rtlCol="0" anchor="ctr"/>
-          <a:lstStyle/>
-          <a:p>
-            <a:pPr marL="0" indent="0">
-              <a:buNone/>
-            </a:pPr>
-            <a:r>
-              <a:rPr lang="en-US" dirty="0">
+            <a:off x="548640" y="3639312"/>
+            <a:ext cx="5486400" cy="420624"/>
+          </a:xfrm>
+          <a:prstGeom prst="rect">
+            <a:avLst/>
+          </a:prstGeom>
+          <a:noFill/>
+          <a:ln/>
+        </p:spPr>
+        <p:txBody>
+          <a:bodyPr wrap="square" rtlCol="0" anchor="ctr"/>
+          <a:lstStyle/>
+          <a:p>
+            <a:pPr indent="0" marL="0">
+              <a:buNone/>
+            </a:pPr>
+            <a:r>
+              <a:rPr lang="en-US" sz="1450" dirty="0">
                 <a:solidFill>
                   <a:srgbClr val="222633"/>
                 </a:solidFill>
@@ -12205,7 +12089,7 @@
               </a:rPr>
               <a:t>•  성장주(IT·바이오): 높은 PER이 정당화되는 경우가 많음</a:t>
             </a:r>
-            <a:endParaRPr lang="en-US" dirty="0"/>
+            <a:endParaRPr lang="en-US" sz="1450" dirty="0"/>
           </a:p>
         </p:txBody>
       </p:sp>
@@ -12217,24 +12101,24 @@
         </p:nvSpPr>
         <p:spPr>
           <a:xfrm>
-            <a:off x="396240" y="4129026"/>
-            <a:ext cx="5852160" cy="420624"/>
-          </a:xfrm>
-          <a:prstGeom prst="rect">
-            <a:avLst/>
-          </a:prstGeom>
-          <a:noFill/>
-          <a:ln/>
-        </p:spPr>
-        <p:txBody>
-          <a:bodyPr wrap="square" rtlCol="0" anchor="ctr"/>
-          <a:lstStyle/>
-          <a:p>
-            <a:pPr marL="0" indent="0">
-              <a:buNone/>
-            </a:pPr>
-            <a:r>
-              <a:rPr lang="en-US" dirty="0">
+            <a:off x="548640" y="4078224"/>
+            <a:ext cx="5486400" cy="420624"/>
+          </a:xfrm>
+          <a:prstGeom prst="rect">
+            <a:avLst/>
+          </a:prstGeom>
+          <a:noFill/>
+          <a:ln/>
+        </p:spPr>
+        <p:txBody>
+          <a:bodyPr wrap="square" rtlCol="0" anchor="ctr"/>
+          <a:lstStyle/>
+          <a:p>
+            <a:pPr indent="0" marL="0">
+              <a:buNone/>
+            </a:pPr>
+            <a:r>
+              <a:rPr lang="en-US" sz="1450" dirty="0">
                 <a:solidFill>
                   <a:srgbClr val="222633"/>
                 </a:solidFill>
@@ -12244,7 +12128,7 @@
               </a:rPr>
               <a:t>•  성숙 산업(전통 제조업·유틸리티): 낮은 PER이 일반적</a:t>
             </a:r>
-            <a:endParaRPr lang="en-US" dirty="0"/>
+            <a:endParaRPr lang="en-US" sz="1450" dirty="0"/>
           </a:p>
         </p:txBody>
       </p:sp>
@@ -12256,24 +12140,24 @@
         </p:nvSpPr>
         <p:spPr>
           <a:xfrm>
-            <a:off x="396240" y="4669542"/>
-            <a:ext cx="5852160" cy="420624"/>
-          </a:xfrm>
-          <a:prstGeom prst="rect">
-            <a:avLst/>
-          </a:prstGeom>
-          <a:noFill/>
-          <a:ln/>
-        </p:spPr>
-        <p:txBody>
-          <a:bodyPr wrap="square" rtlCol="0" anchor="ctr"/>
-          <a:lstStyle/>
-          <a:p>
-            <a:pPr marL="0" indent="0">
-              <a:buNone/>
-            </a:pPr>
-            <a:r>
-              <a:rPr lang="en-US" dirty="0">
+            <a:off x="548640" y="4517136"/>
+            <a:ext cx="5486400" cy="420624"/>
+          </a:xfrm>
+          <a:prstGeom prst="rect">
+            <a:avLst/>
+          </a:prstGeom>
+          <a:noFill/>
+          <a:ln/>
+        </p:spPr>
+        <p:txBody>
+          <a:bodyPr wrap="square" rtlCol="0" anchor="ctr"/>
+          <a:lstStyle/>
+          <a:p>
+            <a:pPr indent="0" marL="0">
+              <a:buNone/>
+            </a:pPr>
+            <a:r>
+              <a:rPr lang="en-US" sz="1450" dirty="0">
                 <a:solidFill>
                   <a:srgbClr val="222633"/>
                 </a:solidFill>
@@ -12281,69 +12165,9 @@
                 <a:ea typeface="Calibri" pitchFamily="34" charset="-122"/>
                 <a:cs typeface="Calibri" pitchFamily="34" charset="-120"/>
               </a:rPr>
-              <a:t>•  1/PER = 이익수익률(Earnings Yield) → 채권 </a:t>
-            </a:r>
-            <a:r>
-              <a:rPr lang="en-US" dirty="0" err="1">
-                <a:solidFill>
-                  <a:srgbClr val="222633"/>
-                </a:solidFill>
-                <a:latin typeface="Calibri" pitchFamily="34" charset="0"/>
-                <a:ea typeface="Calibri" pitchFamily="34" charset="-122"/>
-                <a:cs typeface="Calibri" pitchFamily="34" charset="-120"/>
-              </a:rPr>
-              <a:t>금리와</a:t>
-            </a:r>
-            <a:r>
-              <a:rPr lang="en-US" dirty="0">
-                <a:solidFill>
-                  <a:srgbClr val="222633"/>
-                </a:solidFill>
-                <a:latin typeface="Calibri" pitchFamily="34" charset="0"/>
-                <a:ea typeface="Calibri" pitchFamily="34" charset="-122"/>
-                <a:cs typeface="Calibri" pitchFamily="34" charset="-120"/>
-              </a:rPr>
-              <a:t> </a:t>
-            </a:r>
-          </a:p>
-          <a:p>
-            <a:pPr marL="0" indent="0">
-              <a:buNone/>
-            </a:pPr>
-            <a:r>
-              <a:rPr lang="en-US" dirty="0">
-                <a:solidFill>
-                  <a:srgbClr val="222633"/>
-                </a:solidFill>
-                <a:latin typeface="Calibri" pitchFamily="34" charset="0"/>
-                <a:ea typeface="Calibri" pitchFamily="34" charset="-122"/>
-                <a:cs typeface="Calibri" pitchFamily="34" charset="-120"/>
-              </a:rPr>
-              <a:t>                   </a:t>
-            </a:r>
-            <a:r>
-              <a:rPr lang="en-US" dirty="0" err="1">
-                <a:solidFill>
-                  <a:srgbClr val="222633"/>
-                </a:solidFill>
-                <a:latin typeface="Calibri" pitchFamily="34" charset="0"/>
-                <a:ea typeface="Calibri" pitchFamily="34" charset="-122"/>
-                <a:cs typeface="Calibri" pitchFamily="34" charset="-120"/>
-              </a:rPr>
-              <a:t>비교</a:t>
-            </a:r>
-            <a:r>
-              <a:rPr lang="en-US" dirty="0">
-                <a:solidFill>
-                  <a:srgbClr val="222633"/>
-                </a:solidFill>
-                <a:latin typeface="Calibri" pitchFamily="34" charset="0"/>
-                <a:ea typeface="Calibri" pitchFamily="34" charset="-122"/>
-                <a:cs typeface="Calibri" pitchFamily="34" charset="-120"/>
-              </a:rPr>
-              <a:t> 활용</a:t>
-            </a:r>
-            <a:endParaRPr lang="en-US" dirty="0"/>
+              <a:t>•  1/PER = 이익수익률(Earnings Yield) → 채권 금리와 비교 활용</a:t>
+            </a:r>
+            <a:endParaRPr lang="en-US" sz="1450" dirty="0"/>
           </a:p>
         </p:txBody>
       </p:sp>
@@ -12368,11 +12192,11 @@
           <a:bodyPr wrap="square" rtlCol="0" anchor="ctr"/>
           <a:lstStyle/>
           <a:p>
-            <a:pPr marL="0" indent="0">
-              <a:buNone/>
-            </a:pPr>
-            <a:r>
-              <a:rPr lang="en-US" b="1" dirty="0">
+            <a:pPr indent="0" marL="0">
+              <a:buNone/>
+            </a:pPr>
+            <a:r>
+              <a:rPr lang="en-US" sz="1700" b="1" dirty="0">
                 <a:solidFill>
                   <a:srgbClr val="1E2761"/>
                 </a:solidFill>
@@ -12382,20 +12206,20 @@
               </a:rPr>
               <a:t>PEG로 성장성까지 반영한 비교 예시</a:t>
             </a:r>
-            <a:endParaRPr lang="en-US" dirty="0"/>
+            <a:endParaRPr lang="en-US" sz="1700" dirty="0"/>
           </a:p>
         </p:txBody>
       </p:sp>
       <p:graphicFrame>
         <p:nvGraphicFramePr>
-          <p:cNvPr id="16" name="Table 0"/>
+          <p:cNvPr id="6" name="Table 0"/>
           <p:cNvGraphicFramePr>
             <a:graphicFrameLocks noGrp="1"/>
           </p:cNvGraphicFramePr>
           <p:nvPr>
             <p:extLst>
               <p:ext uri="{D42A27DB-BD31-4B8C-83A1-F6EECF244321}">
-                <p14:modId xmlns:p14="http://schemas.microsoft.com/office/powerpoint/2010/main" val="2671541928"/>
+                <p14:modId xmlns:p14="http://schemas.microsoft.com/office/powerpoint/2010/main" val="1579011935"/>
               </p:ext>
             </p:extLst>
           </p:nvPr>
@@ -12409,27 +12233,9 @@
             <a:tbl>
               <a:tblPr/>
               <a:tblGrid>
-                <a:gridCol w="1767840">
-                  <a:extLst>
-                    <a:ext uri="{9D8B030D-6E8A-4147-A177-3AD203B41FA5}">
-                      <a16:colId xmlns:a16="http://schemas.microsoft.com/office/drawing/2014/main" val="20000"/>
-                    </a:ext>
-                  </a:extLst>
-                </a:gridCol>
-                <a:gridCol w="1767840">
-                  <a:extLst>
-                    <a:ext uri="{9D8B030D-6E8A-4147-A177-3AD203B41FA5}">
-                      <a16:colId xmlns:a16="http://schemas.microsoft.com/office/drawing/2014/main" val="20001"/>
-                    </a:ext>
-                  </a:extLst>
-                </a:gridCol>
-                <a:gridCol w="1767840">
-                  <a:extLst>
-                    <a:ext uri="{9D8B030D-6E8A-4147-A177-3AD203B41FA5}">
-                      <a16:colId xmlns:a16="http://schemas.microsoft.com/office/drawing/2014/main" val="20002"/>
-                    </a:ext>
-                  </a:extLst>
-                </a:gridCol>
+                <a:gridCol w="1767840"/>
+                <a:gridCol w="1767840"/>
+                <a:gridCol w="1767840"/>
               </a:tblGrid>
               <a:tr h="400050">
                 <a:tc>
@@ -12437,7 +12243,7 @@
                     <a:bodyPr/>
                     <a:lstStyle/>
                     <a:p>
-                      <a:pPr marL="0" indent="0">
+                      <a:pPr indent="0" marL="0">
                         <a:buNone/>
                       </a:pPr>
                       <a:r>
@@ -12458,7 +12264,7 @@
                       </a:endParaRPr>
                     </a:p>
                   </a:txBody>
-                  <a:tcPr anchor="ctr">
+                  <a:tcPr marL="91440" marR="91440" marT="45720" marB="45720" anchor="ctr">
                     <a:lnL w="9525" cap="flat" cmpd="sng" algn="ctr">
                       <a:solidFill>
                         <a:srgbClr val="C9D2E3"/>
@@ -12505,7 +12311,7 @@
                     <a:bodyPr/>
                     <a:lstStyle/>
                     <a:p>
-                      <a:pPr marL="0" indent="0">
+                      <a:pPr indent="0" marL="0">
                         <a:buNone/>
                       </a:pPr>
                       <a:r>
@@ -12526,7 +12332,7 @@
                       </a:endParaRPr>
                     </a:p>
                   </a:txBody>
-                  <a:tcPr anchor="ctr">
+                  <a:tcPr marL="91440" marR="91440" marT="45720" marB="45720" anchor="ctr">
                     <a:lnL w="9525" cap="flat" cmpd="sng" algn="ctr">
                       <a:solidFill>
                         <a:srgbClr val="C9D2E3"/>
@@ -12573,7 +12379,7 @@
                     <a:bodyPr/>
                     <a:lstStyle/>
                     <a:p>
-                      <a:pPr marL="0" indent="0">
+                      <a:pPr indent="0" marL="0">
                         <a:buNone/>
                       </a:pPr>
                       <a:r>
@@ -12594,7 +12400,7 @@
                       </a:endParaRPr>
                     </a:p>
                   </a:txBody>
-                  <a:tcPr anchor="ctr">
+                  <a:tcPr marL="91440" marR="91440" marT="45720" marB="45720" anchor="ctr">
                     <a:lnL w="9525" cap="flat" cmpd="sng" algn="ctr">
                       <a:solidFill>
                         <a:srgbClr val="C9D2E3"/>
@@ -12636,11 +12442,6 @@
                     </a:solidFill>
                   </a:tcPr>
                 </a:tc>
-                <a:extLst>
-                  <a:ext uri="{0D108BD9-81ED-4DB2-BD59-A6C34878D82A}">
-                    <a16:rowId xmlns:a16="http://schemas.microsoft.com/office/drawing/2014/main" val="10000"/>
-                  </a:ext>
-                </a:extLst>
               </a:tr>
               <a:tr h="400050">
                 <a:tc>
@@ -12648,11 +12449,11 @@
                     <a:bodyPr/>
                     <a:lstStyle/>
                     <a:p>
-                      <a:pPr marL="0" indent="0">
+                      <a:pPr indent="0" marL="0">
                         <a:buNone/>
                       </a:pPr>
                       <a:r>
-                        <a:rPr lang="en-US" sz="1600" dirty="0">
+                        <a:rPr lang="en-US" sz="1400" dirty="0">
                           <a:solidFill>
                             <a:srgbClr val="222633"/>
                           </a:solidFill>
@@ -12662,14 +12463,14 @@
                         </a:rPr>
                         <a:t>PER</a:t>
                       </a:r>
-                      <a:endParaRPr lang="en-US" sz="1600" dirty="0">
+                      <a:endParaRPr lang="en-US" sz="1400" dirty="0">
                         <a:latin typeface="Calibri" charset="0"/>
                         <a:ea typeface="Calibri" charset="0"/>
                         <a:cs typeface="Calibri" charset="0"/>
                       </a:endParaRPr>
                     </a:p>
                   </a:txBody>
-                  <a:tcPr anchor="ctr">
+                  <a:tcPr marL="91440" marR="91440" marT="45720" marB="45720" anchor="ctr">
                     <a:lnL w="9525" cap="flat" cmpd="sng" algn="ctr">
                       <a:solidFill>
                         <a:srgbClr val="C9D2E3"/>
@@ -12713,11 +12514,11 @@
                     <a:bodyPr/>
                     <a:lstStyle/>
                     <a:p>
-                      <a:pPr marL="0" indent="0">
+                      <a:pPr indent="0" marL="0">
                         <a:buNone/>
                       </a:pPr>
                       <a:r>
-                        <a:rPr lang="en-US" sz="1600" dirty="0">
+                        <a:rPr lang="en-US" sz="1400" dirty="0">
                           <a:solidFill>
                             <a:srgbClr val="222633"/>
                           </a:solidFill>
@@ -12727,14 +12528,14 @@
                         </a:rPr>
                         <a:t>20배</a:t>
                       </a:r>
-                      <a:endParaRPr lang="en-US" sz="1600" dirty="0">
+                      <a:endParaRPr lang="en-US" sz="1400" dirty="0">
                         <a:latin typeface="Calibri" charset="0"/>
                         <a:ea typeface="Calibri" charset="0"/>
                         <a:cs typeface="Calibri" charset="0"/>
                       </a:endParaRPr>
                     </a:p>
                   </a:txBody>
-                  <a:tcPr anchor="ctr">
+                  <a:tcPr marL="91440" marR="91440" marT="45720" marB="45720" anchor="ctr">
                     <a:lnL w="9525" cap="flat" cmpd="sng" algn="ctr">
                       <a:solidFill>
                         <a:srgbClr val="C9D2E3"/>
@@ -12778,11 +12579,11 @@
                     <a:bodyPr/>
                     <a:lstStyle/>
                     <a:p>
-                      <a:pPr marL="0" indent="0">
+                      <a:pPr indent="0" marL="0">
                         <a:buNone/>
                       </a:pPr>
                       <a:r>
-                        <a:rPr lang="en-US" sz="1600" dirty="0">
+                        <a:rPr lang="en-US" sz="1400" dirty="0">
                           <a:solidFill>
                             <a:srgbClr val="222633"/>
                           </a:solidFill>
@@ -12792,14 +12593,14 @@
                         </a:rPr>
                         <a:t>12배</a:t>
                       </a:r>
-                      <a:endParaRPr lang="en-US" sz="1600" dirty="0">
+                      <a:endParaRPr lang="en-US" sz="1400" dirty="0">
                         <a:latin typeface="Calibri" charset="0"/>
                         <a:ea typeface="Calibri" charset="0"/>
                         <a:cs typeface="Calibri" charset="0"/>
                       </a:endParaRPr>
                     </a:p>
                   </a:txBody>
-                  <a:tcPr anchor="ctr">
+                  <a:tcPr marL="91440" marR="91440" marT="45720" marB="45720" anchor="ctr">
                     <a:lnL w="9525" cap="flat" cmpd="sng" algn="ctr">
                       <a:solidFill>
                         <a:srgbClr val="C9D2E3"/>
@@ -12838,11 +12639,6 @@
                     </a:lnB>
                   </a:tcPr>
                 </a:tc>
-                <a:extLst>
-                  <a:ext uri="{0D108BD9-81ED-4DB2-BD59-A6C34878D82A}">
-                    <a16:rowId xmlns:a16="http://schemas.microsoft.com/office/drawing/2014/main" val="10001"/>
-                  </a:ext>
-                </a:extLst>
               </a:tr>
               <a:tr h="400050">
                 <a:tc>
@@ -12850,11 +12646,11 @@
                     <a:bodyPr/>
                     <a:lstStyle/>
                     <a:p>
-                      <a:pPr marL="0" indent="0">
+                      <a:pPr indent="0" marL="0">
                         <a:buNone/>
                       </a:pPr>
                       <a:r>
-                        <a:rPr lang="en-US" sz="1600" dirty="0">
+                        <a:rPr lang="en-US" sz="1400" dirty="0">
                           <a:solidFill>
                             <a:srgbClr val="222633"/>
                           </a:solidFill>
@@ -12864,14 +12660,14 @@
                         </a:rPr>
                         <a:t>이익성장률</a:t>
                       </a:r>
-                      <a:endParaRPr lang="en-US" sz="1600" dirty="0">
+                      <a:endParaRPr lang="en-US" sz="1400" dirty="0">
                         <a:latin typeface="Calibri" charset="0"/>
                         <a:ea typeface="Calibri" charset="0"/>
                         <a:cs typeface="Calibri" charset="0"/>
                       </a:endParaRPr>
                     </a:p>
                   </a:txBody>
-                  <a:tcPr anchor="ctr">
+                  <a:tcPr marL="91440" marR="91440" marT="45720" marB="45720" anchor="ctr">
                     <a:lnL w="9525" cap="flat" cmpd="sng" algn="ctr">
                       <a:solidFill>
                         <a:srgbClr val="C9D2E3"/>
@@ -12915,11 +12711,11 @@
                     <a:bodyPr/>
                     <a:lstStyle/>
                     <a:p>
-                      <a:pPr marL="0" indent="0">
+                      <a:pPr indent="0" marL="0">
                         <a:buNone/>
                       </a:pPr>
                       <a:r>
-                        <a:rPr lang="en-US" sz="1600" dirty="0">
+                        <a:rPr lang="en-US" sz="1400" dirty="0">
                           <a:solidFill>
                             <a:srgbClr val="222633"/>
                           </a:solidFill>
@@ -12929,14 +12725,14 @@
                         </a:rPr>
                         <a:t>20%</a:t>
                       </a:r>
-                      <a:endParaRPr lang="en-US" sz="1600" dirty="0">
+                      <a:endParaRPr lang="en-US" sz="1400" dirty="0">
                         <a:latin typeface="Calibri" charset="0"/>
                         <a:ea typeface="Calibri" charset="0"/>
                         <a:cs typeface="Calibri" charset="0"/>
                       </a:endParaRPr>
                     </a:p>
                   </a:txBody>
-                  <a:tcPr anchor="ctr">
+                  <a:tcPr marL="91440" marR="91440" marT="45720" marB="45720" anchor="ctr">
                     <a:lnL w="9525" cap="flat" cmpd="sng" algn="ctr">
                       <a:solidFill>
                         <a:srgbClr val="C9D2E3"/>
@@ -12980,11 +12776,11 @@
                     <a:bodyPr/>
                     <a:lstStyle/>
                     <a:p>
-                      <a:pPr marL="0" indent="0">
+                      <a:pPr indent="0" marL="0">
                         <a:buNone/>
                       </a:pPr>
                       <a:r>
-                        <a:rPr lang="en-US" sz="1600" dirty="0">
+                        <a:rPr lang="en-US" sz="1400" dirty="0">
                           <a:solidFill>
                             <a:srgbClr val="222633"/>
                           </a:solidFill>
@@ -12994,14 +12790,14 @@
                         </a:rPr>
                         <a:t>5%</a:t>
                       </a:r>
-                      <a:endParaRPr lang="en-US" sz="1600" dirty="0">
+                      <a:endParaRPr lang="en-US" sz="1400" dirty="0">
                         <a:latin typeface="Calibri" charset="0"/>
                         <a:ea typeface="Calibri" charset="0"/>
                         <a:cs typeface="Calibri" charset="0"/>
                       </a:endParaRPr>
                     </a:p>
                   </a:txBody>
-                  <a:tcPr anchor="ctr">
+                  <a:tcPr marL="91440" marR="91440" marT="45720" marB="45720" anchor="ctr">
                     <a:lnL w="9525" cap="flat" cmpd="sng" algn="ctr">
                       <a:solidFill>
                         <a:srgbClr val="C9D2E3"/>
@@ -13040,11 +12836,6 @@
                     </a:lnB>
                   </a:tcPr>
                 </a:tc>
-                <a:extLst>
-                  <a:ext uri="{0D108BD9-81ED-4DB2-BD59-A6C34878D82A}">
-                    <a16:rowId xmlns:a16="http://schemas.microsoft.com/office/drawing/2014/main" val="10002"/>
-                  </a:ext>
-                </a:extLst>
               </a:tr>
               <a:tr h="400050">
                 <a:tc>
@@ -13052,11 +12843,11 @@
                     <a:bodyPr/>
                     <a:lstStyle/>
                     <a:p>
-                      <a:pPr marL="0" indent="0">
+                      <a:pPr indent="0" marL="0">
                         <a:buNone/>
                       </a:pPr>
                       <a:r>
-                        <a:rPr lang="en-US" sz="1600" b="1" dirty="0">
+                        <a:rPr lang="en-US" sz="1400" b="1" dirty="0">
                           <a:solidFill>
                             <a:srgbClr val="222633"/>
                           </a:solidFill>
@@ -13066,14 +12857,14 @@
                         </a:rPr>
                         <a:t>PEG</a:t>
                       </a:r>
-                      <a:endParaRPr lang="en-US" sz="1600" dirty="0">
+                      <a:endParaRPr lang="en-US" sz="1400" dirty="0">
                         <a:latin typeface="Calibri" charset="0"/>
                         <a:ea typeface="Calibri" charset="0"/>
                         <a:cs typeface="Calibri" charset="0"/>
                       </a:endParaRPr>
                     </a:p>
                   </a:txBody>
-                  <a:tcPr anchor="ctr">
+                  <a:tcPr marL="91440" marR="91440" marT="45720" marB="45720" anchor="ctr">
                     <a:lnL w="9525" cap="flat" cmpd="sng" algn="ctr">
                       <a:solidFill>
                         <a:srgbClr val="C9D2E3"/>
@@ -13117,11 +12908,11 @@
                     <a:bodyPr/>
                     <a:lstStyle/>
                     <a:p>
-                      <a:pPr marL="0" indent="0">
+                      <a:pPr indent="0" marL="0">
                         <a:buNone/>
                       </a:pPr>
                       <a:r>
-                        <a:rPr lang="en-US" sz="1600" b="1" dirty="0">
+                        <a:rPr lang="en-US" sz="1400" b="1" dirty="0">
                           <a:solidFill>
                             <a:srgbClr val="1E2761"/>
                           </a:solidFill>
@@ -13131,14 +12922,14 @@
                         </a:rPr>
                         <a:t>1.0</a:t>
                       </a:r>
-                      <a:endParaRPr lang="en-US" sz="1600" dirty="0">
+                      <a:endParaRPr lang="en-US" sz="1400" dirty="0">
                         <a:latin typeface="Calibri" charset="0"/>
                         <a:ea typeface="Calibri" charset="0"/>
                         <a:cs typeface="Calibri" charset="0"/>
                       </a:endParaRPr>
                     </a:p>
                   </a:txBody>
-                  <a:tcPr anchor="ctr">
+                  <a:tcPr marL="91440" marR="91440" marT="45720" marB="45720" anchor="ctr">
                     <a:lnL w="9525" cap="flat" cmpd="sng" algn="ctr">
                       <a:solidFill>
                         <a:srgbClr val="C9D2E3"/>
@@ -13182,11 +12973,11 @@
                     <a:bodyPr/>
                     <a:lstStyle/>
                     <a:p>
-                      <a:pPr marL="0" indent="0">
+                      <a:pPr indent="0" marL="0">
                         <a:buNone/>
                       </a:pPr>
                       <a:r>
-                        <a:rPr lang="en-US" sz="1600" b="1" dirty="0">
+                        <a:rPr lang="en-US" sz="1400" b="1" dirty="0">
                           <a:solidFill>
                             <a:srgbClr val="222633"/>
                           </a:solidFill>
@@ -13196,14 +12987,14 @@
                         </a:rPr>
                         <a:t>2.4</a:t>
                       </a:r>
-                      <a:endParaRPr lang="en-US" sz="1600" dirty="0">
+                      <a:endParaRPr lang="en-US" sz="1400" dirty="0">
                         <a:latin typeface="Calibri" charset="0"/>
                         <a:ea typeface="Calibri" charset="0"/>
                         <a:cs typeface="Calibri" charset="0"/>
                       </a:endParaRPr>
                     </a:p>
                   </a:txBody>
-                  <a:tcPr anchor="ctr">
+                  <a:tcPr marL="91440" marR="91440" marT="45720" marB="45720" anchor="ctr">
                     <a:lnL w="9525" cap="flat" cmpd="sng" algn="ctr">
                       <a:solidFill>
                         <a:srgbClr val="C9D2E3"/>
@@ -13242,11 +13033,6 @@
                     </a:lnB>
                   </a:tcPr>
                 </a:tc>
-                <a:extLst>
-                  <a:ext uri="{0D108BD9-81ED-4DB2-BD59-A6C34878D82A}">
-                    <a16:rowId xmlns:a16="http://schemas.microsoft.com/office/drawing/2014/main" val="10003"/>
-                  </a:ext>
-                </a:extLst>
               </a:tr>
             </a:tbl>
           </a:graphicData>
@@ -13273,11 +13059,11 @@
           <a:bodyPr wrap="square" rtlCol="0" anchor="ctr"/>
           <a:lstStyle/>
           <a:p>
-            <a:pPr marL="0" indent="0">
-              <a:buNone/>
-            </a:pPr>
-            <a:r>
-              <a:rPr lang="en-US" i="1" dirty="0">
+            <a:pPr indent="0" marL="0">
+              <a:buNone/>
+            </a:pPr>
+            <a:r>
+              <a:rPr lang="en-US" sz="1450" i="1" dirty="0">
                 <a:solidFill>
                   <a:srgbClr val="5A5F73"/>
                 </a:solidFill>
@@ -13287,7 +13073,7 @@
               </a:rPr>
               <a:t>→ 단순 PER은 A기업이 더 비싸 보이지만, 성장률까지 반영하면 오히려 A기업이 저평가</a:t>
             </a:r>
-            <a:endParaRPr lang="en-US" dirty="0"/>
+            <a:endParaRPr lang="en-US" sz="1450" dirty="0"/>
           </a:p>
         </p:txBody>
       </p:sp>
@@ -13312,7 +13098,7 @@
           <a:bodyPr wrap="square" rtlCol="0" anchor="ctr"/>
           <a:lstStyle/>
           <a:p>
-            <a:pPr marL="0" indent="0" algn="r">
+            <a:pPr algn="r" indent="0" marL="0">
               <a:buNone/>
             </a:pPr>
             <a:r>
@@ -13346,7 +13132,6 @@
         <a:solidFill>
           <a:srgbClr val="FFFFFF"/>
         </a:solidFill>
-        <a:effectLst/>
       </p:bgPr>
     </p:bg>
     <p:spTree>
@@ -13384,11 +13169,11 @@
           <a:bodyPr wrap="square" rtlCol="0" anchor="ctr"/>
           <a:lstStyle/>
           <a:p>
-            <a:pPr marL="0" indent="0">
-              <a:buNone/>
-            </a:pPr>
-            <a:r>
-              <a:rPr lang="en-US" sz="1300" b="1" kern="0" spc="200" dirty="0">
+            <a:pPr indent="0" marL="0">
+              <a:buNone/>
+            </a:pPr>
+            <a:r>
+              <a:rPr lang="en-US" sz="1300" b="1" spc="200" kern="0" dirty="0">
                 <a:solidFill>
                   <a:srgbClr val="9C7A0A"/>
                 </a:solidFill>
@@ -13423,7 +13208,7 @@
           <a:bodyPr wrap="square" rtlCol="0" anchor="ctr"/>
           <a:lstStyle/>
           <a:p>
-            <a:pPr marL="0" indent="0" algn="l">
+            <a:pPr algn="l" indent="0" marL="0">
               <a:buNone/>
             </a:pPr>
             <a:r>
@@ -13462,11 +13247,11 @@
           <a:bodyPr wrap="square" rtlCol="0" anchor="ctr"/>
           <a:lstStyle/>
           <a:p>
-            <a:pPr marL="0" indent="0">
-              <a:buNone/>
-            </a:pPr>
-            <a:r>
-              <a:rPr lang="en-US" dirty="0">
+            <a:pPr indent="0" marL="0">
+              <a:buNone/>
+            </a:pPr>
+            <a:r>
+              <a:rPr lang="en-US" sz="1500" dirty="0">
                 <a:solidFill>
                   <a:srgbClr val="5A5F73"/>
                 </a:solidFill>
@@ -13476,7 +13261,7 @@
               </a:rPr>
               <a:t>EV는 주주 몫(시가총액)뿐 아니라 채권자 몫(부채)까지 포함한, “기업 전체를 인수하는 데 드는 실질 비용”</a:t>
             </a:r>
-            <a:endParaRPr lang="en-US" dirty="0"/>
+            <a:endParaRPr lang="en-US" sz="1500" dirty="0"/>
           </a:p>
         </p:txBody>
       </p:sp>
@@ -13506,13 +13291,6 @@
             <a:prstDash val="solid"/>
           </a:ln>
         </p:spPr>
-        <p:txBody>
-          <a:bodyPr/>
-          <a:lstStyle/>
-          <a:p>
-            <a:endParaRPr lang="ko-KR" altLang="en-US" sz="2800"/>
-          </a:p>
-        </p:txBody>
       </p:sp>
       <p:sp>
         <p:nvSpPr>
@@ -13535,11 +13313,11 @@
           <a:bodyPr wrap="square" rtlCol="0" anchor="ctr"/>
           <a:lstStyle/>
           <a:p>
-            <a:pPr marL="0" indent="0" algn="ctr">
-              <a:buNone/>
-            </a:pPr>
-            <a:r>
-              <a:rPr lang="en-US" sz="2400" b="1" dirty="0">
+            <a:pPr algn="ctr" indent="0" marL="0">
+              <a:buNone/>
+            </a:pPr>
+            <a:r>
+              <a:rPr lang="en-US" sz="1700" b="1" dirty="0">
                 <a:solidFill>
                   <a:srgbClr val="1E2761"/>
                 </a:solidFill>
@@ -13549,7 +13327,7 @@
               </a:rPr>
               <a:t>시가총액</a:t>
             </a:r>
-            <a:endParaRPr lang="en-US" sz="2400" dirty="0"/>
+            <a:endParaRPr lang="en-US" sz="1700" dirty="0"/>
           </a:p>
         </p:txBody>
       </p:sp>
@@ -13574,11 +13352,11 @@
           <a:bodyPr wrap="square" rtlCol="0" anchor="ctr"/>
           <a:lstStyle/>
           <a:p>
-            <a:pPr marL="0" indent="0" algn="ctr">
-              <a:buNone/>
-            </a:pPr>
-            <a:r>
-              <a:rPr lang="en-US" dirty="0">
+            <a:pPr algn="ctr" indent="0" marL="0">
+              <a:buNone/>
+            </a:pPr>
+            <a:r>
+              <a:rPr lang="en-US" sz="1250" dirty="0">
                 <a:solidFill>
                   <a:srgbClr val="5A5F73"/>
                 </a:solidFill>
@@ -13588,7 +13366,7 @@
               </a:rPr>
               <a:t>Market Cap</a:t>
             </a:r>
-            <a:endParaRPr lang="en-US" dirty="0"/>
+            <a:endParaRPr lang="en-US" sz="1250" dirty="0"/>
           </a:p>
         </p:txBody>
       </p:sp>
@@ -13613,11 +13391,11 @@
           <a:bodyPr wrap="square" rtlCol="0" anchor="ctr"/>
           <a:lstStyle/>
           <a:p>
-            <a:pPr marL="0" indent="0" algn="ctr">
-              <a:buNone/>
-            </a:pPr>
-            <a:r>
-              <a:rPr lang="en-US" sz="3600" b="1" dirty="0">
+            <a:pPr algn="ctr" indent="0" marL="0">
+              <a:buNone/>
+            </a:pPr>
+            <a:r>
+              <a:rPr lang="en-US" sz="2600" b="1" dirty="0">
                 <a:solidFill>
                   <a:srgbClr val="5A5F73"/>
                 </a:solidFill>
@@ -13627,7 +13405,7 @@
               </a:rPr>
               <a:t>+</a:t>
             </a:r>
-            <a:endParaRPr lang="en-US" sz="3600" dirty="0"/>
+            <a:endParaRPr lang="en-US" sz="2600" dirty="0"/>
           </a:p>
         </p:txBody>
       </p:sp>
@@ -13657,13 +13435,6 @@
             <a:prstDash val="solid"/>
           </a:ln>
         </p:spPr>
-        <p:txBody>
-          <a:bodyPr/>
-          <a:lstStyle/>
-          <a:p>
-            <a:endParaRPr lang="ko-KR" altLang="en-US" sz="2800"/>
-          </a:p>
-        </p:txBody>
       </p:sp>
       <p:sp>
         <p:nvSpPr>
@@ -13686,11 +13457,11 @@
           <a:bodyPr wrap="square" rtlCol="0" anchor="ctr"/>
           <a:lstStyle/>
           <a:p>
-            <a:pPr marL="0" indent="0" algn="ctr">
-              <a:buNone/>
-            </a:pPr>
-            <a:r>
-              <a:rPr lang="en-US" sz="2400" b="1" dirty="0">
+            <a:pPr algn="ctr" indent="0" marL="0">
+              <a:buNone/>
+            </a:pPr>
+            <a:r>
+              <a:rPr lang="en-US" sz="1700" b="1" dirty="0">
                 <a:solidFill>
                   <a:srgbClr val="222633"/>
                 </a:solidFill>
@@ -13700,7 +13471,7 @@
               </a:rPr>
               <a:t>총차입금</a:t>
             </a:r>
-            <a:endParaRPr lang="en-US" sz="2400" dirty="0"/>
+            <a:endParaRPr lang="en-US" sz="1700" dirty="0"/>
           </a:p>
         </p:txBody>
       </p:sp>
@@ -13725,11 +13496,11 @@
           <a:bodyPr wrap="square" rtlCol="0" anchor="ctr"/>
           <a:lstStyle/>
           <a:p>
-            <a:pPr marL="0" indent="0" algn="ctr">
-              <a:buNone/>
-            </a:pPr>
-            <a:r>
-              <a:rPr lang="en-US" dirty="0">
+            <a:pPr algn="ctr" indent="0" marL="0">
+              <a:buNone/>
+            </a:pPr>
+            <a:r>
+              <a:rPr lang="en-US" sz="1250" dirty="0">
                 <a:solidFill>
                   <a:srgbClr val="5A5F73"/>
                 </a:solidFill>
@@ -13739,7 +13510,7 @@
               </a:rPr>
               <a:t>Debt</a:t>
             </a:r>
-            <a:endParaRPr lang="en-US" dirty="0"/>
+            <a:endParaRPr lang="en-US" sz="1250" dirty="0"/>
           </a:p>
         </p:txBody>
       </p:sp>
@@ -13764,11 +13535,11 @@
           <a:bodyPr wrap="square" rtlCol="0" anchor="ctr"/>
           <a:lstStyle/>
           <a:p>
-            <a:pPr marL="0" indent="0" algn="ctr">
-              <a:buNone/>
-            </a:pPr>
-            <a:r>
-              <a:rPr lang="en-US" sz="3600" b="1" dirty="0">
+            <a:pPr algn="ctr" indent="0" marL="0">
+              <a:buNone/>
+            </a:pPr>
+            <a:r>
+              <a:rPr lang="en-US" sz="2600" b="1" dirty="0">
                 <a:solidFill>
                   <a:srgbClr val="5A5F73"/>
                 </a:solidFill>
@@ -13778,7 +13549,7 @@
               </a:rPr>
               <a:t>−</a:t>
             </a:r>
-            <a:endParaRPr lang="en-US" sz="3600" dirty="0"/>
+            <a:endParaRPr lang="en-US" sz="2600" dirty="0"/>
           </a:p>
         </p:txBody>
       </p:sp>
@@ -13808,13 +13579,6 @@
             <a:prstDash val="solid"/>
           </a:ln>
         </p:spPr>
-        <p:txBody>
-          <a:bodyPr/>
-          <a:lstStyle/>
-          <a:p>
-            <a:endParaRPr lang="ko-KR" altLang="en-US" sz="2800"/>
-          </a:p>
-        </p:txBody>
       </p:sp>
       <p:sp>
         <p:nvSpPr>
@@ -13837,11 +13601,11 @@
           <a:bodyPr wrap="square" rtlCol="0" anchor="ctr"/>
           <a:lstStyle/>
           <a:p>
-            <a:pPr marL="0" indent="0" algn="ctr">
-              <a:buNone/>
-            </a:pPr>
-            <a:r>
-              <a:rPr lang="en-US" sz="2400" b="1" dirty="0">
+            <a:pPr algn="ctr" indent="0" marL="0">
+              <a:buNone/>
+            </a:pPr>
+            <a:r>
+              <a:rPr lang="en-US" sz="1700" b="1" dirty="0">
                 <a:solidFill>
                   <a:srgbClr val="1E2761"/>
                 </a:solidFill>
@@ -13851,7 +13615,7 @@
               </a:rPr>
               <a:t>현금성자산</a:t>
             </a:r>
-            <a:endParaRPr lang="en-US" sz="2400" dirty="0"/>
+            <a:endParaRPr lang="en-US" sz="1700" dirty="0"/>
           </a:p>
         </p:txBody>
       </p:sp>
@@ -13876,11 +13640,11 @@
           <a:bodyPr wrap="square" rtlCol="0" anchor="ctr"/>
           <a:lstStyle/>
           <a:p>
-            <a:pPr marL="0" indent="0" algn="ctr">
-              <a:buNone/>
-            </a:pPr>
-            <a:r>
-              <a:rPr lang="en-US" dirty="0">
+            <a:pPr algn="ctr" indent="0" marL="0">
+              <a:buNone/>
+            </a:pPr>
+            <a:r>
+              <a:rPr lang="en-US" sz="1250" dirty="0">
                 <a:solidFill>
                   <a:srgbClr val="5A5F73"/>
                 </a:solidFill>
@@ -13890,7 +13654,7 @@
               </a:rPr>
               <a:t>Cash</a:t>
             </a:r>
-            <a:endParaRPr lang="en-US" dirty="0"/>
+            <a:endParaRPr lang="en-US" sz="1250" dirty="0"/>
           </a:p>
         </p:txBody>
       </p:sp>
@@ -13902,7 +13666,7 @@
         </p:nvSpPr>
         <p:spPr>
           <a:xfrm>
-            <a:off x="2514600" y="3974255"/>
+            <a:off x="4572000" y="3310128"/>
             <a:ext cx="3017520" cy="365760"/>
           </a:xfrm>
           <a:prstGeom prst="rect">
@@ -13915,11 +13679,11 @@
           <a:bodyPr wrap="square" rtlCol="0" anchor="ctr"/>
           <a:lstStyle/>
           <a:p>
-            <a:pPr marL="0" indent="0" algn="ctr">
-              <a:buNone/>
-            </a:pPr>
-            <a:r>
-              <a:rPr lang="en-US" sz="2800" b="1" dirty="0">
+            <a:pPr algn="ctr" indent="0" marL="0">
+              <a:buNone/>
+            </a:pPr>
+            <a:r>
+              <a:rPr lang="en-US" sz="2200" b="1" dirty="0">
                 <a:solidFill>
                   <a:srgbClr val="5A5F73"/>
                 </a:solidFill>
@@ -13929,7 +13693,7 @@
               </a:rPr>
               <a:t>=</a:t>
             </a:r>
-            <a:endParaRPr lang="en-US" sz="2800" dirty="0"/>
+            <a:endParaRPr lang="en-US" sz="2200" dirty="0"/>
           </a:p>
         </p:txBody>
       </p:sp>
@@ -13941,7 +13705,7 @@
         </p:nvSpPr>
         <p:spPr>
           <a:xfrm>
-            <a:off x="4555070" y="3780198"/>
+            <a:off x="3657600" y="3712464"/>
             <a:ext cx="4846320" cy="777240"/>
           </a:xfrm>
           <a:prstGeom prst="roundRect">
@@ -13959,13 +13723,6 @@
             <a:prstDash val="solid"/>
           </a:ln>
         </p:spPr>
-        <p:txBody>
-          <a:bodyPr/>
-          <a:lstStyle/>
-          <a:p>
-            <a:endParaRPr lang="ko-KR" altLang="en-US" sz="2400"/>
-          </a:p>
-        </p:txBody>
       </p:sp>
       <p:sp>
         <p:nvSpPr>
@@ -13975,7 +13732,7 @@
         </p:nvSpPr>
         <p:spPr>
           <a:xfrm>
-            <a:off x="4555070" y="3780198"/>
+            <a:off x="3657600" y="3712464"/>
             <a:ext cx="4846320" cy="777240"/>
           </a:xfrm>
           <a:prstGeom prst="rect">
@@ -13988,11 +13745,11 @@
           <a:bodyPr wrap="square" rtlCol="0" anchor="ctr"/>
           <a:lstStyle/>
           <a:p>
-            <a:pPr marL="0" indent="0" algn="ctr">
-              <a:buNone/>
-            </a:pPr>
-            <a:r>
-              <a:rPr lang="en-US" sz="2800" b="1" dirty="0">
+            <a:pPr algn="ctr" indent="0" marL="0">
+              <a:buNone/>
+            </a:pPr>
+            <a:r>
+              <a:rPr lang="en-US" sz="2100" b="1" dirty="0">
                 <a:solidFill>
                   <a:srgbClr val="9C7A0A"/>
                 </a:solidFill>
@@ -14002,7 +13759,7 @@
               </a:rPr>
               <a:t>EV (기업가치)</a:t>
             </a:r>
-            <a:endParaRPr lang="en-US" sz="2800" dirty="0"/>
+            <a:endParaRPr lang="en-US" sz="2100" dirty="0"/>
           </a:p>
         </p:txBody>
       </p:sp>
@@ -14027,11 +13784,11 @@
           <a:bodyPr wrap="square" rtlCol="0" anchor="ctr"/>
           <a:lstStyle/>
           <a:p>
-            <a:pPr marL="0" indent="0">
-              <a:buNone/>
-            </a:pPr>
-            <a:r>
-              <a:rPr lang="en-US" b="1" dirty="0">
+            <a:pPr indent="0" marL="0">
+              <a:buNone/>
+            </a:pPr>
+            <a:r>
+              <a:rPr lang="en-US" sz="1700" b="1" dirty="0">
                 <a:solidFill>
                   <a:srgbClr val="1E2761"/>
                 </a:solidFill>
@@ -14041,7 +13798,7 @@
               </a:rPr>
               <a:t>EV를 쓰는 이유</a:t>
             </a:r>
-            <a:endParaRPr lang="en-US" dirty="0"/>
+            <a:endParaRPr lang="en-US" sz="1700" dirty="0"/>
           </a:p>
         </p:txBody>
       </p:sp>
@@ -14066,11 +13823,11 @@
           <a:bodyPr wrap="square" rtlCol="0" anchor="ctr"/>
           <a:lstStyle/>
           <a:p>
-            <a:pPr marL="0" indent="0">
-              <a:buNone/>
-            </a:pPr>
-            <a:r>
-              <a:rPr lang="en-US" dirty="0">
+            <a:pPr indent="0" marL="0">
+              <a:buNone/>
+            </a:pPr>
+            <a:r>
+              <a:rPr lang="en-US" sz="1450" dirty="0">
                 <a:solidFill>
                   <a:srgbClr val="222633"/>
                 </a:solidFill>
@@ -14080,7 +13837,7 @@
               </a:rPr>
               <a:t>•  부채비율이 다른 기업들을 비교할 때, PER보다 EV/EBITDA가 더 공정한 비교 기준이 됨</a:t>
             </a:r>
-            <a:endParaRPr lang="en-US" dirty="0"/>
+            <a:endParaRPr lang="en-US" sz="1450" dirty="0"/>
           </a:p>
         </p:txBody>
       </p:sp>
@@ -14105,11 +13862,11 @@
           <a:bodyPr wrap="square" rtlCol="0" anchor="ctr"/>
           <a:lstStyle/>
           <a:p>
-            <a:pPr marL="0" indent="0">
-              <a:buNone/>
-            </a:pPr>
-            <a:r>
-              <a:rPr lang="en-US" dirty="0">
+            <a:pPr indent="0" marL="0">
+              <a:buNone/>
+            </a:pPr>
+            <a:r>
+              <a:rPr lang="en-US" sz="1450" dirty="0">
                 <a:solidFill>
                   <a:srgbClr val="222633"/>
                 </a:solidFill>
@@ -14119,7 +13876,7 @@
               </a:rPr>
               <a:t>•  시가총액이 같아도 부채 규모가 다르면 실질적인 기업 규모·위험도가 전혀 다름</a:t>
             </a:r>
-            <a:endParaRPr lang="en-US" dirty="0"/>
+            <a:endParaRPr lang="en-US" sz="1450" dirty="0"/>
           </a:p>
         </p:txBody>
       </p:sp>
@@ -14144,7 +13901,7 @@
           <a:bodyPr wrap="square" rtlCol="0" anchor="ctr"/>
           <a:lstStyle/>
           <a:p>
-            <a:pPr marL="0" indent="0" algn="r">
+            <a:pPr algn="r" indent="0" marL="0">
               <a:buNone/>
             </a:pPr>
             <a:r>
@@ -14178,7 +13935,6 @@
         <a:solidFill>
           <a:srgbClr val="FFFFFF"/>
         </a:solidFill>
-        <a:effectLst/>
       </p:bgPr>
     </p:bg>
     <p:spTree>
@@ -14216,11 +13972,11 @@
           <a:bodyPr wrap="square" rtlCol="0" anchor="ctr"/>
           <a:lstStyle/>
           <a:p>
-            <a:pPr marL="0" indent="0">
-              <a:buNone/>
-            </a:pPr>
-            <a:r>
-              <a:rPr lang="en-US" sz="1300" b="1" kern="0" spc="200" dirty="0">
+            <a:pPr indent="0" marL="0">
+              <a:buNone/>
+            </a:pPr>
+            <a:r>
+              <a:rPr lang="en-US" sz="1300" b="1" spc="200" kern="0" dirty="0">
                 <a:solidFill>
                   <a:srgbClr val="9C7A0A"/>
                 </a:solidFill>
@@ -14255,7 +14011,7 @@
           <a:bodyPr wrap="square" rtlCol="0" anchor="ctr"/>
           <a:lstStyle/>
           <a:p>
-            <a:pPr marL="0" indent="0" algn="l">
+            <a:pPr algn="l" indent="0" marL="0">
               <a:buNone/>
             </a:pPr>
             <a:r>
@@ -14299,13 +14055,6 @@
             <a:prstDash val="solid"/>
           </a:ln>
         </p:spPr>
-        <p:txBody>
-          <a:bodyPr/>
-          <a:lstStyle/>
-          <a:p>
-            <a:endParaRPr lang="ko-KR" altLang="en-US" sz="2400"/>
-          </a:p>
-        </p:txBody>
       </p:sp>
       <p:sp>
         <p:nvSpPr>
@@ -14328,11 +14077,11 @@
           <a:bodyPr wrap="square" rtlCol="0" anchor="ctr"/>
           <a:lstStyle/>
           <a:p>
-            <a:pPr marL="0" indent="0">
-              <a:buNone/>
-            </a:pPr>
-            <a:r>
-              <a:rPr lang="en-US" sz="4000" b="1" dirty="0">
+            <a:pPr indent="0" marL="0">
+              <a:buNone/>
+            </a:pPr>
+            <a:r>
+              <a:rPr lang="en-US" sz="3200" b="1" dirty="0">
                 <a:solidFill>
                   <a:srgbClr val="AFC3E6"/>
                 </a:solidFill>
@@ -14342,7 +14091,7 @@
               </a:rPr>
               <a:t>01</a:t>
             </a:r>
-            <a:endParaRPr lang="en-US" sz="4000" dirty="0"/>
+            <a:endParaRPr lang="en-US" sz="3200" dirty="0"/>
           </a:p>
         </p:txBody>
       </p:sp>
@@ -14367,11 +14116,11 @@
           <a:bodyPr wrap="square" rtlCol="0" anchor="ctr"/>
           <a:lstStyle/>
           <a:p>
-            <a:pPr marL="0" indent="0">
-              <a:buNone/>
-            </a:pPr>
-            <a:r>
-              <a:rPr lang="en-US" sz="2400" b="1" dirty="0">
+            <a:pPr indent="0" marL="0">
+              <a:buNone/>
+            </a:pPr>
+            <a:r>
+              <a:rPr lang="en-US" sz="1900" b="1" dirty="0">
                 <a:solidFill>
                   <a:srgbClr val="1E2761"/>
                 </a:solidFill>
@@ -14381,7 +14130,7 @@
               </a:rPr>
               <a:t>상대가치평가법</a:t>
             </a:r>
-            <a:endParaRPr lang="en-US" sz="2400" dirty="0"/>
+            <a:endParaRPr lang="en-US" sz="1900" dirty="0"/>
           </a:p>
         </p:txBody>
       </p:sp>
@@ -14406,11 +14155,11 @@
           <a:bodyPr wrap="square" rtlCol="0" anchor="ctr"/>
           <a:lstStyle/>
           <a:p>
-            <a:pPr marL="0" indent="0">
-              <a:buNone/>
-            </a:pPr>
-            <a:r>
-              <a:rPr lang="en-US" sz="1600" i="1" dirty="0">
+            <a:pPr indent="0" marL="0">
+              <a:buNone/>
+            </a:pPr>
+            <a:r>
+              <a:rPr lang="en-US" sz="1250" i="1" dirty="0">
                 <a:solidFill>
                   <a:srgbClr val="5A5F73"/>
                 </a:solidFill>
@@ -14420,7 +14169,7 @@
               </a:rPr>
               <a:t>Multiple-based</a:t>
             </a:r>
-            <a:endParaRPr lang="en-US" sz="1600" dirty="0"/>
+            <a:endParaRPr lang="en-US" sz="1250" dirty="0"/>
           </a:p>
         </p:txBody>
       </p:sp>
@@ -14443,13 +14192,6 @@
           </a:solidFill>
           <a:ln/>
         </p:spPr>
-        <p:txBody>
-          <a:bodyPr/>
-          <a:lstStyle/>
-          <a:p>
-            <a:endParaRPr lang="ko-KR" altLang="en-US" sz="2400"/>
-          </a:p>
-        </p:txBody>
       </p:sp>
       <p:sp>
         <p:nvSpPr>
@@ -14472,11 +14214,11 @@
           <a:bodyPr wrap="square" rtlCol="0" anchor="ctr"/>
           <a:lstStyle/>
           <a:p>
-            <a:pPr marL="0" indent="0">
-              <a:buNone/>
-            </a:pPr>
-            <a:r>
-              <a:rPr lang="en-US" b="1" dirty="0">
+            <a:pPr indent="0" marL="0">
+              <a:buNone/>
+            </a:pPr>
+            <a:r>
+              <a:rPr lang="en-US" sz="1500" b="1" dirty="0">
                 <a:solidFill>
                   <a:srgbClr val="222633"/>
                 </a:solidFill>
@@ -14486,7 +14228,7 @@
               </a:rPr>
               <a:t>적정주가 = 목표 멀티플 × 재무지표</a:t>
             </a:r>
-            <a:endParaRPr lang="en-US" dirty="0"/>
+            <a:endParaRPr lang="en-US" sz="1500" dirty="0"/>
           </a:p>
         </p:txBody>
       </p:sp>
@@ -14511,11 +14253,11 @@
           <a:bodyPr wrap="square" rtlCol="0" anchor="ctr"/>
           <a:lstStyle/>
           <a:p>
-            <a:pPr marL="0" indent="0">
-              <a:buNone/>
-            </a:pPr>
-            <a:r>
-              <a:rPr lang="en-US" sz="1600" dirty="0">
+            <a:pPr indent="0" marL="0">
+              <a:buNone/>
+            </a:pPr>
+            <a:r>
+              <a:rPr lang="en-US" sz="1250" dirty="0">
                 <a:solidFill>
                   <a:srgbClr val="5A5F73"/>
                 </a:solidFill>
@@ -14525,7 +14267,7 @@
               </a:rPr>
               <a:t>예: PER 15배 × EPS 5,000원 = 75,000원</a:t>
             </a:r>
-            <a:endParaRPr lang="en-US" sz="1600" dirty="0"/>
+            <a:endParaRPr lang="en-US" sz="1250" dirty="0"/>
           </a:p>
         </p:txBody>
       </p:sp>
@@ -14555,13 +14297,6 @@
             <a:prstDash val="solid"/>
           </a:ln>
         </p:spPr>
-        <p:txBody>
-          <a:bodyPr/>
-          <a:lstStyle/>
-          <a:p>
-            <a:endParaRPr lang="ko-KR" altLang="en-US" sz="2400"/>
-          </a:p>
-        </p:txBody>
       </p:sp>
       <p:sp>
         <p:nvSpPr>
@@ -14584,11 +14319,11 @@
           <a:bodyPr wrap="square" rtlCol="0" anchor="ctr"/>
           <a:lstStyle/>
           <a:p>
-            <a:pPr marL="0" indent="0">
-              <a:buNone/>
-            </a:pPr>
-            <a:r>
-              <a:rPr lang="en-US" sz="4000" b="1" dirty="0">
+            <a:pPr indent="0" marL="0">
+              <a:buNone/>
+            </a:pPr>
+            <a:r>
+              <a:rPr lang="en-US" sz="3200" b="1" dirty="0">
                 <a:solidFill>
                   <a:srgbClr val="E4CE85"/>
                 </a:solidFill>
@@ -14598,7 +14333,7 @@
               </a:rPr>
               <a:t>02</a:t>
             </a:r>
-            <a:endParaRPr lang="en-US" sz="4000" dirty="0"/>
+            <a:endParaRPr lang="en-US" sz="3200" dirty="0"/>
           </a:p>
         </p:txBody>
       </p:sp>
@@ -14623,11 +14358,11 @@
           <a:bodyPr wrap="square" rtlCol="0" anchor="ctr"/>
           <a:lstStyle/>
           <a:p>
-            <a:pPr marL="0" indent="0">
-              <a:buNone/>
-            </a:pPr>
-            <a:r>
-              <a:rPr lang="en-US" sz="2400" b="1" dirty="0">
+            <a:pPr indent="0" marL="0">
+              <a:buNone/>
+            </a:pPr>
+            <a:r>
+              <a:rPr lang="en-US" sz="1900" b="1" dirty="0">
                 <a:solidFill>
                   <a:srgbClr val="1E2761"/>
                 </a:solidFill>
@@ -14637,7 +14372,7 @@
               </a:rPr>
               <a:t>DCF</a:t>
             </a:r>
-            <a:endParaRPr lang="en-US" sz="2400" dirty="0"/>
+            <a:endParaRPr lang="en-US" sz="1900" dirty="0"/>
           </a:p>
         </p:txBody>
       </p:sp>
@@ -14662,11 +14397,11 @@
           <a:bodyPr wrap="square" rtlCol="0" anchor="ctr"/>
           <a:lstStyle/>
           <a:p>
-            <a:pPr marL="0" indent="0">
-              <a:buNone/>
-            </a:pPr>
-            <a:r>
-              <a:rPr lang="en-US" sz="1600" i="1" dirty="0">
+            <a:pPr indent="0" marL="0">
+              <a:buNone/>
+            </a:pPr>
+            <a:r>
+              <a:rPr lang="en-US" sz="1250" i="1" dirty="0">
                 <a:solidFill>
                   <a:srgbClr val="5A5F73"/>
                 </a:solidFill>
@@ -14676,7 +14411,7 @@
               </a:rPr>
               <a:t>현금흐름할인법</a:t>
             </a:r>
-            <a:endParaRPr lang="en-US" sz="1600" dirty="0"/>
+            <a:endParaRPr lang="en-US" sz="1250" dirty="0"/>
           </a:p>
         </p:txBody>
       </p:sp>
@@ -14699,13 +14434,6 @@
           </a:solidFill>
           <a:ln/>
         </p:spPr>
-        <p:txBody>
-          <a:bodyPr/>
-          <a:lstStyle/>
-          <a:p>
-            <a:endParaRPr lang="ko-KR" altLang="en-US" sz="2400"/>
-          </a:p>
-        </p:txBody>
       </p:sp>
       <p:sp>
         <p:nvSpPr>
@@ -14728,11 +14456,11 @@
           <a:bodyPr wrap="square" rtlCol="0" anchor="ctr"/>
           <a:lstStyle/>
           <a:p>
-            <a:pPr marL="0" indent="0">
-              <a:buNone/>
-            </a:pPr>
-            <a:r>
-              <a:rPr lang="en-US" b="1" dirty="0">
+            <a:pPr indent="0" marL="0">
+              <a:buNone/>
+            </a:pPr>
+            <a:r>
+              <a:rPr lang="en-US" sz="1500" b="1" dirty="0">
                 <a:solidFill>
                   <a:srgbClr val="222633"/>
                 </a:solidFill>
@@ -14742,7 +14470,7 @@
               </a:rPr>
               <a:t>Σ[FCF/(1+r)ⁿ] + 영구가치</a:t>
             </a:r>
-            <a:endParaRPr lang="en-US" dirty="0"/>
+            <a:endParaRPr lang="en-US" sz="1500" dirty="0"/>
           </a:p>
         </p:txBody>
       </p:sp>
@@ -14767,11 +14495,11 @@
           <a:bodyPr wrap="square" rtlCol="0" anchor="ctr"/>
           <a:lstStyle/>
           <a:p>
-            <a:pPr marL="0" indent="0">
-              <a:buNone/>
-            </a:pPr>
-            <a:r>
-              <a:rPr lang="en-US" sz="1600" dirty="0">
+            <a:pPr indent="0" marL="0">
+              <a:buNone/>
+            </a:pPr>
+            <a:r>
+              <a:rPr lang="en-US" sz="1250" dirty="0">
                 <a:solidFill>
                   <a:srgbClr val="5A5F73"/>
                 </a:solidFill>
@@ -14781,7 +14509,7 @@
               </a:rPr>
               <a:t>미래 현금흐름을 현재가치로 환산</a:t>
             </a:r>
-            <a:endParaRPr lang="en-US" sz="1600" dirty="0"/>
+            <a:endParaRPr lang="en-US" sz="1250" dirty="0"/>
           </a:p>
         </p:txBody>
       </p:sp>
@@ -14811,13 +14539,6 @@
             <a:prstDash val="solid"/>
           </a:ln>
         </p:spPr>
-        <p:txBody>
-          <a:bodyPr/>
-          <a:lstStyle/>
-          <a:p>
-            <a:endParaRPr lang="ko-KR" altLang="en-US" sz="2400"/>
-          </a:p>
-        </p:txBody>
       </p:sp>
       <p:sp>
         <p:nvSpPr>
@@ -14840,11 +14561,11 @@
           <a:bodyPr wrap="square" rtlCol="0" anchor="ctr"/>
           <a:lstStyle/>
           <a:p>
-            <a:pPr marL="0" indent="0">
-              <a:buNone/>
-            </a:pPr>
-            <a:r>
-              <a:rPr lang="en-US" sz="4000" b="1" dirty="0">
+            <a:pPr indent="0" marL="0">
+              <a:buNone/>
+            </a:pPr>
+            <a:r>
+              <a:rPr lang="en-US" sz="3200" b="1" dirty="0">
                 <a:solidFill>
                   <a:srgbClr val="AFC3E6"/>
                 </a:solidFill>
@@ -14854,7 +14575,7 @@
               </a:rPr>
               <a:t>03</a:t>
             </a:r>
-            <a:endParaRPr lang="en-US" sz="4000" dirty="0"/>
+            <a:endParaRPr lang="en-US" sz="3200" dirty="0"/>
           </a:p>
         </p:txBody>
       </p:sp>
@@ -14879,11 +14600,11 @@
           <a:bodyPr wrap="square" rtlCol="0" anchor="ctr"/>
           <a:lstStyle/>
           <a:p>
-            <a:pPr marL="0" indent="0">
-              <a:buNone/>
-            </a:pPr>
-            <a:r>
-              <a:rPr lang="en-US" sz="2400" b="1" dirty="0">
+            <a:pPr indent="0" marL="0">
+              <a:buNone/>
+            </a:pPr>
+            <a:r>
+              <a:rPr lang="en-US" sz="1900" b="1" dirty="0">
                 <a:solidFill>
                   <a:srgbClr val="1E2761"/>
                 </a:solidFill>
@@ -14893,7 +14614,7 @@
               </a:rPr>
               <a:t>DDM</a:t>
             </a:r>
-            <a:endParaRPr lang="en-US" sz="2400" dirty="0"/>
+            <a:endParaRPr lang="en-US" sz="1900" dirty="0"/>
           </a:p>
         </p:txBody>
       </p:sp>
@@ -14918,11 +14639,11 @@
           <a:bodyPr wrap="square" rtlCol="0" anchor="ctr"/>
           <a:lstStyle/>
           <a:p>
-            <a:pPr marL="0" indent="0">
-              <a:buNone/>
-            </a:pPr>
-            <a:r>
-              <a:rPr lang="en-US" sz="1600" i="1" dirty="0">
+            <a:pPr indent="0" marL="0">
+              <a:buNone/>
+            </a:pPr>
+            <a:r>
+              <a:rPr lang="en-US" sz="1250" i="1" dirty="0">
                 <a:solidFill>
                   <a:srgbClr val="5A5F73"/>
                 </a:solidFill>
@@ -14932,7 +14653,7 @@
               </a:rPr>
               <a:t>배당할인모형</a:t>
             </a:r>
-            <a:endParaRPr lang="en-US" sz="1600" dirty="0"/>
+            <a:endParaRPr lang="en-US" sz="1250" dirty="0"/>
           </a:p>
         </p:txBody>
       </p:sp>
@@ -14955,13 +14676,6 @@
           </a:solidFill>
           <a:ln/>
         </p:spPr>
-        <p:txBody>
-          <a:bodyPr/>
-          <a:lstStyle/>
-          <a:p>
-            <a:endParaRPr lang="ko-KR" altLang="en-US" sz="2400"/>
-          </a:p>
-        </p:txBody>
       </p:sp>
       <p:sp>
         <p:nvSpPr>
@@ -14984,11 +14698,11 @@
           <a:bodyPr wrap="square" rtlCol="0" anchor="ctr"/>
           <a:lstStyle/>
           <a:p>
-            <a:pPr marL="0" indent="0">
-              <a:buNone/>
-            </a:pPr>
-            <a:r>
-              <a:rPr lang="en-US" b="1" dirty="0">
+            <a:pPr indent="0" marL="0">
+              <a:buNone/>
+            </a:pPr>
+            <a:r>
+              <a:rPr lang="en-US" sz="1500" b="1" dirty="0">
                 <a:solidFill>
                   <a:srgbClr val="222633"/>
                 </a:solidFill>
@@ -14998,7 +14712,7 @@
               </a:rPr>
               <a:t>차기배당 ÷ (요구수익률−성장률)</a:t>
             </a:r>
-            <a:endParaRPr lang="en-US" dirty="0"/>
+            <a:endParaRPr lang="en-US" sz="1500" dirty="0"/>
           </a:p>
         </p:txBody>
       </p:sp>
@@ -15023,11 +14737,11 @@
           <a:bodyPr wrap="square" rtlCol="0" anchor="ctr"/>
           <a:lstStyle/>
           <a:p>
-            <a:pPr marL="0" indent="0">
-              <a:buNone/>
-            </a:pPr>
-            <a:r>
-              <a:rPr lang="en-US" sz="1600" dirty="0">
+            <a:pPr indent="0" marL="0">
+              <a:buNone/>
+            </a:pPr>
+            <a:r>
+              <a:rPr lang="en-US" sz="1250" dirty="0">
                 <a:solidFill>
                   <a:srgbClr val="5A5F73"/>
                 </a:solidFill>
@@ -15037,7 +14751,7 @@
               </a:rPr>
               <a:t>고든성장모형, 배당 안정적 기업에 적합</a:t>
             </a:r>
-            <a:endParaRPr lang="en-US" sz="1600" dirty="0"/>
+            <a:endParaRPr lang="en-US" sz="1250" dirty="0"/>
           </a:p>
         </p:txBody>
       </p:sp>
@@ -15067,13 +14781,6 @@
             <a:prstDash val="solid"/>
           </a:ln>
         </p:spPr>
-        <p:txBody>
-          <a:bodyPr/>
-          <a:lstStyle/>
-          <a:p>
-            <a:endParaRPr lang="ko-KR" altLang="en-US" sz="2400"/>
-          </a:p>
-        </p:txBody>
       </p:sp>
       <p:sp>
         <p:nvSpPr>
@@ -15096,11 +14803,11 @@
           <a:bodyPr wrap="square" rtlCol="0" anchor="ctr"/>
           <a:lstStyle/>
           <a:p>
-            <a:pPr marL="0" indent="0">
-              <a:buNone/>
-            </a:pPr>
-            <a:r>
-              <a:rPr lang="en-US" sz="4000" b="1" dirty="0">
+            <a:pPr indent="0" marL="0">
+              <a:buNone/>
+            </a:pPr>
+            <a:r>
+              <a:rPr lang="en-US" sz="3200" b="1" dirty="0">
                 <a:solidFill>
                   <a:srgbClr val="E4CE85"/>
                 </a:solidFill>
@@ -15110,7 +14817,7 @@
               </a:rPr>
               <a:t>04</a:t>
             </a:r>
-            <a:endParaRPr lang="en-US" sz="4000" dirty="0"/>
+            <a:endParaRPr lang="en-US" sz="3200" dirty="0"/>
           </a:p>
         </p:txBody>
       </p:sp>
@@ -15135,11 +14842,11 @@
           <a:bodyPr wrap="square" rtlCol="0" anchor="ctr"/>
           <a:lstStyle/>
           <a:p>
-            <a:pPr marL="0" indent="0">
-              <a:buNone/>
-            </a:pPr>
-            <a:r>
-              <a:rPr lang="en-US" sz="2400" b="1" dirty="0">
+            <a:pPr indent="0" marL="0">
+              <a:buNone/>
+            </a:pPr>
+            <a:r>
+              <a:rPr lang="en-US" sz="1900" b="1" dirty="0">
                 <a:solidFill>
                   <a:srgbClr val="1E2761"/>
                 </a:solidFill>
@@ -15149,7 +14856,7 @@
               </a:rPr>
               <a:t>NAV</a:t>
             </a:r>
-            <a:endParaRPr lang="en-US" sz="2400" dirty="0"/>
+            <a:endParaRPr lang="en-US" sz="1900" dirty="0"/>
           </a:p>
         </p:txBody>
       </p:sp>
@@ -15174,11 +14881,11 @@
           <a:bodyPr wrap="square" rtlCol="0" anchor="ctr"/>
           <a:lstStyle/>
           <a:p>
-            <a:pPr marL="0" indent="0">
-              <a:buNone/>
-            </a:pPr>
-            <a:r>
-              <a:rPr lang="en-US" sz="1600" i="1" dirty="0">
+            <a:pPr indent="0" marL="0">
+              <a:buNone/>
+            </a:pPr>
+            <a:r>
+              <a:rPr lang="en-US" sz="1250" i="1" dirty="0">
                 <a:solidFill>
                   <a:srgbClr val="5A5F73"/>
                 </a:solidFill>
@@ -15188,7 +14895,7 @@
               </a:rPr>
               <a:t>자산가치법</a:t>
             </a:r>
-            <a:endParaRPr lang="en-US" sz="1600" dirty="0"/>
+            <a:endParaRPr lang="en-US" sz="1250" dirty="0"/>
           </a:p>
         </p:txBody>
       </p:sp>
@@ -15211,13 +14918,6 @@
           </a:solidFill>
           <a:ln/>
         </p:spPr>
-        <p:txBody>
-          <a:bodyPr/>
-          <a:lstStyle/>
-          <a:p>
-            <a:endParaRPr lang="ko-KR" altLang="en-US" sz="2400"/>
-          </a:p>
-        </p:txBody>
       </p:sp>
       <p:sp>
         <p:nvSpPr>
@@ -15240,11 +14940,11 @@
           <a:bodyPr wrap="square" rtlCol="0" anchor="ctr"/>
           <a:lstStyle/>
           <a:p>
-            <a:pPr marL="0" indent="0">
-              <a:buNone/>
-            </a:pPr>
-            <a:r>
-              <a:rPr lang="en-US" b="1" dirty="0">
+            <a:pPr indent="0" marL="0">
+              <a:buNone/>
+            </a:pPr>
+            <a:r>
+              <a:rPr lang="en-US" sz="1500" b="1" dirty="0">
                 <a:solidFill>
                   <a:srgbClr val="222633"/>
                 </a:solidFill>
@@ -15254,7 +14954,7 @@
               </a:rPr>
               <a:t>자산 시가평가액 − 부채</a:t>
             </a:r>
-            <a:endParaRPr lang="en-US" dirty="0"/>
+            <a:endParaRPr lang="en-US" sz="1500" dirty="0"/>
           </a:p>
         </p:txBody>
       </p:sp>
@@ -15279,11 +14979,11 @@
           <a:bodyPr wrap="square" rtlCol="0" anchor="ctr"/>
           <a:lstStyle/>
           <a:p>
-            <a:pPr marL="0" indent="0">
-              <a:buNone/>
-            </a:pPr>
-            <a:r>
-              <a:rPr lang="en-US" sz="1600" dirty="0">
+            <a:pPr indent="0" marL="0">
+              <a:buNone/>
+            </a:pPr>
+            <a:r>
+              <a:rPr lang="en-US" sz="1250" dirty="0">
                 <a:solidFill>
                   <a:srgbClr val="5A5F73"/>
                 </a:solidFill>
@@ -15293,7 +14993,7 @@
               </a:rPr>
               <a:t>지주회사·부동산·금융회사에 적합</a:t>
             </a:r>
-            <a:endParaRPr lang="en-US" sz="1600" dirty="0"/>
+            <a:endParaRPr lang="en-US" sz="1250" dirty="0"/>
           </a:p>
         </p:txBody>
       </p:sp>
@@ -15318,7 +15018,7 @@
           <a:bodyPr wrap="square" rtlCol="0" anchor="ctr"/>
           <a:lstStyle/>
           <a:p>
-            <a:pPr marL="0" indent="0" algn="r">
+            <a:pPr algn="r" indent="0" marL="0">
               <a:buNone/>
             </a:pPr>
             <a:r>
@@ -15352,7 +15052,6 @@
         <a:solidFill>
           <a:srgbClr val="FFFFFF"/>
         </a:solidFill>
-        <a:effectLst/>
       </p:bgPr>
     </p:bg>
     <p:spTree>
@@ -15390,11 +15089,11 @@
           <a:bodyPr wrap="square" rtlCol="0" anchor="ctr"/>
           <a:lstStyle/>
           <a:p>
-            <a:pPr marL="0" indent="0">
-              <a:buNone/>
-            </a:pPr>
-            <a:r>
-              <a:rPr lang="en-US" sz="1300" b="1" kern="0" spc="200" dirty="0">
+            <a:pPr indent="0" marL="0">
+              <a:buNone/>
+            </a:pPr>
+            <a:r>
+              <a:rPr lang="en-US" sz="1300" b="1" spc="200" kern="0" dirty="0">
                 <a:solidFill>
                   <a:srgbClr val="9C7A0A"/>
                 </a:solidFill>
@@ -15429,7 +15128,7 @@
           <a:bodyPr wrap="square" rtlCol="0" anchor="ctr"/>
           <a:lstStyle/>
           <a:p>
-            <a:pPr marL="0" indent="0" algn="l">
+            <a:pPr algn="l" indent="0" marL="0">
               <a:buNone/>
             </a:pPr>
             <a:r>
@@ -15468,11 +15167,11 @@
           <a:bodyPr wrap="square" rtlCol="0" anchor="ctr"/>
           <a:lstStyle/>
           <a:p>
-            <a:pPr marL="0" indent="0">
-              <a:buNone/>
-            </a:pPr>
-            <a:r>
-              <a:rPr lang="en-US" dirty="0">
+            <a:pPr indent="0" marL="0">
+              <a:buNone/>
+            </a:pPr>
+            <a:r>
+              <a:rPr lang="en-US" sz="1500" dirty="0">
                 <a:solidFill>
                   <a:srgbClr val="5A5F73"/>
                 </a:solidFill>
@@ -15482,7 +15181,7 @@
               </a:rPr>
               <a:t>한 가지 방법만 쓰지 않고 여러 방법을 교차 검증합니다</a:t>
             </a:r>
-            <a:endParaRPr lang="en-US" dirty="0"/>
+            <a:endParaRPr lang="en-US" sz="1500" dirty="0"/>
           </a:p>
         </p:txBody>
       </p:sp>
@@ -15512,13 +15211,6 @@
             <a:prstDash val="solid"/>
           </a:ln>
         </p:spPr>
-        <p:txBody>
-          <a:bodyPr/>
-          <a:lstStyle/>
-          <a:p>
-            <a:endParaRPr lang="ko-KR" altLang="en-US" sz="2400"/>
-          </a:p>
-        </p:txBody>
       </p:sp>
       <p:sp>
         <p:nvSpPr>
@@ -15544,13 +15236,6 @@
             <a:prstDash val="solid"/>
           </a:ln>
         </p:spPr>
-        <p:txBody>
-          <a:bodyPr/>
-          <a:lstStyle/>
-          <a:p>
-            <a:endParaRPr lang="ko-KR" altLang="en-US" sz="2000"/>
-          </a:p>
-        </p:txBody>
       </p:sp>
       <p:sp>
         <p:nvSpPr>
@@ -15573,11 +15258,11 @@
           <a:bodyPr wrap="square" rtlCol="0" anchor="ctr"/>
           <a:lstStyle/>
           <a:p>
-            <a:pPr marL="0" indent="0" algn="ctr">
-              <a:buNone/>
-            </a:pPr>
-            <a:r>
-              <a:rPr lang="en-US" sz="2400" b="1" dirty="0">
+            <a:pPr algn="ctr" indent="0" marL="0">
+              <a:buNone/>
+            </a:pPr>
+            <a:r>
+              <a:rPr lang="en-US" sz="2200" b="1" dirty="0">
                 <a:solidFill>
                   <a:srgbClr val="1E2761"/>
                 </a:solidFill>
@@ -15587,7 +15272,7 @@
               </a:rPr>
               <a:t>1</a:t>
             </a:r>
-            <a:endParaRPr lang="en-US" sz="2400" dirty="0"/>
+            <a:endParaRPr lang="en-US" sz="2200" dirty="0"/>
           </a:p>
         </p:txBody>
       </p:sp>
@@ -15612,11 +15297,11 @@
           <a:bodyPr wrap="square" rtlCol="0" anchor="ctr"/>
           <a:lstStyle/>
           <a:p>
-            <a:pPr marL="0" indent="0" algn="ctr">
-              <a:buNone/>
-            </a:pPr>
-            <a:r>
-              <a:rPr lang="en-US" sz="2000" b="1" dirty="0">
+            <a:pPr algn="ctr" indent="0" marL="0">
+              <a:buNone/>
+            </a:pPr>
+            <a:r>
+              <a:rPr lang="en-US" sz="1600" b="1" dirty="0">
                 <a:solidFill>
                   <a:srgbClr val="1E2761"/>
                 </a:solidFill>
@@ -15626,7 +15311,7 @@
               </a:rPr>
               <a:t>DCF 산출</a:t>
             </a:r>
-            <a:endParaRPr lang="en-US" sz="2000" dirty="0"/>
+            <a:endParaRPr lang="en-US" sz="1600" dirty="0"/>
           </a:p>
         </p:txBody>
       </p:sp>
@@ -15651,11 +15336,11 @@
           <a:bodyPr wrap="square" rtlCol="0" anchor="ctr"/>
           <a:lstStyle/>
           <a:p>
-            <a:pPr marL="0" indent="0" algn="ctr">
-              <a:buNone/>
-            </a:pPr>
-            <a:r>
-              <a:rPr lang="en-US" sz="1600" dirty="0" err="1">
+            <a:pPr algn="ctr" indent="0" marL="0">
+              <a:buNone/>
+            </a:pPr>
+            <a:r>
+              <a:rPr lang="en-US" sz="1250" dirty="0">
                 <a:solidFill>
                   <a:srgbClr val="5A5F73"/>
                 </a:solidFill>
@@ -15663,55 +15348,9 @@
                 <a:ea typeface="Calibri" pitchFamily="34" charset="-122"/>
                 <a:cs typeface="Calibri" pitchFamily="34" charset="-120"/>
               </a:rPr>
-              <a:t>이론적</a:t>
-            </a:r>
-            <a:r>
-              <a:rPr lang="en-US" sz="1600" dirty="0">
-                <a:solidFill>
-                  <a:srgbClr val="5A5F73"/>
-                </a:solidFill>
-                <a:latin typeface="Calibri" pitchFamily="34" charset="0"/>
-                <a:ea typeface="Calibri" pitchFamily="34" charset="-122"/>
-                <a:cs typeface="Calibri" pitchFamily="34" charset="-120"/>
-              </a:rPr>
-              <a:t> </a:t>
-            </a:r>
-            <a:r>
-              <a:rPr lang="en-US" sz="1600" dirty="0" err="1">
-                <a:solidFill>
-                  <a:srgbClr val="5A5F73"/>
-                </a:solidFill>
-                <a:latin typeface="Calibri" pitchFamily="34" charset="0"/>
-                <a:ea typeface="Calibri" pitchFamily="34" charset="-122"/>
-                <a:cs typeface="Calibri" pitchFamily="34" charset="-120"/>
-              </a:rPr>
-              <a:t>적정가치</a:t>
-            </a:r>
-            <a:endParaRPr lang="en-US" sz="1600" dirty="0">
-              <a:solidFill>
-                <a:srgbClr val="5A5F73"/>
-              </a:solidFill>
-              <a:latin typeface="Calibri" pitchFamily="34" charset="0"/>
-              <a:ea typeface="Calibri" pitchFamily="34" charset="-122"/>
-              <a:cs typeface="Calibri" pitchFamily="34" charset="-120"/>
-            </a:endParaRPr>
-          </a:p>
-          <a:p>
-            <a:pPr marL="0" indent="0" algn="ctr">
-              <a:buNone/>
-            </a:pPr>
-            <a:r>
-              <a:rPr lang="en-US" sz="1600" dirty="0" err="1">
-                <a:solidFill>
-                  <a:srgbClr val="5A5F73"/>
-                </a:solidFill>
-                <a:latin typeface="Calibri" pitchFamily="34" charset="0"/>
-                <a:ea typeface="Calibri" pitchFamily="34" charset="-122"/>
-                <a:cs typeface="Calibri" pitchFamily="34" charset="-120"/>
-              </a:rPr>
-              <a:t>계산</a:t>
-            </a:r>
-            <a:endParaRPr lang="en-US" sz="1600" dirty="0"/>
+              <a:t>이론적 적정가치 계산</a:t>
+            </a:r>
+            <a:endParaRPr lang="en-US" sz="1250" dirty="0"/>
           </a:p>
         </p:txBody>
       </p:sp>
@@ -15736,11 +15375,11 @@
           <a:bodyPr wrap="square" rtlCol="0" anchor="ctr"/>
           <a:lstStyle/>
           <a:p>
-            <a:pPr marL="0" indent="0" algn="ctr">
-              <a:buNone/>
-            </a:pPr>
-            <a:r>
-              <a:rPr lang="en-US" sz="3200" b="1" dirty="0">
+            <a:pPr algn="ctr" indent="0" marL="0">
+              <a:buNone/>
+            </a:pPr>
+            <a:r>
+              <a:rPr lang="en-US" sz="2400" b="1" dirty="0">
                 <a:solidFill>
                   <a:srgbClr val="9C7A0A"/>
                 </a:solidFill>
@@ -15750,7 +15389,7 @@
               </a:rPr>
               <a:t>→</a:t>
             </a:r>
-            <a:endParaRPr lang="en-US" sz="3200" dirty="0"/>
+            <a:endParaRPr lang="en-US" sz="2400" dirty="0"/>
           </a:p>
         </p:txBody>
       </p:sp>
@@ -15780,13 +15419,6 @@
             <a:prstDash val="solid"/>
           </a:ln>
         </p:spPr>
-        <p:txBody>
-          <a:bodyPr/>
-          <a:lstStyle/>
-          <a:p>
-            <a:endParaRPr lang="ko-KR" altLang="en-US" sz="2400"/>
-          </a:p>
-        </p:txBody>
       </p:sp>
       <p:sp>
         <p:nvSpPr>
@@ -15812,13 +15444,6 @@
             <a:prstDash val="solid"/>
           </a:ln>
         </p:spPr>
-        <p:txBody>
-          <a:bodyPr/>
-          <a:lstStyle/>
-          <a:p>
-            <a:endParaRPr lang="ko-KR" altLang="en-US" sz="2000"/>
-          </a:p>
-        </p:txBody>
       </p:sp>
       <p:sp>
         <p:nvSpPr>
@@ -15841,11 +15466,11 @@
           <a:bodyPr wrap="square" rtlCol="0" anchor="ctr"/>
           <a:lstStyle/>
           <a:p>
-            <a:pPr marL="0" indent="0" algn="ctr">
-              <a:buNone/>
-            </a:pPr>
-            <a:r>
-              <a:rPr lang="en-US" sz="2400" b="1" dirty="0">
+            <a:pPr algn="ctr" indent="0" marL="0">
+              <a:buNone/>
+            </a:pPr>
+            <a:r>
+              <a:rPr lang="en-US" sz="2200" b="1" dirty="0">
                 <a:solidFill>
                   <a:srgbClr val="1E2761"/>
                 </a:solidFill>
@@ -15855,7 +15480,7 @@
               </a:rPr>
               <a:t>2</a:t>
             </a:r>
-            <a:endParaRPr lang="en-US" sz="2400" dirty="0"/>
+            <a:endParaRPr lang="en-US" sz="2200" dirty="0"/>
           </a:p>
         </p:txBody>
       </p:sp>
@@ -15880,11 +15505,11 @@
           <a:bodyPr wrap="square" rtlCol="0" anchor="ctr"/>
           <a:lstStyle/>
           <a:p>
-            <a:pPr marL="0" indent="0" algn="ctr">
-              <a:buNone/>
-            </a:pPr>
-            <a:r>
-              <a:rPr lang="en-US" sz="2000" b="1" dirty="0">
+            <a:pPr algn="ctr" indent="0" marL="0">
+              <a:buNone/>
+            </a:pPr>
+            <a:r>
+              <a:rPr lang="en-US" sz="1600" b="1" dirty="0">
                 <a:solidFill>
                   <a:srgbClr val="1E2761"/>
                 </a:solidFill>
@@ -15894,7 +15519,7 @@
               </a:rPr>
               <a:t>동종업계 비교</a:t>
             </a:r>
-            <a:endParaRPr lang="en-US" sz="2000" dirty="0"/>
+            <a:endParaRPr lang="en-US" sz="1600" dirty="0"/>
           </a:p>
         </p:txBody>
       </p:sp>
@@ -15919,11 +15544,11 @@
           <a:bodyPr wrap="square" rtlCol="0" anchor="ctr"/>
           <a:lstStyle/>
           <a:p>
-            <a:pPr marL="0" indent="0" algn="ctr">
-              <a:buNone/>
-            </a:pPr>
-            <a:r>
-              <a:rPr lang="en-US" sz="1600" dirty="0">
+            <a:pPr algn="ctr" indent="0" marL="0">
+              <a:buNone/>
+            </a:pPr>
+            <a:r>
+              <a:rPr lang="en-US" sz="1250" dirty="0">
                 <a:solidFill>
                   <a:srgbClr val="5A5F73"/>
                 </a:solidFill>
@@ -15931,47 +15556,9 @@
                 <a:ea typeface="Calibri" pitchFamily="34" charset="-122"/>
                 <a:cs typeface="Calibri" pitchFamily="34" charset="-120"/>
               </a:rPr>
-              <a:t>PER / EV-EBITDA </a:t>
-            </a:r>
-            <a:r>
-              <a:rPr lang="en-US" sz="1600" dirty="0" err="1">
-                <a:solidFill>
-                  <a:srgbClr val="5A5F73"/>
-                </a:solidFill>
-                <a:latin typeface="Calibri" pitchFamily="34" charset="0"/>
-                <a:ea typeface="Calibri" pitchFamily="34" charset="-122"/>
-                <a:cs typeface="Calibri" pitchFamily="34" charset="-120"/>
-              </a:rPr>
-              <a:t>밴드</a:t>
-            </a:r>
-            <a:r>
-              <a:rPr lang="en-US" sz="1600" dirty="0">
-                <a:solidFill>
-                  <a:srgbClr val="5A5F73"/>
-                </a:solidFill>
-                <a:latin typeface="Calibri" pitchFamily="34" charset="0"/>
-                <a:ea typeface="Calibri" pitchFamily="34" charset="-122"/>
-                <a:cs typeface="Calibri" pitchFamily="34" charset="-120"/>
-              </a:rPr>
-              <a:t> </a:t>
-            </a:r>
-          </a:p>
-          <a:p>
-            <a:pPr marL="0" indent="0" algn="ctr">
-              <a:buNone/>
-            </a:pPr>
-            <a:r>
-              <a:rPr lang="en-US" sz="1600" dirty="0" err="1">
-                <a:solidFill>
-                  <a:srgbClr val="5A5F73"/>
-                </a:solidFill>
-                <a:latin typeface="Calibri" pitchFamily="34" charset="0"/>
-                <a:ea typeface="Calibri" pitchFamily="34" charset="-122"/>
-                <a:cs typeface="Calibri" pitchFamily="34" charset="-120"/>
-              </a:rPr>
-              <a:t>확인</a:t>
-            </a:r>
-            <a:endParaRPr lang="en-US" sz="1600" dirty="0"/>
+              <a:t>PER / EV-EBITDA 밴드 확인</a:t>
+            </a:r>
+            <a:endParaRPr lang="en-US" sz="1250" dirty="0"/>
           </a:p>
         </p:txBody>
       </p:sp>
@@ -15996,11 +15583,11 @@
           <a:bodyPr wrap="square" rtlCol="0" anchor="ctr"/>
           <a:lstStyle/>
           <a:p>
-            <a:pPr marL="0" indent="0" algn="ctr">
-              <a:buNone/>
-            </a:pPr>
-            <a:r>
-              <a:rPr lang="en-US" sz="3200" b="1" dirty="0">
+            <a:pPr algn="ctr" indent="0" marL="0">
+              <a:buNone/>
+            </a:pPr>
+            <a:r>
+              <a:rPr lang="en-US" sz="2400" b="1" dirty="0">
                 <a:solidFill>
                   <a:srgbClr val="9C7A0A"/>
                 </a:solidFill>
@@ -16010,7 +15597,7 @@
               </a:rPr>
               <a:t>→</a:t>
             </a:r>
-            <a:endParaRPr lang="en-US" sz="3200" dirty="0"/>
+            <a:endParaRPr lang="en-US" sz="2400" dirty="0"/>
           </a:p>
         </p:txBody>
       </p:sp>
@@ -16040,13 +15627,6 @@
             <a:prstDash val="solid"/>
           </a:ln>
         </p:spPr>
-        <p:txBody>
-          <a:bodyPr/>
-          <a:lstStyle/>
-          <a:p>
-            <a:endParaRPr lang="ko-KR" altLang="en-US" sz="2400"/>
-          </a:p>
-        </p:txBody>
       </p:sp>
       <p:sp>
         <p:nvSpPr>
@@ -16072,13 +15652,6 @@
             <a:prstDash val="solid"/>
           </a:ln>
         </p:spPr>
-        <p:txBody>
-          <a:bodyPr/>
-          <a:lstStyle/>
-          <a:p>
-            <a:endParaRPr lang="ko-KR" altLang="en-US" sz="2000"/>
-          </a:p>
-        </p:txBody>
       </p:sp>
       <p:sp>
         <p:nvSpPr>
@@ -16101,11 +15674,11 @@
           <a:bodyPr wrap="square" rtlCol="0" anchor="ctr"/>
           <a:lstStyle/>
           <a:p>
-            <a:pPr marL="0" indent="0" algn="ctr">
-              <a:buNone/>
-            </a:pPr>
-            <a:r>
-              <a:rPr lang="en-US" sz="2400" b="1" dirty="0">
+            <a:pPr algn="ctr" indent="0" marL="0">
+              <a:buNone/>
+            </a:pPr>
+            <a:r>
+              <a:rPr lang="en-US" sz="2200" b="1" dirty="0">
                 <a:solidFill>
                   <a:srgbClr val="1E2761"/>
                 </a:solidFill>
@@ -16115,7 +15688,7 @@
               </a:rPr>
               <a:t>3</a:t>
             </a:r>
-            <a:endParaRPr lang="en-US" sz="2400" dirty="0"/>
+            <a:endParaRPr lang="en-US" sz="2200" dirty="0"/>
           </a:p>
         </p:txBody>
       </p:sp>
@@ -16140,11 +15713,11 @@
           <a:bodyPr wrap="square" rtlCol="0" anchor="ctr"/>
           <a:lstStyle/>
           <a:p>
-            <a:pPr marL="0" indent="0" algn="ctr">
-              <a:buNone/>
-            </a:pPr>
-            <a:r>
-              <a:rPr lang="en-US" sz="2000" b="1" dirty="0">
+            <a:pPr algn="ctr" indent="0" marL="0">
+              <a:buNone/>
+            </a:pPr>
+            <a:r>
+              <a:rPr lang="en-US" sz="1600" b="1" dirty="0">
                 <a:solidFill>
                   <a:srgbClr val="1E2761"/>
                 </a:solidFill>
@@ -16154,7 +15727,7 @@
               </a:rPr>
               <a:t>히스토리 비교</a:t>
             </a:r>
-            <a:endParaRPr lang="en-US" sz="2000" dirty="0"/>
+            <a:endParaRPr lang="en-US" sz="1600" dirty="0"/>
           </a:p>
         </p:txBody>
       </p:sp>
@@ -16179,11 +15752,11 @@
           <a:bodyPr wrap="square" rtlCol="0" anchor="ctr"/>
           <a:lstStyle/>
           <a:p>
-            <a:pPr marL="0" indent="0" algn="ctr">
-              <a:buNone/>
-            </a:pPr>
-            <a:r>
-              <a:rPr lang="en-US" sz="1600" dirty="0">
+            <a:pPr algn="ctr" indent="0" marL="0">
+              <a:buNone/>
+            </a:pPr>
+            <a:r>
+              <a:rPr lang="en-US" sz="1250" dirty="0">
                 <a:solidFill>
                   <a:srgbClr val="5A5F73"/>
                 </a:solidFill>
@@ -16191,47 +15764,9 @@
                 <a:ea typeface="Calibri" pitchFamily="34" charset="-122"/>
                 <a:cs typeface="Calibri" pitchFamily="34" charset="-120"/>
               </a:rPr>
-              <a:t>자사 PER·PBR </a:t>
-            </a:r>
-            <a:r>
-              <a:rPr lang="en-US" sz="1600" dirty="0" err="1">
-                <a:solidFill>
-                  <a:srgbClr val="5A5F73"/>
-                </a:solidFill>
-                <a:latin typeface="Calibri" pitchFamily="34" charset="0"/>
-                <a:ea typeface="Calibri" pitchFamily="34" charset="-122"/>
-                <a:cs typeface="Calibri" pitchFamily="34" charset="-120"/>
-              </a:rPr>
-              <a:t>밴드와</a:t>
-            </a:r>
-            <a:r>
-              <a:rPr lang="en-US" sz="1600" dirty="0">
-                <a:solidFill>
-                  <a:srgbClr val="5A5F73"/>
-                </a:solidFill>
-                <a:latin typeface="Calibri" pitchFamily="34" charset="0"/>
-                <a:ea typeface="Calibri" pitchFamily="34" charset="-122"/>
-                <a:cs typeface="Calibri" pitchFamily="34" charset="-120"/>
-              </a:rPr>
-              <a:t> </a:t>
-            </a:r>
-          </a:p>
-          <a:p>
-            <a:pPr marL="0" indent="0" algn="ctr">
-              <a:buNone/>
-            </a:pPr>
-            <a:r>
-              <a:rPr lang="en-US" sz="1600" dirty="0" err="1">
-                <a:solidFill>
-                  <a:srgbClr val="5A5F73"/>
-                </a:solidFill>
-                <a:latin typeface="Calibri" pitchFamily="34" charset="0"/>
-                <a:ea typeface="Calibri" pitchFamily="34" charset="-122"/>
-                <a:cs typeface="Calibri" pitchFamily="34" charset="-120"/>
-              </a:rPr>
-              <a:t>대조</a:t>
-            </a:r>
-            <a:endParaRPr lang="en-US" sz="1600" dirty="0"/>
+              <a:t>자사 PER·PBR 밴드와 대조</a:t>
+            </a:r>
+            <a:endParaRPr lang="en-US" sz="1250" dirty="0"/>
           </a:p>
         </p:txBody>
       </p:sp>
@@ -16256,11 +15791,11 @@
           <a:bodyPr wrap="square" rtlCol="0" anchor="ctr"/>
           <a:lstStyle/>
           <a:p>
-            <a:pPr marL="0" indent="0" algn="ctr">
-              <a:buNone/>
-            </a:pPr>
-            <a:r>
-              <a:rPr lang="en-US" sz="3200" b="1" dirty="0">
+            <a:pPr algn="ctr" indent="0" marL="0">
+              <a:buNone/>
+            </a:pPr>
+            <a:r>
+              <a:rPr lang="en-US" sz="2400" b="1" dirty="0">
                 <a:solidFill>
                   <a:srgbClr val="9C7A0A"/>
                 </a:solidFill>
@@ -16270,7 +15805,7 @@
               </a:rPr>
               <a:t>→</a:t>
             </a:r>
-            <a:endParaRPr lang="en-US" sz="3200" dirty="0"/>
+            <a:endParaRPr lang="en-US" sz="2400" dirty="0"/>
           </a:p>
         </p:txBody>
       </p:sp>
@@ -16300,13 +15835,6 @@
             <a:prstDash val="solid"/>
           </a:ln>
         </p:spPr>
-        <p:txBody>
-          <a:bodyPr/>
-          <a:lstStyle/>
-          <a:p>
-            <a:endParaRPr lang="ko-KR" altLang="en-US" sz="2400"/>
-          </a:p>
-        </p:txBody>
       </p:sp>
       <p:sp>
         <p:nvSpPr>
@@ -16332,13 +15860,6 @@
             <a:prstDash val="solid"/>
           </a:ln>
         </p:spPr>
-        <p:txBody>
-          <a:bodyPr/>
-          <a:lstStyle/>
-          <a:p>
-            <a:endParaRPr lang="ko-KR" altLang="en-US" sz="2000"/>
-          </a:p>
-        </p:txBody>
       </p:sp>
       <p:sp>
         <p:nvSpPr>
@@ -16361,11 +15882,11 @@
           <a:bodyPr wrap="square" rtlCol="0" anchor="ctr"/>
           <a:lstStyle/>
           <a:p>
-            <a:pPr marL="0" indent="0" algn="ctr">
-              <a:buNone/>
-            </a:pPr>
-            <a:r>
-              <a:rPr lang="en-US" sz="2400" b="1" dirty="0">
+            <a:pPr algn="ctr" indent="0" marL="0">
+              <a:buNone/>
+            </a:pPr>
+            <a:r>
+              <a:rPr lang="en-US" sz="2200" b="1" dirty="0">
                 <a:solidFill>
                   <a:srgbClr val="9C7A0A"/>
                 </a:solidFill>
@@ -16375,7 +15896,7 @@
               </a:rPr>
               <a:t>4</a:t>
             </a:r>
-            <a:endParaRPr lang="en-US" sz="2400" dirty="0"/>
+            <a:endParaRPr lang="en-US" sz="2200" dirty="0"/>
           </a:p>
         </p:txBody>
       </p:sp>
@@ -16400,11 +15921,11 @@
           <a:bodyPr wrap="square" rtlCol="0" anchor="ctr"/>
           <a:lstStyle/>
           <a:p>
-            <a:pPr marL="0" indent="0" algn="ctr">
-              <a:buNone/>
-            </a:pPr>
-            <a:r>
-              <a:rPr lang="en-US" sz="2000" b="1" dirty="0">
+            <a:pPr algn="ctr" indent="0" marL="0">
+              <a:buNone/>
+            </a:pPr>
+            <a:r>
+              <a:rPr lang="en-US" sz="1600" b="1" dirty="0">
                 <a:solidFill>
                   <a:srgbClr val="1E2761"/>
                 </a:solidFill>
@@ -16414,7 +15935,7 @@
               </a:rPr>
               <a:t>목표주가 제시</a:t>
             </a:r>
-            <a:endParaRPr lang="en-US" sz="2000" dirty="0"/>
+            <a:endParaRPr lang="en-US" sz="1600" dirty="0"/>
           </a:p>
         </p:txBody>
       </p:sp>
@@ -16439,11 +15960,11 @@
           <a:bodyPr wrap="square" rtlCol="0" anchor="ctr"/>
           <a:lstStyle/>
           <a:p>
-            <a:pPr marL="0" indent="0" algn="ctr">
-              <a:buNone/>
-            </a:pPr>
-            <a:r>
-              <a:rPr lang="en-US" sz="1600" dirty="0">
+            <a:pPr algn="ctr" indent="0" marL="0">
+              <a:buNone/>
+            </a:pPr>
+            <a:r>
+              <a:rPr lang="en-US" sz="1250" dirty="0">
                 <a:solidFill>
                   <a:srgbClr val="5A5F73"/>
                 </a:solidFill>
@@ -16451,76 +15972,99 @@
                 <a:ea typeface="Calibri" pitchFamily="34" charset="-122"/>
                 <a:cs typeface="Calibri" pitchFamily="34" charset="-120"/>
               </a:rPr>
-              <a:t>종합하여 Target Price </a:t>
-            </a:r>
-          </a:p>
-          <a:p>
-            <a:pPr marL="0" indent="0" algn="ctr">
-              <a:buNone/>
-            </a:pPr>
-            <a:r>
-              <a:rPr lang="en-US" sz="1600" dirty="0" err="1">
-                <a:solidFill>
-                  <a:srgbClr val="5A5F73"/>
+              <a:t>종합하여 Target Price 확정</a:t>
+            </a:r>
+            <a:endParaRPr lang="en-US" sz="1250" dirty="0"/>
+          </a:p>
+        </p:txBody>
+      </p:sp>
+      <p:sp>
+        <p:nvSpPr>
+          <p:cNvPr id="28" name="Text 26"/>
+          <p:cNvSpPr/>
+          <p:nvPr/>
+        </p:nvSpPr>
+        <p:spPr>
+          <a:xfrm>
+            <a:off x="548640" y="4983480"/>
+            <a:ext cx="10881360" cy="365760"/>
+          </a:xfrm>
+          <a:prstGeom prst="rect">
+            <a:avLst/>
+          </a:prstGeom>
+          <a:noFill/>
+          <a:ln/>
+        </p:spPr>
+        <p:txBody>
+          <a:bodyPr wrap="square" rtlCol="0" anchor="ctr"/>
+          <a:lstStyle/>
+          <a:p>
+            <a:pPr indent="0" marL="0">
+              <a:buNone/>
+            </a:pPr>
+            <a:r>
+              <a:rPr lang="en-US" sz="1700" b="1" dirty="0">
+                <a:solidFill>
+                  <a:srgbClr val="1E2761"/>
+                </a:solidFill>
+                <a:latin typeface="Cambria" pitchFamily="34" charset="0"/>
+                <a:ea typeface="Cambria" pitchFamily="34" charset="-122"/>
+                <a:cs typeface="Cambria" pitchFamily="34" charset="-120"/>
+              </a:rPr>
+              <a:t>밸류에이션과 시장가격의 괴리가 발생하는 이유</a:t>
+            </a:r>
+            <a:endParaRPr lang="en-US" sz="1700" dirty="0"/>
+          </a:p>
+        </p:txBody>
+      </p:sp>
+      <p:sp>
+        <p:nvSpPr>
+          <p:cNvPr id="29" name="Text 27"/>
+          <p:cNvSpPr/>
+          <p:nvPr/>
+        </p:nvSpPr>
+        <p:spPr>
+          <a:xfrm>
+            <a:off x="548640" y="5376672"/>
+            <a:ext cx="10881360" cy="347472"/>
+          </a:xfrm>
+          <a:prstGeom prst="rect">
+            <a:avLst/>
+          </a:prstGeom>
+          <a:noFill/>
+          <a:ln/>
+        </p:spPr>
+        <p:txBody>
+          <a:bodyPr wrap="square" rtlCol="0" anchor="ctr"/>
+          <a:lstStyle/>
+          <a:p>
+            <a:pPr indent="0" marL="0">
+              <a:buNone/>
+            </a:pPr>
+            <a:r>
+              <a:rPr lang="en-US" sz="1350" dirty="0">
+                <a:solidFill>
+                  <a:srgbClr val="222633"/>
                 </a:solidFill>
                 <a:latin typeface="Calibri" pitchFamily="34" charset="0"/>
                 <a:ea typeface="Calibri" pitchFamily="34" charset="-122"/>
                 <a:cs typeface="Calibri" pitchFamily="34" charset="-120"/>
               </a:rPr>
-              <a:t>확정</a:t>
-            </a:r>
-            <a:endParaRPr lang="en-US" sz="1600" dirty="0"/>
-          </a:p>
-        </p:txBody>
-      </p:sp>
-      <p:sp>
-        <p:nvSpPr>
-          <p:cNvPr id="28" name="Text 26"/>
-          <p:cNvSpPr/>
-          <p:nvPr/>
-        </p:nvSpPr>
-        <p:spPr>
-          <a:xfrm>
-            <a:off x="548640" y="4983480"/>
-            <a:ext cx="10881360" cy="365760"/>
-          </a:xfrm>
-          <a:prstGeom prst="rect">
-            <a:avLst/>
-          </a:prstGeom>
-          <a:noFill/>
-          <a:ln/>
-        </p:spPr>
-        <p:txBody>
-          <a:bodyPr wrap="square" rtlCol="0" anchor="ctr"/>
-          <a:lstStyle/>
-          <a:p>
-            <a:pPr marL="0" indent="0">
-              <a:buNone/>
-            </a:pPr>
-            <a:r>
-              <a:rPr lang="en-US" sz="2000" b="1" dirty="0">
-                <a:solidFill>
-                  <a:srgbClr val="1E2761"/>
-                </a:solidFill>
-                <a:latin typeface="Cambria" pitchFamily="34" charset="0"/>
-                <a:ea typeface="Cambria" pitchFamily="34" charset="-122"/>
-                <a:cs typeface="Cambria" pitchFamily="34" charset="-120"/>
-              </a:rPr>
-              <a:t>밸류에이션과 시장가격의 괴리가 발생하는 이유</a:t>
-            </a:r>
-            <a:endParaRPr lang="en-US" sz="2000" dirty="0"/>
-          </a:p>
-        </p:txBody>
-      </p:sp>
-      <p:sp>
-        <p:nvSpPr>
-          <p:cNvPr id="29" name="Text 27"/>
-          <p:cNvSpPr/>
-          <p:nvPr/>
-        </p:nvSpPr>
-        <p:spPr>
-          <a:xfrm>
-            <a:off x="548640" y="5402073"/>
+              <a:t>•  시장은 미래 성장 기대(내러티브)를 선반영하는 경우가 많음</a:t>
+            </a:r>
+            <a:endParaRPr lang="en-US" sz="1350" dirty="0"/>
+          </a:p>
+        </p:txBody>
+      </p:sp>
+      <p:sp>
+        <p:nvSpPr>
+          <p:cNvPr id="30" name="Text 28"/>
+          <p:cNvSpPr/>
+          <p:nvPr/>
+        </p:nvSpPr>
+        <p:spPr>
+          <a:xfrm>
+            <a:off x="548640" y="5742432"/>
             <a:ext cx="10881360" cy="347472"/>
           </a:xfrm>
           <a:prstGeom prst="rect">
@@ -16533,11 +16077,11 @@
           <a:bodyPr wrap="square" rtlCol="0" anchor="ctr"/>
           <a:lstStyle/>
           <a:p>
-            <a:pPr marL="0" indent="0">
-              <a:buNone/>
-            </a:pPr>
-            <a:r>
-              <a:rPr lang="en-US" dirty="0">
+            <a:pPr indent="0" marL="0">
+              <a:buNone/>
+            </a:pPr>
+            <a:r>
+              <a:rPr lang="en-US" sz="1350" dirty="0">
                 <a:solidFill>
                   <a:srgbClr val="222633"/>
                 </a:solidFill>
@@ -16545,21 +16089,21 @@
                 <a:ea typeface="Calibri" pitchFamily="34" charset="-122"/>
                 <a:cs typeface="Calibri" pitchFamily="34" charset="-120"/>
               </a:rPr>
-              <a:t>•  시장은 미래 성장 기대(내러티브)를 선반영하는 경우가 많음</a:t>
-            </a:r>
-            <a:endParaRPr lang="en-US" dirty="0"/>
-          </a:p>
-        </p:txBody>
-      </p:sp>
-      <p:sp>
-        <p:nvSpPr>
-          <p:cNvPr id="30" name="Text 28"/>
-          <p:cNvSpPr/>
-          <p:nvPr/>
-        </p:nvSpPr>
-        <p:spPr>
-          <a:xfrm>
-            <a:off x="548640" y="5793234"/>
+              <a:t>•  금리 수준에 따라 “적정 멀티플” 자체가 시기별로 달라짐</a:t>
+            </a:r>
+            <a:endParaRPr lang="en-US" sz="1350" dirty="0"/>
+          </a:p>
+        </p:txBody>
+      </p:sp>
+      <p:sp>
+        <p:nvSpPr>
+          <p:cNvPr id="31" name="Text 29"/>
+          <p:cNvSpPr/>
+          <p:nvPr/>
+        </p:nvSpPr>
+        <p:spPr>
+          <a:xfrm>
+            <a:off x="548640" y="6108192"/>
             <a:ext cx="10881360" cy="347472"/>
           </a:xfrm>
           <a:prstGeom prst="rect">
@@ -16572,11 +16116,11 @@
           <a:bodyPr wrap="square" rtlCol="0" anchor="ctr"/>
           <a:lstStyle/>
           <a:p>
-            <a:pPr marL="0" indent="0">
-              <a:buNone/>
-            </a:pPr>
-            <a:r>
-              <a:rPr lang="en-US" dirty="0">
+            <a:pPr indent="0" marL="0">
+              <a:buNone/>
+            </a:pPr>
+            <a:r>
+              <a:rPr lang="en-US" sz="1350" dirty="0">
                 <a:solidFill>
                   <a:srgbClr val="222633"/>
                 </a:solidFill>
@@ -16584,48 +16128,9 @@
                 <a:ea typeface="Calibri" pitchFamily="34" charset="-122"/>
                 <a:cs typeface="Calibri" pitchFamily="34" charset="-120"/>
               </a:rPr>
-              <a:t>•  금리 수준에 따라 “적정 멀티플” 자체가 시기별로 달라짐</a:t>
-            </a:r>
-            <a:endParaRPr lang="en-US" dirty="0"/>
-          </a:p>
-        </p:txBody>
-      </p:sp>
-      <p:sp>
-        <p:nvSpPr>
-          <p:cNvPr id="31" name="Text 29"/>
-          <p:cNvSpPr/>
-          <p:nvPr/>
-        </p:nvSpPr>
-        <p:spPr>
-          <a:xfrm>
-            <a:off x="548640" y="6192862"/>
-            <a:ext cx="10881360" cy="347472"/>
-          </a:xfrm>
-          <a:prstGeom prst="rect">
-            <a:avLst/>
-          </a:prstGeom>
-          <a:noFill/>
-          <a:ln/>
-        </p:spPr>
-        <p:txBody>
-          <a:bodyPr wrap="square" rtlCol="0" anchor="ctr"/>
-          <a:lstStyle/>
-          <a:p>
-            <a:pPr marL="0" indent="0">
-              <a:buNone/>
-            </a:pPr>
-            <a:r>
-              <a:rPr lang="en-US" dirty="0">
-                <a:solidFill>
-                  <a:srgbClr val="222633"/>
-                </a:solidFill>
-                <a:latin typeface="Calibri" pitchFamily="34" charset="0"/>
-                <a:ea typeface="Calibri" pitchFamily="34" charset="-122"/>
-                <a:cs typeface="Calibri" pitchFamily="34" charset="-120"/>
-              </a:rPr>
               <a:t>•  지배구조·유동성·배당정책 등 정성적 요인 반영 (예: 코리아 디스카운트)</a:t>
             </a:r>
-            <a:endParaRPr lang="en-US" dirty="0"/>
+            <a:endParaRPr lang="en-US" sz="1350" dirty="0"/>
           </a:p>
         </p:txBody>
       </p:sp>
@@ -16650,7 +16155,7 @@
           <a:bodyPr wrap="square" rtlCol="0" anchor="ctr"/>
           <a:lstStyle/>
           <a:p>
-            <a:pPr marL="0" indent="0" algn="r">
+            <a:pPr algn="r" indent="0" marL="0">
               <a:buNone/>
             </a:pPr>
             <a:r>
@@ -16684,7 +16189,6 @@
         <a:solidFill>
           <a:srgbClr val="FFFFFF"/>
         </a:solidFill>
-        <a:effectLst/>
       </p:bgPr>
     </p:bg>
     <p:spTree>
@@ -16720,13 +16224,6 @@
           </a:solidFill>
           <a:ln/>
         </p:spPr>
-        <p:txBody>
-          <a:bodyPr/>
-          <a:lstStyle/>
-          <a:p>
-            <a:endParaRPr lang="ko-KR" altLang="en-US"/>
-          </a:p>
-        </p:txBody>
       </p:sp>
       <p:sp>
         <p:nvSpPr>
@@ -16749,11 +16246,11 @@
           <a:bodyPr wrap="square" rtlCol="0" anchor="ctr"/>
           <a:lstStyle/>
           <a:p>
-            <a:pPr marL="0" indent="0">
-              <a:buNone/>
-            </a:pPr>
-            <a:r>
-              <a:rPr lang="en-US" sz="1600" b="1" kern="0" spc="300" dirty="0">
+            <a:pPr indent="0" marL="0">
+              <a:buNone/>
+            </a:pPr>
+            <a:r>
+              <a:rPr lang="en-US" sz="1600" b="1" spc="300" kern="0" dirty="0">
                 <a:solidFill>
                   <a:srgbClr val="9C7A0A"/>
                 </a:solidFill>
@@ -16788,11 +16285,11 @@
           <a:bodyPr wrap="square" rtlCol="0" anchor="ctr"/>
           <a:lstStyle/>
           <a:p>
-            <a:pPr marL="0" indent="0">
-              <a:buNone/>
-            </a:pPr>
-            <a:r>
-              <a:rPr lang="en-US" sz="4000" b="1" dirty="0">
+            <a:pPr indent="0" marL="0">
+              <a:buNone/>
+            </a:pPr>
+            <a:r>
+              <a:rPr lang="en-US" sz="3600" b="1" dirty="0">
                 <a:solidFill>
                   <a:srgbClr val="1E2761"/>
                 </a:solidFill>
@@ -16802,7 +16299,7 @@
               </a:rPr>
               <a:t>EPS · PER · PBR · PSR · EV · EBITDA</a:t>
             </a:r>
-            <a:endParaRPr lang="en-US" sz="4000" dirty="0"/>
+            <a:endParaRPr lang="en-US" sz="3600" dirty="0"/>
           </a:p>
         </p:txBody>
       </p:sp>
@@ -16827,11 +16324,11 @@
           <a:bodyPr wrap="square" rtlCol="0" anchor="ctr"/>
           <a:lstStyle/>
           <a:p>
-            <a:pPr marL="0" indent="0">
-              <a:buNone/>
-            </a:pPr>
-            <a:r>
-              <a:rPr lang="en-US" sz="2000" dirty="0">
+            <a:pPr indent="0" marL="0">
+              <a:buNone/>
+            </a:pPr>
+            <a:r>
+              <a:rPr lang="en-US" sz="1700" dirty="0">
                 <a:solidFill>
                   <a:srgbClr val="5A5F73"/>
                 </a:solidFill>
@@ -16841,7 +16338,7 @@
               </a:rPr>
               <a:t>숫자 예시로 이해하는 핵심 밸류에이션 지표</a:t>
             </a:r>
-            <a:endParaRPr lang="en-US" sz="2000" dirty="0"/>
+            <a:endParaRPr lang="en-US" sz="1700" dirty="0"/>
           </a:p>
         </p:txBody>
       </p:sp>
@@ -17146,319 +16643,4 @@
     </a:ext>
   </a:extLst>
 </a:theme>
-</file>
-
-<file path=ppt/theme/theme2.xml><?xml version="1.0" encoding="utf-8"?>
-<a:theme xmlns:a="http://schemas.openxmlformats.org/drawingml/2006/main" name="Office 테마">
-  <a:themeElements>
-    <a:clrScheme name="Office">
-      <a:dk1>
-        <a:sysClr val="windowText" lastClr="000000"/>
-      </a:dk1>
-      <a:lt1>
-        <a:sysClr val="window" lastClr="FFFFFF"/>
-      </a:lt1>
-      <a:dk2>
-        <a:srgbClr val="0E2841"/>
-      </a:dk2>
-      <a:lt2>
-        <a:srgbClr val="E8E8E8"/>
-      </a:lt2>
-      <a:accent1>
-        <a:srgbClr val="156082"/>
-      </a:accent1>
-      <a:accent2>
-        <a:srgbClr val="E97132"/>
-      </a:accent2>
-      <a:accent3>
-        <a:srgbClr val="196B24"/>
-      </a:accent3>
-      <a:accent4>
-        <a:srgbClr val="0F9ED5"/>
-      </a:accent4>
-      <a:accent5>
-        <a:srgbClr val="A02B93"/>
-      </a:accent5>
-      <a:accent6>
-        <a:srgbClr val="4EA72E"/>
-      </a:accent6>
-      <a:hlink>
-        <a:srgbClr val="467886"/>
-      </a:hlink>
-      <a:folHlink>
-        <a:srgbClr val="96607D"/>
-      </a:folHlink>
-    </a:clrScheme>
-    <a:fontScheme name="Office">
-      <a:majorFont>
-        <a:latin typeface="맑은 고딕" panose="02110004020202020204"/>
-        <a:ea typeface=""/>
-        <a:cs typeface=""/>
-        <a:font script="Jpan" typeface="游ゴシック Light"/>
-        <a:font script="Hang" typeface="맑은 고딕"/>
-        <a:font script="Hans" typeface="等线 Light"/>
-        <a:font script="Hant" typeface="新細明體"/>
-        <a:font script="Arab" typeface="Times New Roman"/>
-        <a:font script="Hebr" typeface="Times New Roman"/>
-        <a:font script="Thai" typeface="Angsana New"/>
-        <a:font script="Ethi" typeface="Nyala"/>
-        <a:font script="Beng" typeface="Vrinda"/>
-        <a:font script="Gujr" typeface="Shruti"/>
-        <a:font script="Khmr" typeface="MoolBoran"/>
-        <a:font script="Knda" typeface="Tunga"/>
-        <a:font script="Guru" typeface="Raavi"/>
-        <a:font script="Cans" typeface="Euphemia"/>
-        <a:font script="Cher" typeface="Plantagenet Cherokee"/>
-        <a:font script="Yiii" typeface="Microsoft Yi Baiti"/>
-        <a:font script="Tibt" typeface="Microsoft Himalaya"/>
-        <a:font script="Thaa" typeface="MV Boli"/>
-        <a:font script="Deva" typeface="Mangal"/>
-        <a:font script="Telu" typeface="Gautami"/>
-        <a:font script="Taml" typeface="Latha"/>
-        <a:font script="Syrc" typeface="Estrangelo Edessa"/>
-        <a:font script="Orya" typeface="Kalinga"/>
-        <a:font script="Mlym" typeface="Kartika"/>
-        <a:font script="Laoo" typeface="DokChampa"/>
-        <a:font script="Sinh" typeface="Iskoola Pota"/>
-        <a:font script="Mong" typeface="Mongolian Baiti"/>
-        <a:font script="Viet" typeface="Times New Roman"/>
-        <a:font script="Uigh" typeface="Microsoft Uighur"/>
-        <a:font script="Geor" typeface="Sylfaen"/>
-        <a:font script="Armn" typeface="Arial"/>
-        <a:font script="Bugi" typeface="Leelawadee UI"/>
-        <a:font script="Bopo" typeface="Microsoft JhengHei"/>
-        <a:font script="Java" typeface="Javanese Text"/>
-        <a:font script="Lisu" typeface="Segoe UI"/>
-        <a:font script="Mymr" typeface="Myanmar Text"/>
-        <a:font script="Nkoo" typeface="Ebrima"/>
-        <a:font script="Olck" typeface="Nirmala UI"/>
-        <a:font script="Osma" typeface="Ebrima"/>
-        <a:font script="Phag" typeface="Phagspa"/>
-        <a:font script="Syrn" typeface="Estrangelo Edessa"/>
-        <a:font script="Syrj" typeface="Estrangelo Edessa"/>
-        <a:font script="Syre" typeface="Estrangelo Edessa"/>
-        <a:font script="Sora" typeface="Nirmala UI"/>
-        <a:font script="Tale" typeface="Microsoft Tai Le"/>
-        <a:font script="Talu" typeface="Microsoft New Tai Lue"/>
-        <a:font script="Tfng" typeface="Ebrima"/>
-      </a:majorFont>
-      <a:minorFont>
-        <a:latin typeface="맑은 고딕" panose="02110004020202020204"/>
-        <a:ea typeface=""/>
-        <a:cs typeface=""/>
-        <a:font script="Jpan" typeface="游ゴシック"/>
-        <a:font script="Hang" typeface="맑은 고딕"/>
-        <a:font script="Hans" typeface="等线"/>
-        <a:font script="Hant" typeface="新細明體"/>
-        <a:font script="Arab" typeface="Arial"/>
-        <a:font script="Hebr" typeface="Arial"/>
-        <a:font script="Thai" typeface="Cordia New"/>
-        <a:font script="Ethi" typeface="Nyala"/>
-        <a:font script="Beng" typeface="Vrinda"/>
-        <a:font script="Gujr" typeface="Shruti"/>
-        <a:font script="Khmr" typeface="DaunPenh"/>
-        <a:font script="Knda" typeface="Tunga"/>
-        <a:font script="Guru" typeface="Raavi"/>
-        <a:font script="Cans" typeface="Euphemia"/>
-        <a:font script="Cher" typeface="Plantagenet Cherokee"/>
-        <a:font script="Yiii" typeface="Microsoft Yi Baiti"/>
-        <a:font script="Tibt" typeface="Microsoft Himalaya"/>
-        <a:font script="Thaa" typeface="MV Boli"/>
-        <a:font script="Deva" typeface="Mangal"/>
-        <a:font script="Telu" typeface="Gautami"/>
-        <a:font script="Taml" typeface="Latha"/>
-        <a:font script="Syrc" typeface="Estrangelo Edessa"/>
-        <a:font script="Orya" typeface="Kalinga"/>
-        <a:font script="Mlym" typeface="Kartika"/>
-        <a:font script="Laoo" typeface="DokChampa"/>
-        <a:font script="Sinh" typeface="Iskoola Pota"/>
-        <a:font script="Mong" typeface="Mongolian Baiti"/>
-        <a:font script="Viet" typeface="Arial"/>
-        <a:font script="Uigh" typeface="Microsoft Uighur"/>
-        <a:font script="Geor" typeface="Sylfaen"/>
-        <a:font script="Armn" typeface="Arial"/>
-        <a:font script="Bugi" typeface="Leelawadee UI"/>
-        <a:font script="Bopo" typeface="Microsoft JhengHei"/>
-        <a:font script="Java" typeface="Javanese Text"/>
-        <a:font script="Lisu" typeface="Segoe UI"/>
-        <a:font script="Mymr" typeface="Myanmar Text"/>
-        <a:font script="Nkoo" typeface="Ebrima"/>
-        <a:font script="Olck" typeface="Nirmala UI"/>
-        <a:font script="Osma" typeface="Ebrima"/>
-        <a:font script="Phag" typeface="Phagspa"/>
-        <a:font script="Syrn" typeface="Estrangelo Edessa"/>
-        <a:font script="Syrj" typeface="Estrangelo Edessa"/>
-        <a:font script="Syre" typeface="Estrangelo Edessa"/>
-        <a:font script="Sora" typeface="Nirmala UI"/>
-        <a:font script="Tale" typeface="Microsoft Tai Le"/>
-        <a:font script="Talu" typeface="Microsoft New Tai Lue"/>
-        <a:font script="Tfng" typeface="Ebrima"/>
-      </a:minorFont>
-    </a:fontScheme>
-    <a:fmtScheme name="Office">
-      <a:fillStyleLst>
-        <a:solidFill>
-          <a:schemeClr val="phClr"/>
-        </a:solidFill>
-        <a:gradFill rotWithShape="1">
-          <a:gsLst>
-            <a:gs pos="0">
-              <a:schemeClr val="phClr">
-                <a:lumMod val="110000"/>
-                <a:satMod val="105000"/>
-                <a:tint val="67000"/>
-              </a:schemeClr>
-            </a:gs>
-            <a:gs pos="50000">
-              <a:schemeClr val="phClr">
-                <a:lumMod val="105000"/>
-                <a:satMod val="103000"/>
-                <a:tint val="73000"/>
-              </a:schemeClr>
-            </a:gs>
-            <a:gs pos="100000">
-              <a:schemeClr val="phClr">
-                <a:lumMod val="105000"/>
-                <a:satMod val="109000"/>
-                <a:tint val="81000"/>
-              </a:schemeClr>
-            </a:gs>
-          </a:gsLst>
-          <a:lin ang="5400000" scaled="0"/>
-        </a:gradFill>
-        <a:gradFill rotWithShape="1">
-          <a:gsLst>
-            <a:gs pos="0">
-              <a:schemeClr val="phClr">
-                <a:satMod val="103000"/>
-                <a:lumMod val="102000"/>
-                <a:tint val="94000"/>
-              </a:schemeClr>
-            </a:gs>
-            <a:gs pos="50000">
-              <a:schemeClr val="phClr">
-                <a:satMod val="110000"/>
-                <a:lumMod val="100000"/>
-                <a:shade val="100000"/>
-              </a:schemeClr>
-            </a:gs>
-            <a:gs pos="100000">
-              <a:schemeClr val="phClr">
-                <a:lumMod val="99000"/>
-                <a:satMod val="120000"/>
-                <a:shade val="78000"/>
-              </a:schemeClr>
-            </a:gs>
-          </a:gsLst>
-          <a:lin ang="5400000" scaled="0"/>
-        </a:gradFill>
-      </a:fillStyleLst>
-      <a:lnStyleLst>
-        <a:ln w="12700" cap="flat" cmpd="sng" algn="ctr">
-          <a:solidFill>
-            <a:schemeClr val="phClr"/>
-          </a:solidFill>
-          <a:prstDash val="solid"/>
-          <a:miter lim="800000"/>
-        </a:ln>
-        <a:ln w="19050" cap="flat" cmpd="sng" algn="ctr">
-          <a:solidFill>
-            <a:schemeClr val="phClr"/>
-          </a:solidFill>
-          <a:prstDash val="solid"/>
-          <a:miter lim="800000"/>
-        </a:ln>
-        <a:ln w="25400" cap="flat" cmpd="sng" algn="ctr">
-          <a:solidFill>
-            <a:schemeClr val="phClr"/>
-          </a:solidFill>
-          <a:prstDash val="solid"/>
-          <a:miter lim="800000"/>
-        </a:ln>
-      </a:lnStyleLst>
-      <a:effectStyleLst>
-        <a:effectStyle>
-          <a:effectLst/>
-        </a:effectStyle>
-        <a:effectStyle>
-          <a:effectLst/>
-        </a:effectStyle>
-        <a:effectStyle>
-          <a:effectLst>
-            <a:outerShdw blurRad="57150" dist="19050" dir="5400000" algn="ctr" rotWithShape="0">
-              <a:srgbClr val="000000">
-                <a:alpha val="63000"/>
-              </a:srgbClr>
-            </a:outerShdw>
-          </a:effectLst>
-        </a:effectStyle>
-      </a:effectStyleLst>
-      <a:bgFillStyleLst>
-        <a:solidFill>
-          <a:schemeClr val="phClr"/>
-        </a:solidFill>
-        <a:solidFill>
-          <a:schemeClr val="phClr">
-            <a:tint val="95000"/>
-            <a:satMod val="170000"/>
-          </a:schemeClr>
-        </a:solidFill>
-        <a:gradFill rotWithShape="1">
-          <a:gsLst>
-            <a:gs pos="0">
-              <a:schemeClr val="phClr">
-                <a:tint val="93000"/>
-                <a:satMod val="150000"/>
-                <a:shade val="98000"/>
-                <a:lumMod val="102000"/>
-              </a:schemeClr>
-            </a:gs>
-            <a:gs pos="50000">
-              <a:schemeClr val="phClr">
-                <a:tint val="98000"/>
-                <a:satMod val="130000"/>
-                <a:shade val="90000"/>
-                <a:lumMod val="103000"/>
-              </a:schemeClr>
-            </a:gs>
-            <a:gs pos="100000">
-              <a:schemeClr val="phClr">
-                <a:shade val="63000"/>
-                <a:satMod val="120000"/>
-              </a:schemeClr>
-            </a:gs>
-          </a:gsLst>
-          <a:lin ang="5400000" scaled="0"/>
-        </a:gradFill>
-      </a:bgFillStyleLst>
-    </a:fmtScheme>
-  </a:themeElements>
-  <a:objectDefaults>
-    <a:lnDef>
-      <a:spPr/>
-      <a:bodyPr/>
-      <a:lstStyle/>
-      <a:style>
-        <a:lnRef idx="2">
-          <a:schemeClr val="accent1"/>
-        </a:lnRef>
-        <a:fillRef idx="0">
-          <a:schemeClr val="accent1"/>
-        </a:fillRef>
-        <a:effectRef idx="1">
-          <a:schemeClr val="accent1"/>
-        </a:effectRef>
-        <a:fontRef idx="minor">
-          <a:schemeClr val="tx1"/>
-        </a:fontRef>
-      </a:style>
-    </a:lnDef>
-  </a:objectDefaults>
-  <a:extraClrSchemeLst/>
-  <a:extLst>
-    <a:ext uri="{05A4C25C-085E-4340-85A3-A5531E510DB2}">
-      <thm15:themeFamily xmlns:thm15="http://schemas.microsoft.com/office/thememl/2012/main" name="Office Theme" id="{2E142A2C-CD16-42D6-873A-C26D2A0506FA}" vid="{1BDDFF52-6CD6-40A5-AB3C-68EB2F1E4D0A}"/>
-    </a:ext>
-  </a:extLst>
-</a:theme>
 </file>